--- a/docs/ThrustVsExhaustVelocityAnalysis.pptx
+++ b/docs/ThrustVsExhaustVelocityAnalysis.pptx
@@ -6,10 +6,13 @@
   </p:sldMasterIdLst>
   <p:sldIdLst>
     <p:sldId id="260" r:id="rId2"/>
-    <p:sldId id="256" r:id="rId3"/>
-    <p:sldId id="259" r:id="rId4"/>
-    <p:sldId id="257" r:id="rId5"/>
-    <p:sldId id="258" r:id="rId6"/>
+    <p:sldId id="262" r:id="rId3"/>
+    <p:sldId id="263" r:id="rId4"/>
+    <p:sldId id="256" r:id="rId5"/>
+    <p:sldId id="259" r:id="rId6"/>
+    <p:sldId id="257" r:id="rId7"/>
+    <p:sldId id="258" r:id="rId8"/>
+    <p:sldId id="261" r:id="rId9"/>
   </p:sldIdLst>
   <p:sldSz cx="10691813" cy="7561263"/>
   <p:notesSz cx="6858000" cy="9144000"/>
@@ -108,6 +111,11 @@
       </a:defRPr>
     </a:lvl9pPr>
   </p:defaultTextStyle>
+  <p:extLst>
+    <p:ext uri="{EFAFB233-063F-42B5-8137-9DF3F51BA10A}">
+      <p15:sldGuideLst xmlns:p15="http://schemas.microsoft.com/office/powerpoint/2012/main"/>
+    </p:ext>
+  </p:extLst>
 </p:presentation>
 </file>
 
@@ -242,7 +250,7 @@
           <a:p>
             <a:fld id="{9412F206-934A-4AEB-8CDD-488D750A95A8}" type="datetimeFigureOut">
               <a:rPr lang="ru-RU" smtClean="0"/>
-              <a:t>26.03.2026</a:t>
+              <a:t>29.03.2026</a:t>
             </a:fld>
             <a:endParaRPr lang="ru-RU"/>
           </a:p>
@@ -412,7 +420,7 @@
           <a:p>
             <a:fld id="{9412F206-934A-4AEB-8CDD-488D750A95A8}" type="datetimeFigureOut">
               <a:rPr lang="ru-RU" smtClean="0"/>
-              <a:t>26.03.2026</a:t>
+              <a:t>29.03.2026</a:t>
             </a:fld>
             <a:endParaRPr lang="ru-RU"/>
           </a:p>
@@ -592,7 +600,7 @@
           <a:p>
             <a:fld id="{9412F206-934A-4AEB-8CDD-488D750A95A8}" type="datetimeFigureOut">
               <a:rPr lang="ru-RU" smtClean="0"/>
-              <a:t>26.03.2026</a:t>
+              <a:t>29.03.2026</a:t>
             </a:fld>
             <a:endParaRPr lang="ru-RU"/>
           </a:p>
@@ -762,7 +770,7 @@
           <a:p>
             <a:fld id="{9412F206-934A-4AEB-8CDD-488D750A95A8}" type="datetimeFigureOut">
               <a:rPr lang="ru-RU" smtClean="0"/>
-              <a:t>26.03.2026</a:t>
+              <a:t>29.03.2026</a:t>
             </a:fld>
             <a:endParaRPr lang="ru-RU"/>
           </a:p>
@@ -1006,7 +1014,7 @@
           <a:p>
             <a:fld id="{9412F206-934A-4AEB-8CDD-488D750A95A8}" type="datetimeFigureOut">
               <a:rPr lang="ru-RU" smtClean="0"/>
-              <a:t>26.03.2026</a:t>
+              <a:t>29.03.2026</a:t>
             </a:fld>
             <a:endParaRPr lang="ru-RU"/>
           </a:p>
@@ -1238,7 +1246,7 @@
           <a:p>
             <a:fld id="{9412F206-934A-4AEB-8CDD-488D750A95A8}" type="datetimeFigureOut">
               <a:rPr lang="ru-RU" smtClean="0"/>
-              <a:t>26.03.2026</a:t>
+              <a:t>29.03.2026</a:t>
             </a:fld>
             <a:endParaRPr lang="ru-RU"/>
           </a:p>
@@ -1605,7 +1613,7 @@
           <a:p>
             <a:fld id="{9412F206-934A-4AEB-8CDD-488D750A95A8}" type="datetimeFigureOut">
               <a:rPr lang="ru-RU" smtClean="0"/>
-              <a:t>26.03.2026</a:t>
+              <a:t>29.03.2026</a:t>
             </a:fld>
             <a:endParaRPr lang="ru-RU"/>
           </a:p>
@@ -1723,7 +1731,7 @@
           <a:p>
             <a:fld id="{9412F206-934A-4AEB-8CDD-488D750A95A8}" type="datetimeFigureOut">
               <a:rPr lang="ru-RU" smtClean="0"/>
-              <a:t>26.03.2026</a:t>
+              <a:t>29.03.2026</a:t>
             </a:fld>
             <a:endParaRPr lang="ru-RU"/>
           </a:p>
@@ -1818,7 +1826,7 @@
           <a:p>
             <a:fld id="{9412F206-934A-4AEB-8CDD-488D750A95A8}" type="datetimeFigureOut">
               <a:rPr lang="ru-RU" smtClean="0"/>
-              <a:t>26.03.2026</a:t>
+              <a:t>29.03.2026</a:t>
             </a:fld>
             <a:endParaRPr lang="ru-RU"/>
           </a:p>
@@ -2095,7 +2103,7 @@
           <a:p>
             <a:fld id="{9412F206-934A-4AEB-8CDD-488D750A95A8}" type="datetimeFigureOut">
               <a:rPr lang="ru-RU" smtClean="0"/>
-              <a:t>26.03.2026</a:t>
+              <a:t>29.03.2026</a:t>
             </a:fld>
             <a:endParaRPr lang="ru-RU"/>
           </a:p>
@@ -2352,7 +2360,7 @@
           <a:p>
             <a:fld id="{9412F206-934A-4AEB-8CDD-488D750A95A8}" type="datetimeFigureOut">
               <a:rPr lang="ru-RU" smtClean="0"/>
-              <a:t>26.03.2026</a:t>
+              <a:t>29.03.2026</a:t>
             </a:fld>
             <a:endParaRPr lang="ru-RU"/>
           </a:p>
@@ -2565,7 +2573,7 @@
           <a:p>
             <a:fld id="{9412F206-934A-4AEB-8CDD-488D750A95A8}" type="datetimeFigureOut">
               <a:rPr lang="ru-RU" smtClean="0"/>
-              <a:t>26.03.2026</a:t>
+              <a:t>29.03.2026</a:t>
             </a:fld>
             <a:endParaRPr lang="ru-RU"/>
           </a:p>
@@ -3099,7 +3107,7 @@
             <a:r>
               <a:rPr lang="en-US" sz="2000" b="0" dirty="0" err="1">
                 <a:solidFill>
-                  <a:srgbClr val="9CDCFE"/>
+                  <a:srgbClr val="00B0F0"/>
                 </a:solidFill>
                 <a:effectLst/>
                 <a:latin typeface="Consolas" panose="020B0609020204030204" pitchFamily="49" charset="0"/>
@@ -3119,12 +3127,22 @@
             <a:r>
               <a:rPr lang="en-US" sz="2000" b="0" dirty="0">
                 <a:solidFill>
+                  <a:srgbClr val="92D050"/>
+                </a:solidFill>
+                <a:effectLst/>
+                <a:latin typeface="Consolas" panose="020B0609020204030204" pitchFamily="49" charset="0"/>
+              </a:rPr>
+              <a:t>5000.0</a:t>
+            </a:r>
+            <a:r>
+              <a:rPr lang="en-US" sz="2000" b="0" dirty="0">
+                <a:solidFill>
                   <a:srgbClr val="B5CEA8"/>
                 </a:solidFill>
                 <a:effectLst/>
                 <a:latin typeface="Consolas" panose="020B0609020204030204" pitchFamily="49" charset="0"/>
               </a:rPr>
-              <a:t>5000.0     </a:t>
+              <a:t>     </a:t>
             </a:r>
             <a:r>
               <a:rPr lang="en-US" sz="2000" b="0" dirty="0">
@@ -3154,7 +3172,7 @@
             <a:r>
               <a:rPr lang="en-US" sz="2000" b="0" dirty="0" err="1">
                 <a:solidFill>
-                  <a:srgbClr val="9CDCFE"/>
+                  <a:srgbClr val="00B0F0"/>
                 </a:solidFill>
                 <a:effectLst/>
                 <a:latin typeface="Consolas" panose="020B0609020204030204" pitchFamily="49" charset="0"/>
@@ -3174,7 +3192,7 @@
             <a:r>
               <a:rPr lang="en-US" sz="2000" b="0" dirty="0">
                 <a:solidFill>
-                  <a:srgbClr val="B5CEA8"/>
+                  <a:srgbClr val="92D050"/>
                 </a:solidFill>
                 <a:effectLst/>
                 <a:latin typeface="Consolas" panose="020B0609020204030204" pitchFamily="49" charset="0"/>
@@ -3211,7 +3229,7 @@
             <a:r>
               <a:rPr lang="en-US" sz="2000" b="0" dirty="0" err="1">
                 <a:solidFill>
-                  <a:srgbClr val="9CDCFE"/>
+                  <a:srgbClr val="00B0F0"/>
                 </a:solidFill>
                 <a:effectLst/>
                 <a:latin typeface="Consolas" panose="020B0609020204030204" pitchFamily="49" charset="0"/>
@@ -3231,20 +3249,13 @@
             <a:r>
               <a:rPr lang="en-US" sz="2000" b="0" dirty="0">
                 <a:solidFill>
-                  <a:srgbClr val="B5CEA8"/>
+                  <a:srgbClr val="92D050"/>
                 </a:solidFill>
                 <a:effectLst/>
                 <a:latin typeface="Consolas" panose="020B0609020204030204" pitchFamily="49" charset="0"/>
               </a:rPr>
               <a:t>0.35</a:t>
             </a:r>
-            <a:endParaRPr lang="en-US" sz="2000" b="0" dirty="0">
-              <a:solidFill>
-                <a:srgbClr val="CCCCCC"/>
-              </a:solidFill>
-              <a:effectLst/>
-              <a:latin typeface="Consolas" panose="020B0609020204030204" pitchFamily="49" charset="0"/>
-            </a:endParaRPr>
           </a:p>
           <a:p>
             <a:pPr marL="0" indent="0">
@@ -3253,7 +3264,7 @@
             <a:r>
               <a:rPr lang="en-US" sz="2000" b="0" dirty="0" err="1">
                 <a:solidFill>
-                  <a:srgbClr val="9CDCFE"/>
+                  <a:srgbClr val="00B0F0"/>
                 </a:solidFill>
                 <a:effectLst/>
                 <a:latin typeface="Consolas" panose="020B0609020204030204" pitchFamily="49" charset="0"/>
@@ -3273,7 +3284,7 @@
             <a:r>
               <a:rPr lang="en-US" sz="2000" b="0" dirty="0">
                 <a:solidFill>
-                  <a:srgbClr val="B5CEA8"/>
+                  <a:srgbClr val="92D050"/>
                 </a:solidFill>
                 <a:effectLst/>
                 <a:latin typeface="Consolas" panose="020B0609020204030204" pitchFamily="49" charset="0"/>
@@ -3282,7 +3293,7 @@
             </a:r>
             <a:endParaRPr lang="ru-RU" sz="2000" b="0" dirty="0">
               <a:solidFill>
-                <a:srgbClr val="B5CEA8"/>
+                <a:srgbClr val="92D050"/>
               </a:solidFill>
               <a:effectLst/>
               <a:latin typeface="Consolas" panose="020B0609020204030204" pitchFamily="49" charset="0"/>
@@ -3307,7 +3318,7 @@
             <a:r>
               <a:rPr lang="en-US" sz="2000" b="0" dirty="0" err="1">
                 <a:solidFill>
-                  <a:srgbClr val="9CDCFE"/>
+                  <a:srgbClr val="00B0F0"/>
                 </a:solidFill>
                 <a:effectLst/>
                 <a:latin typeface="Consolas" panose="020B0609020204030204" pitchFamily="49" charset="0"/>
@@ -3347,7 +3358,7 @@
             <a:r>
               <a:rPr lang="en-US" sz="2000" b="0" dirty="0">
                 <a:solidFill>
-                  <a:srgbClr val="B5CEA8"/>
+                  <a:srgbClr val="92D050"/>
                 </a:solidFill>
                 <a:effectLst/>
                 <a:latin typeface="Consolas" panose="020B0609020204030204" pitchFamily="49" charset="0"/>
@@ -3367,7 +3378,7 @@
             <a:r>
               <a:rPr lang="en-US" sz="2000" b="0" dirty="0">
                 <a:solidFill>
-                  <a:srgbClr val="B5CEA8"/>
+                  <a:srgbClr val="92D050"/>
                 </a:solidFill>
                 <a:effectLst/>
                 <a:latin typeface="Consolas" panose="020B0609020204030204" pitchFamily="49" charset="0"/>
@@ -3387,7 +3398,7 @@
             <a:r>
               <a:rPr lang="en-US" sz="2000" b="0" dirty="0">
                 <a:solidFill>
-                  <a:srgbClr val="B5CEA8"/>
+                  <a:srgbClr val="92D050"/>
                 </a:solidFill>
                 <a:effectLst/>
                 <a:latin typeface="Consolas" panose="020B0609020204030204" pitchFamily="49" charset="0"/>
@@ -3439,7 +3450,7 @@
             <a:r>
               <a:rPr lang="en-US" sz="2000" b="0" dirty="0" err="1">
                 <a:solidFill>
-                  <a:srgbClr val="9CDCFE"/>
+                  <a:srgbClr val="00B0F0"/>
                 </a:solidFill>
                 <a:effectLst/>
                 <a:latin typeface="Consolas" panose="020B0609020204030204" pitchFamily="49" charset="0"/>
@@ -3479,7 +3490,7 @@
             <a:r>
               <a:rPr lang="en-US" sz="2000" b="0" dirty="0">
                 <a:solidFill>
-                  <a:srgbClr val="B5CEA8"/>
+                  <a:srgbClr val="92D050"/>
                 </a:solidFill>
                 <a:effectLst/>
                 <a:latin typeface="Consolas" panose="020B0609020204030204" pitchFamily="49" charset="0"/>
@@ -3499,7 +3510,7 @@
             <a:r>
               <a:rPr lang="en-US" sz="2000" b="0" dirty="0">
                 <a:solidFill>
-                  <a:srgbClr val="B5CEA8"/>
+                  <a:srgbClr val="92D050"/>
                 </a:solidFill>
                 <a:effectLst/>
                 <a:latin typeface="Consolas" panose="020B0609020204030204" pitchFamily="49" charset="0"/>
@@ -3519,7 +3530,7 @@
             <a:r>
               <a:rPr lang="en-US" sz="2000" b="0" dirty="0">
                 <a:solidFill>
-                  <a:srgbClr val="B5CEA8"/>
+                  <a:srgbClr val="92D050"/>
                 </a:solidFill>
                 <a:effectLst/>
                 <a:latin typeface="Consolas" panose="020B0609020204030204" pitchFamily="49" charset="0"/>
@@ -3580,7 +3591,7 @@
             <a:r>
               <a:rPr lang="en-US" sz="2000" b="0" dirty="0" err="1">
                 <a:solidFill>
-                  <a:srgbClr val="9CDCFE"/>
+                  <a:srgbClr val="00B0F0"/>
                 </a:solidFill>
                 <a:effectLst/>
                 <a:latin typeface="Consolas" panose="020B0609020204030204" pitchFamily="49" charset="0"/>
@@ -3620,7 +3631,7 @@
             <a:r>
               <a:rPr lang="en-US" sz="2000" b="0" dirty="0">
                 <a:solidFill>
-                  <a:srgbClr val="B5CEA8"/>
+                  <a:srgbClr val="92D050"/>
                 </a:solidFill>
                 <a:effectLst/>
                 <a:latin typeface="Consolas" panose="020B0609020204030204" pitchFamily="49" charset="0"/>
@@ -3640,7 +3651,7 @@
             <a:r>
               <a:rPr lang="en-US" sz="2000" b="0" dirty="0">
                 <a:solidFill>
-                  <a:srgbClr val="B5CEA8"/>
+                  <a:srgbClr val="92D050"/>
                 </a:solidFill>
                 <a:effectLst/>
                 <a:latin typeface="Consolas" panose="020B0609020204030204" pitchFamily="49" charset="0"/>
@@ -3660,7 +3671,7 @@
             <a:r>
               <a:rPr lang="en-US" sz="2000" b="0" dirty="0">
                 <a:solidFill>
-                  <a:srgbClr val="B5CEA8"/>
+                  <a:srgbClr val="92D050"/>
                 </a:solidFill>
                 <a:effectLst/>
                 <a:latin typeface="Consolas" panose="020B0609020204030204" pitchFamily="49" charset="0"/>
@@ -3680,7 +3691,7 @@
             <a:r>
               <a:rPr lang="en-US" sz="2000" b="0" dirty="0">
                 <a:solidFill>
-                  <a:srgbClr val="B5CEA8"/>
+                  <a:srgbClr val="92D050"/>
                 </a:solidFill>
                 <a:effectLst/>
                 <a:latin typeface="Consolas" panose="020B0609020204030204" pitchFamily="49" charset="0"/>
@@ -3722,7 +3733,7 @@
             <a:r>
               <a:rPr lang="en-US" sz="2000" b="0" dirty="0" err="1">
                 <a:solidFill>
-                  <a:srgbClr val="9CDCFE"/>
+                  <a:srgbClr val="00B0F0"/>
                 </a:solidFill>
                 <a:effectLst/>
                 <a:latin typeface="Consolas" panose="020B0609020204030204" pitchFamily="49" charset="0"/>
@@ -3762,7 +3773,7 @@
             <a:r>
               <a:rPr lang="en-US" sz="2000" b="0" dirty="0">
                 <a:solidFill>
-                  <a:srgbClr val="B5CEA8"/>
+                  <a:srgbClr val="92D050"/>
                 </a:solidFill>
                 <a:effectLst/>
                 <a:latin typeface="Consolas" panose="020B0609020204030204" pitchFamily="49" charset="0"/>
@@ -3782,7 +3793,7 @@
             <a:r>
               <a:rPr lang="en-US" sz="2000" b="0" dirty="0">
                 <a:solidFill>
-                  <a:srgbClr val="B5CEA8"/>
+                  <a:srgbClr val="92D050"/>
                 </a:solidFill>
                 <a:effectLst/>
                 <a:latin typeface="Consolas" panose="020B0609020204030204" pitchFamily="49" charset="0"/>
@@ -3802,7 +3813,7 @@
             <a:r>
               <a:rPr lang="en-US" sz="2000" b="0" dirty="0">
                 <a:solidFill>
-                  <a:srgbClr val="B5CEA8"/>
+                  <a:srgbClr val="92D050"/>
                 </a:solidFill>
                 <a:effectLst/>
                 <a:latin typeface="Consolas" panose="020B0609020204030204" pitchFamily="49" charset="0"/>
@@ -3822,7 +3833,7 @@
             <a:r>
               <a:rPr lang="en-US" sz="2000" b="0" dirty="0">
                 <a:solidFill>
-                  <a:srgbClr val="B5CEA8"/>
+                  <a:srgbClr val="92D050"/>
                 </a:solidFill>
                 <a:effectLst/>
                 <a:latin typeface="Consolas" panose="020B0609020204030204" pitchFamily="49" charset="0"/>
@@ -3883,21 +3894,6 @@
               <a:effectLst/>
               <a:latin typeface="Consolas" panose="020B0609020204030204" pitchFamily="49" charset="0"/>
             </a:endParaRPr>
-          </a:p>
-          <a:p>
-            <a:endParaRPr lang="en-US" b="0" dirty="0">
-              <a:solidFill>
-                <a:srgbClr val="CCCCCC"/>
-              </a:solidFill>
-              <a:effectLst/>
-              <a:latin typeface="Consolas" panose="020B0609020204030204" pitchFamily="49" charset="0"/>
-            </a:endParaRPr>
-          </a:p>
-          <a:p>
-            <a:pPr marL="0" indent="0">
-              <a:buNone/>
-            </a:pPr>
-            <a:endParaRPr lang="ru-RU" dirty="0"/>
           </a:p>
         </p:txBody>
       </p:sp>
@@ -3915,6 +3911,5495 @@
 </file>
 
 <file path=ppt/slides/slide2.xml><?xml version="1.0" encoding="utf-8"?>
+<p:sld xmlns:a="http://schemas.openxmlformats.org/drawingml/2006/main" xmlns:r="http://schemas.openxmlformats.org/officeDocument/2006/relationships" xmlns:p="http://schemas.openxmlformats.org/presentationml/2006/main">
+  <p:cSld>
+    <p:spTree>
+      <p:nvGrpSpPr>
+        <p:cNvPr id="1" name=""/>
+        <p:cNvGrpSpPr/>
+        <p:nvPr/>
+      </p:nvGrpSpPr>
+      <p:grpSpPr>
+        <a:xfrm>
+          <a:off x="0" y="0"/>
+          <a:ext cx="0" cy="0"/>
+          <a:chOff x="0" y="0"/>
+          <a:chExt cx="0" cy="0"/>
+        </a:xfrm>
+      </p:grpSpPr>
+      <mc:AlternateContent xmlns:mc="http://schemas.openxmlformats.org/markup-compatibility/2006">
+        <mc:Choice xmlns:a14="http://schemas.microsoft.com/office/drawing/2010/main" Requires="a14">
+          <p:sp>
+            <p:nvSpPr>
+              <p:cNvPr id="3" name="Объект 2">
+                <a:extLst>
+                  <a:ext uri="{FF2B5EF4-FFF2-40B4-BE49-F238E27FC236}">
+                    <a16:creationId xmlns:a16="http://schemas.microsoft.com/office/drawing/2014/main" id="{2417E645-FBFC-4179-B205-BCEA75B1970B}"/>
+                  </a:ext>
+                </a:extLst>
+              </p:cNvPr>
+              <p:cNvSpPr>
+                <a:spLocks noGrp="1"/>
+              </p:cNvSpPr>
+              <p:nvPr>
+                <p:ph idx="1"/>
+              </p:nvPr>
+            </p:nvSpPr>
+            <p:spPr>
+              <a:xfrm>
+                <a:off x="396474" y="345584"/>
+                <a:ext cx="3719494" cy="2224913"/>
+              </a:xfrm>
+              <a:ln>
+                <a:solidFill>
+                  <a:schemeClr val="tx1">
+                    <a:lumMod val="50000"/>
+                    <a:lumOff val="50000"/>
+                  </a:schemeClr>
+                </a:solidFill>
+              </a:ln>
+            </p:spPr>
+            <p:txBody>
+              <a:bodyPr>
+                <a:normAutofit/>
+              </a:bodyPr>
+              <a:lstStyle/>
+              <a:p>
+                <a:pPr marL="0" indent="0">
+                  <a:lnSpc>
+                    <a:spcPct val="100000"/>
+                  </a:lnSpc>
+                  <a:spcBef>
+                    <a:spcPts val="0"/>
+                  </a:spcBef>
+                  <a:spcAft>
+                    <a:spcPts val="600"/>
+                  </a:spcAft>
+                  <a:buNone/>
+                </a:pPr>
+                <a:r>
+                  <a:rPr lang="ru-RU" sz="1800" b="1" dirty="0">
+                    <a:solidFill>
+                      <a:schemeClr val="bg2">
+                        <a:lumMod val="25000"/>
+                      </a:schemeClr>
+                    </a:solidFill>
+                    <a:latin typeface="Calibri" panose="020F0502020204030204" pitchFamily="34" charset="0"/>
+                    <a:ea typeface="Calibri" panose="020F0502020204030204" pitchFamily="34" charset="0"/>
+                    <a:cs typeface="Calibri" panose="020F0502020204030204" pitchFamily="34" charset="0"/>
+                  </a:rPr>
+                  <a:t>Массовый расход топлива</a:t>
+                </a:r>
+                <a:endParaRPr lang="ru-RU" sz="1800" b="1" i="1" dirty="0">
+                  <a:effectLst/>
+                  <a:latin typeface="Cambria Math" panose="02040503050406030204" pitchFamily="18" charset="0"/>
+                  <a:ea typeface="Times New Roman" panose="02020603050405020304" pitchFamily="18" charset="0"/>
+                  <a:cs typeface="Calibri" panose="020F0502020204030204" pitchFamily="34" charset="0"/>
+                </a:endParaRPr>
+              </a:p>
+              <a:p>
+                <a:pPr marL="0" indent="0">
+                  <a:lnSpc>
+                    <a:spcPct val="100000"/>
+                  </a:lnSpc>
+                  <a:spcBef>
+                    <a:spcPts val="0"/>
+                  </a:spcBef>
+                  <a:spcAft>
+                    <a:spcPts val="600"/>
+                  </a:spcAft>
+                  <a:buNone/>
+                </a:pPr>
+                <a14:m>
+                  <m:oMathPara xmlns:m="http://schemas.openxmlformats.org/officeDocument/2006/math">
+                    <m:oMathParaPr>
+                      <m:jc m:val="centerGroup"/>
+                    </m:oMathParaPr>
+                    <m:oMath xmlns:m="http://schemas.openxmlformats.org/officeDocument/2006/math">
+                      <m:acc>
+                        <m:accPr>
+                          <m:chr m:val="̇"/>
+                          <m:ctrlPr>
+                            <a:rPr lang="ru-RU" sz="1800" i="1" smtClean="0">
+                              <a:effectLst/>
+                              <a:latin typeface="Cambria Math" panose="02040503050406030204" pitchFamily="18" charset="0"/>
+                              <a:ea typeface="Times New Roman" panose="02020603050405020304" pitchFamily="18" charset="0"/>
+                              <a:cs typeface="Calibri" panose="020F0502020204030204" pitchFamily="34" charset="0"/>
+                            </a:rPr>
+                          </m:ctrlPr>
+                        </m:accPr>
+                        <m:e>
+                          <m:r>
+                            <a:rPr lang="ru-RU" sz="1800" i="1">
+                              <a:effectLst/>
+                              <a:latin typeface="Cambria Math" panose="02040503050406030204" pitchFamily="18" charset="0"/>
+                              <a:ea typeface="Times New Roman" panose="02020603050405020304" pitchFamily="18" charset="0"/>
+                              <a:cs typeface="Calibri" panose="020F0502020204030204" pitchFamily="34" charset="0"/>
+                            </a:rPr>
+                            <m:t>𝑚</m:t>
+                          </m:r>
+                        </m:e>
+                      </m:acc>
+                      <m:r>
+                        <a:rPr lang="ru-RU" sz="1800" i="1">
+                          <a:effectLst/>
+                          <a:latin typeface="Cambria Math" panose="02040503050406030204" pitchFamily="18" charset="0"/>
+                          <a:ea typeface="Times New Roman" panose="02020603050405020304" pitchFamily="18" charset="0"/>
+                          <a:cs typeface="Calibri" panose="020F0502020204030204" pitchFamily="34" charset="0"/>
+                        </a:rPr>
+                        <m:t>=</m:t>
+                      </m:r>
+                      <m:f>
+                        <m:fPr>
+                          <m:ctrlPr>
+                            <a:rPr lang="ru-RU" sz="1800" i="1">
+                              <a:effectLst/>
+                              <a:latin typeface="Cambria Math" panose="02040503050406030204" pitchFamily="18" charset="0"/>
+                              <a:ea typeface="Times New Roman" panose="02020603050405020304" pitchFamily="18" charset="0"/>
+                              <a:cs typeface="Calibri" panose="020F0502020204030204" pitchFamily="34" charset="0"/>
+                            </a:rPr>
+                          </m:ctrlPr>
+                        </m:fPr>
+                        <m:num>
+                          <m:r>
+                            <a:rPr lang="ru-RU" sz="1800" i="1">
+                              <a:effectLst/>
+                              <a:latin typeface="Cambria Math" panose="02040503050406030204" pitchFamily="18" charset="0"/>
+                              <a:ea typeface="Times New Roman" panose="02020603050405020304" pitchFamily="18" charset="0"/>
+                              <a:cs typeface="Calibri" panose="020F0502020204030204" pitchFamily="34" charset="0"/>
+                            </a:rPr>
+                            <m:t>𝐹</m:t>
+                          </m:r>
+                        </m:num>
+                        <m:den>
+                          <m:sSub>
+                            <m:sSubPr>
+                              <m:ctrlPr>
+                                <a:rPr lang="ru-RU" sz="1800" i="1">
+                                  <a:effectLst/>
+                                  <a:latin typeface="Cambria Math" panose="02040503050406030204" pitchFamily="18" charset="0"/>
+                                  <a:ea typeface="Times New Roman" panose="02020603050405020304" pitchFamily="18" charset="0"/>
+                                  <a:cs typeface="Calibri" panose="020F0502020204030204" pitchFamily="34" charset="0"/>
+                                </a:rPr>
+                              </m:ctrlPr>
+                            </m:sSubPr>
+                            <m:e>
+                              <m:r>
+                                <a:rPr lang="ru-RU" sz="1800" i="1">
+                                  <a:effectLst/>
+                                  <a:latin typeface="Cambria Math" panose="02040503050406030204" pitchFamily="18" charset="0"/>
+                                  <a:ea typeface="Times New Roman" panose="02020603050405020304" pitchFamily="18" charset="0"/>
+                                  <a:cs typeface="Calibri" panose="020F0502020204030204" pitchFamily="34" charset="0"/>
+                                </a:rPr>
+                                <m:t>𝑣</m:t>
+                              </m:r>
+                            </m:e>
+                            <m:sub>
+                              <m:r>
+                                <a:rPr lang="ru-RU" sz="1800" i="1">
+                                  <a:effectLst/>
+                                  <a:latin typeface="Cambria Math" panose="02040503050406030204" pitchFamily="18" charset="0"/>
+                                  <a:ea typeface="Times New Roman" panose="02020603050405020304" pitchFamily="18" charset="0"/>
+                                  <a:cs typeface="Calibri" panose="020F0502020204030204" pitchFamily="34" charset="0"/>
+                                </a:rPr>
+                                <m:t>𝑒</m:t>
+                              </m:r>
+                            </m:sub>
+                          </m:sSub>
+                        </m:den>
+                      </m:f>
+                    </m:oMath>
+                  </m:oMathPara>
+                </a14:m>
+                <a:endParaRPr lang="ru-RU" sz="1800" dirty="0">
+                  <a:effectLst/>
+                  <a:latin typeface="Times New Roman" panose="02020603050405020304" pitchFamily="18" charset="0"/>
+                  <a:ea typeface="Times New Roman" panose="02020603050405020304" pitchFamily="18" charset="0"/>
+                </a:endParaRPr>
+              </a:p>
+              <a:p>
+                <a:pPr marL="0" indent="0">
+                  <a:lnSpc>
+                    <a:spcPct val="100000"/>
+                  </a:lnSpc>
+                  <a:spcBef>
+                    <a:spcPts val="0"/>
+                  </a:spcBef>
+                  <a:spcAft>
+                    <a:spcPts val="600"/>
+                  </a:spcAft>
+                  <a:buNone/>
+                </a:pPr>
+                <a:r>
+                  <a:rPr lang="ru-RU" sz="1800" dirty="0">
+                    <a:effectLst/>
+                    <a:latin typeface="Calibri" panose="020F0502020204030204" pitchFamily="34" charset="0"/>
+                    <a:ea typeface="Times New Roman" panose="02020603050405020304" pitchFamily="18" charset="0"/>
+                  </a:rPr>
+                  <a:t>- </a:t>
+                </a:r>
+                <a14:m>
+                  <m:oMath xmlns:m="http://schemas.openxmlformats.org/officeDocument/2006/math">
+                    <m:r>
+                      <m:rPr>
+                        <m:lit/>
+                      </m:rPr>
+                      <a:rPr lang="ru-RU" sz="1800" i="1">
+                        <a:effectLst/>
+                        <a:latin typeface="Cambria Math" panose="02040503050406030204" pitchFamily="18" charset="0"/>
+                        <a:ea typeface="Times New Roman" panose="02020603050405020304" pitchFamily="18" charset="0"/>
+                        <a:cs typeface="Calibri" panose="020F0502020204030204" pitchFamily="34" charset="0"/>
+                      </a:rPr>
+                      <m:t>(</m:t>
+                    </m:r>
+                    <m:acc>
+                      <m:accPr>
+                        <m:chr m:val="̇"/>
+                        <m:ctrlPr>
+                          <a:rPr lang="ru-RU" sz="1800" i="1">
+                            <a:effectLst/>
+                            <a:latin typeface="Cambria Math" panose="02040503050406030204" pitchFamily="18" charset="0"/>
+                            <a:ea typeface="Times New Roman" panose="02020603050405020304" pitchFamily="18" charset="0"/>
+                            <a:cs typeface="Calibri" panose="020F0502020204030204" pitchFamily="34" charset="0"/>
+                          </a:rPr>
+                        </m:ctrlPr>
+                      </m:accPr>
+                      <m:e>
+                        <m:r>
+                          <a:rPr lang="ru-RU" sz="1800" i="1">
+                            <a:effectLst/>
+                            <a:latin typeface="Cambria Math" panose="02040503050406030204" pitchFamily="18" charset="0"/>
+                            <a:ea typeface="Times New Roman" panose="02020603050405020304" pitchFamily="18" charset="0"/>
+                            <a:cs typeface="Calibri" panose="020F0502020204030204" pitchFamily="34" charset="0"/>
+                          </a:rPr>
+                          <m:t>𝑚</m:t>
+                        </m:r>
+                      </m:e>
+                    </m:acc>
+                    <m:r>
+                      <m:rPr>
+                        <m:lit/>
+                      </m:rPr>
+                      <a:rPr lang="ru-RU" sz="1800" i="1">
+                        <a:effectLst/>
+                        <a:latin typeface="Cambria Math" panose="02040503050406030204" pitchFamily="18" charset="0"/>
+                        <a:ea typeface="Times New Roman" panose="02020603050405020304" pitchFamily="18" charset="0"/>
+                        <a:cs typeface="Calibri" panose="020F0502020204030204" pitchFamily="34" charset="0"/>
+                      </a:rPr>
+                      <m:t>)</m:t>
+                    </m:r>
+                  </m:oMath>
+                </a14:m>
+                <a:r>
+                  <a:rPr lang="ru-RU" sz="1800" dirty="0">
+                    <a:effectLst/>
+                    <a:latin typeface="Calibri" panose="020F0502020204030204" pitchFamily="34" charset="0"/>
+                    <a:ea typeface="Times New Roman" panose="02020603050405020304" pitchFamily="18" charset="0"/>
+                  </a:rPr>
+                  <a:t> — массовый расход (кг/с) </a:t>
+                </a:r>
+                <a:endParaRPr lang="ru-RU" sz="1800" dirty="0">
+                  <a:effectLst/>
+                  <a:latin typeface="Times New Roman" panose="02020603050405020304" pitchFamily="18" charset="0"/>
+                  <a:ea typeface="Times New Roman" panose="02020603050405020304" pitchFamily="18" charset="0"/>
+                </a:endParaRPr>
+              </a:p>
+              <a:p>
+                <a:pPr marL="0" indent="0">
+                  <a:lnSpc>
+                    <a:spcPct val="100000"/>
+                  </a:lnSpc>
+                  <a:spcBef>
+                    <a:spcPts val="0"/>
+                  </a:spcBef>
+                  <a:spcAft>
+                    <a:spcPts val="600"/>
+                  </a:spcAft>
+                  <a:buNone/>
+                </a:pPr>
+                <a:r>
+                  <a:rPr lang="ru-RU" sz="1800" dirty="0">
+                    <a:effectLst/>
+                    <a:latin typeface="Calibri" panose="020F0502020204030204" pitchFamily="34" charset="0"/>
+                    <a:ea typeface="Times New Roman" panose="02020603050405020304" pitchFamily="18" charset="0"/>
+                  </a:rPr>
+                  <a:t>- </a:t>
+                </a:r>
+                <a14:m>
+                  <m:oMath xmlns:m="http://schemas.openxmlformats.org/officeDocument/2006/math">
+                    <m:r>
+                      <a:rPr lang="ru-RU" sz="1800" i="1">
+                        <a:effectLst/>
+                        <a:latin typeface="Cambria Math" panose="02040503050406030204" pitchFamily="18" charset="0"/>
+                        <a:ea typeface="Times New Roman" panose="02020603050405020304" pitchFamily="18" charset="0"/>
+                        <a:cs typeface="Calibri" panose="020F0502020204030204" pitchFamily="34" charset="0"/>
+                      </a:rPr>
+                      <m:t>(</m:t>
+                    </m:r>
+                    <m:r>
+                      <a:rPr lang="ru-RU" sz="1800" i="1">
+                        <a:effectLst/>
+                        <a:latin typeface="Cambria Math" panose="02040503050406030204" pitchFamily="18" charset="0"/>
+                        <a:ea typeface="Times New Roman" panose="02020603050405020304" pitchFamily="18" charset="0"/>
+                        <a:cs typeface="Calibri" panose="020F0502020204030204" pitchFamily="34" charset="0"/>
+                      </a:rPr>
+                      <m:t>𝐹</m:t>
+                    </m:r>
+                    <m:r>
+                      <m:rPr>
+                        <m:lit/>
+                      </m:rPr>
+                      <a:rPr lang="ru-RU" sz="1800" i="1">
+                        <a:effectLst/>
+                        <a:latin typeface="Cambria Math" panose="02040503050406030204" pitchFamily="18" charset="0"/>
+                        <a:ea typeface="Times New Roman" panose="02020603050405020304" pitchFamily="18" charset="0"/>
+                        <a:cs typeface="Calibri" panose="020F0502020204030204" pitchFamily="34" charset="0"/>
+                      </a:rPr>
+                      <m:t>)</m:t>
+                    </m:r>
+                  </m:oMath>
+                </a14:m>
+                <a:r>
+                  <a:rPr lang="ru-RU" sz="1800" dirty="0">
+                    <a:effectLst/>
+                    <a:latin typeface="Calibri" panose="020F0502020204030204" pitchFamily="34" charset="0"/>
+                    <a:ea typeface="Times New Roman" panose="02020603050405020304" pitchFamily="18" charset="0"/>
+                  </a:rPr>
+                  <a:t> — тяга двигателя (Н) </a:t>
+                </a:r>
+                <a:endParaRPr lang="ru-RU" sz="1800" dirty="0">
+                  <a:effectLst/>
+                  <a:latin typeface="Times New Roman" panose="02020603050405020304" pitchFamily="18" charset="0"/>
+                  <a:ea typeface="Times New Roman" panose="02020603050405020304" pitchFamily="18" charset="0"/>
+                </a:endParaRPr>
+              </a:p>
+              <a:p>
+                <a:pPr marL="0" indent="0">
+                  <a:lnSpc>
+                    <a:spcPct val="100000"/>
+                  </a:lnSpc>
+                  <a:spcBef>
+                    <a:spcPts val="0"/>
+                  </a:spcBef>
+                  <a:spcAft>
+                    <a:spcPts val="600"/>
+                  </a:spcAft>
+                  <a:buNone/>
+                </a:pPr>
+                <a:r>
+                  <a:rPr lang="ru-RU" sz="1800" b="0" dirty="0">
+                    <a:effectLst/>
+                    <a:ea typeface="Times New Roman" panose="02020603050405020304" pitchFamily="18" charset="0"/>
+                    <a:cs typeface="Calibri" panose="020F0502020204030204" pitchFamily="34" charset="0"/>
+                  </a:rPr>
+                  <a:t>-</a:t>
+                </a:r>
+                <a14:m>
+                  <m:oMath xmlns:m="http://schemas.openxmlformats.org/officeDocument/2006/math">
+                    <m:r>
+                      <a:rPr lang="ru-RU" sz="1800" b="0" i="1" smtClean="0">
+                        <a:effectLst/>
+                        <a:latin typeface="Cambria Math" panose="02040503050406030204" pitchFamily="18" charset="0"/>
+                        <a:ea typeface="Times New Roman" panose="02020603050405020304" pitchFamily="18" charset="0"/>
+                        <a:cs typeface="Calibri" panose="020F0502020204030204" pitchFamily="34" charset="0"/>
+                      </a:rPr>
+                      <m:t> </m:t>
+                    </m:r>
+                    <m:r>
+                      <m:rPr>
+                        <m:lit/>
+                      </m:rPr>
+                      <a:rPr lang="ru-RU" sz="1800" i="1">
+                        <a:effectLst/>
+                        <a:latin typeface="Cambria Math" panose="02040503050406030204" pitchFamily="18" charset="0"/>
+                        <a:ea typeface="Times New Roman" panose="02020603050405020304" pitchFamily="18" charset="0"/>
+                        <a:cs typeface="Calibri" panose="020F0502020204030204" pitchFamily="34" charset="0"/>
+                      </a:rPr>
+                      <m:t>(</m:t>
+                    </m:r>
+                    <m:sSub>
+                      <m:sSubPr>
+                        <m:ctrlPr>
+                          <a:rPr lang="ru-RU" sz="1800" i="1">
+                            <a:effectLst/>
+                            <a:latin typeface="Cambria Math" panose="02040503050406030204" pitchFamily="18" charset="0"/>
+                            <a:ea typeface="Times New Roman" panose="02020603050405020304" pitchFamily="18" charset="0"/>
+                            <a:cs typeface="Calibri" panose="020F0502020204030204" pitchFamily="34" charset="0"/>
+                          </a:rPr>
+                        </m:ctrlPr>
+                      </m:sSubPr>
+                      <m:e>
+                        <m:r>
+                          <a:rPr lang="ru-RU" sz="1800" i="1">
+                            <a:effectLst/>
+                            <a:latin typeface="Cambria Math" panose="02040503050406030204" pitchFamily="18" charset="0"/>
+                            <a:ea typeface="Times New Roman" panose="02020603050405020304" pitchFamily="18" charset="0"/>
+                            <a:cs typeface="Calibri" panose="020F0502020204030204" pitchFamily="34" charset="0"/>
+                          </a:rPr>
+                          <m:t>𝑣</m:t>
+                        </m:r>
+                      </m:e>
+                      <m:sub>
+                        <m:r>
+                          <a:rPr lang="ru-RU" sz="1800" i="1">
+                            <a:effectLst/>
+                            <a:latin typeface="Cambria Math" panose="02040503050406030204" pitchFamily="18" charset="0"/>
+                            <a:ea typeface="Times New Roman" panose="02020603050405020304" pitchFamily="18" charset="0"/>
+                            <a:cs typeface="Calibri" panose="020F0502020204030204" pitchFamily="34" charset="0"/>
+                          </a:rPr>
+                          <m:t>𝑒</m:t>
+                        </m:r>
+                      </m:sub>
+                    </m:sSub>
+                    <m:r>
+                      <m:rPr>
+                        <m:lit/>
+                      </m:rPr>
+                      <a:rPr lang="ru-RU" sz="1800" i="1">
+                        <a:effectLst/>
+                        <a:latin typeface="Cambria Math" panose="02040503050406030204" pitchFamily="18" charset="0"/>
+                        <a:ea typeface="Times New Roman" panose="02020603050405020304" pitchFamily="18" charset="0"/>
+                        <a:cs typeface="Calibri" panose="020F0502020204030204" pitchFamily="34" charset="0"/>
+                      </a:rPr>
+                      <m:t>)</m:t>
+                    </m:r>
+                  </m:oMath>
+                </a14:m>
+                <a:r>
+                  <a:rPr lang="ru-RU" sz="1800" dirty="0">
+                    <a:effectLst/>
+                    <a:latin typeface="Calibri" panose="020F0502020204030204" pitchFamily="34" charset="0"/>
+                    <a:ea typeface="Times New Roman" panose="02020603050405020304" pitchFamily="18" charset="0"/>
+                  </a:rPr>
+                  <a:t> — скорость истечения (м/с)</a:t>
+                </a:r>
+              </a:p>
+              <a:p>
+                <a:pPr>
+                  <a:lnSpc>
+                    <a:spcPct val="100000"/>
+                  </a:lnSpc>
+                  <a:spcBef>
+                    <a:spcPts val="0"/>
+                  </a:spcBef>
+                  <a:spcAft>
+                    <a:spcPts val="600"/>
+                  </a:spcAft>
+                  <a:buFontTx/>
+                  <a:buChar char="-"/>
+                </a:pPr>
+                <a:endParaRPr lang="ru-RU" sz="1800" dirty="0">
+                  <a:latin typeface="Calibri" panose="020F0502020204030204" pitchFamily="34" charset="0"/>
+                  <a:ea typeface="Times New Roman" panose="02020603050405020304" pitchFamily="18" charset="0"/>
+                </a:endParaRPr>
+              </a:p>
+              <a:p>
+                <a:pPr>
+                  <a:lnSpc>
+                    <a:spcPct val="100000"/>
+                  </a:lnSpc>
+                  <a:spcBef>
+                    <a:spcPts val="0"/>
+                  </a:spcBef>
+                  <a:spcAft>
+                    <a:spcPts val="600"/>
+                  </a:spcAft>
+                  <a:buFontTx/>
+                  <a:buChar char="-"/>
+                </a:pPr>
+                <a:endParaRPr lang="ru-RU" sz="1800" dirty="0">
+                  <a:effectLst/>
+                  <a:latin typeface="Times New Roman" panose="02020603050405020304" pitchFamily="18" charset="0"/>
+                  <a:ea typeface="Times New Roman" panose="02020603050405020304" pitchFamily="18" charset="0"/>
+                </a:endParaRPr>
+              </a:p>
+              <a:p>
+                <a:pPr marL="0" indent="0">
+                  <a:lnSpc>
+                    <a:spcPct val="100000"/>
+                  </a:lnSpc>
+                  <a:spcBef>
+                    <a:spcPts val="0"/>
+                  </a:spcBef>
+                  <a:buNone/>
+                </a:pPr>
+                <a:endParaRPr lang="ru-RU" dirty="0"/>
+              </a:p>
+            </p:txBody>
+          </p:sp>
+        </mc:Choice>
+        <mc:Fallback>
+          <p:sp>
+            <p:nvSpPr>
+              <p:cNvPr id="3" name="Объект 2">
+                <a:extLst>
+                  <a:ext uri="{FF2B5EF4-FFF2-40B4-BE49-F238E27FC236}">
+                    <a16:creationId xmlns:a16="http://schemas.microsoft.com/office/drawing/2014/main" id="{2417E645-FBFC-4179-B205-BCEA75B1970B}"/>
+                  </a:ext>
+                </a:extLst>
+              </p:cNvPr>
+              <p:cNvSpPr>
+                <a:spLocks noGrp="1" noRot="1" noChangeAspect="1" noMove="1" noResize="1" noEditPoints="1" noAdjustHandles="1" noChangeArrowheads="1" noChangeShapeType="1" noTextEdit="1"/>
+              </p:cNvSpPr>
+              <p:nvPr>
+                <p:ph idx="1"/>
+              </p:nvPr>
+            </p:nvSpPr>
+            <p:spPr>
+              <a:xfrm>
+                <a:off x="396474" y="345584"/>
+                <a:ext cx="3719494" cy="2224913"/>
+              </a:xfrm>
+              <a:blipFill>
+                <a:blip r:embed="rId2"/>
+                <a:stretch>
+                  <a:fillRect l="-1144" t="-1362"/>
+                </a:stretch>
+              </a:blipFill>
+              <a:ln>
+                <a:solidFill>
+                  <a:schemeClr val="tx1">
+                    <a:lumMod val="50000"/>
+                    <a:lumOff val="50000"/>
+                  </a:schemeClr>
+                </a:solidFill>
+              </a:ln>
+            </p:spPr>
+            <p:txBody>
+              <a:bodyPr/>
+              <a:lstStyle/>
+              <a:p>
+                <a:r>
+                  <a:rPr lang="ru-RU">
+                    <a:noFill/>
+                  </a:rPr>
+                  <a:t> </a:t>
+                </a:r>
+              </a:p>
+            </p:txBody>
+          </p:sp>
+        </mc:Fallback>
+      </mc:AlternateContent>
+      <mc:AlternateContent xmlns:mc="http://schemas.openxmlformats.org/markup-compatibility/2006">
+        <mc:Choice xmlns:a14="http://schemas.microsoft.com/office/drawing/2010/main" Requires="a14">
+          <p:sp>
+            <p:nvSpPr>
+              <p:cNvPr id="5" name="TextBox 4">
+                <a:extLst>
+                  <a:ext uri="{FF2B5EF4-FFF2-40B4-BE49-F238E27FC236}">
+                    <a16:creationId xmlns:a16="http://schemas.microsoft.com/office/drawing/2014/main" id="{684BC9F1-2AD5-4AC6-9622-348ABE77C287}"/>
+                  </a:ext>
+                </a:extLst>
+              </p:cNvPr>
+              <p:cNvSpPr txBox="1"/>
+              <p:nvPr/>
+            </p:nvSpPr>
+            <p:spPr>
+              <a:xfrm>
+                <a:off x="4473777" y="285893"/>
+                <a:ext cx="5737480" cy="1999137"/>
+              </a:xfrm>
+              <a:prstGeom prst="rect">
+                <a:avLst/>
+              </a:prstGeom>
+              <a:noFill/>
+              <a:ln>
+                <a:solidFill>
+                  <a:schemeClr val="tx1">
+                    <a:lumMod val="50000"/>
+                    <a:lumOff val="50000"/>
+                  </a:schemeClr>
+                </a:solidFill>
+              </a:ln>
+            </p:spPr>
+            <p:txBody>
+              <a:bodyPr wrap="square">
+                <a:spAutoFit/>
+              </a:bodyPr>
+              <a:lstStyle/>
+              <a:p>
+                <a:pPr marL="0" indent="0">
+                  <a:spcAft>
+                    <a:spcPts val="600"/>
+                  </a:spcAft>
+                  <a:buNone/>
+                </a:pPr>
+                <a:r>
+                  <a:rPr lang="ru-RU" sz="1800" b="1" dirty="0">
+                    <a:effectLst/>
+                    <a:latin typeface="Calibri" panose="020F0502020204030204" pitchFamily="34" charset="0"/>
+                    <a:ea typeface="Times New Roman" panose="02020603050405020304" pitchFamily="18" charset="0"/>
+                  </a:rPr>
+                  <a:t>Структурная масса ступени </a:t>
+                </a:r>
+                <a:endParaRPr lang="ru-RU" sz="1800" dirty="0">
+                  <a:effectLst/>
+                  <a:latin typeface="Times New Roman" panose="02020603050405020304" pitchFamily="18" charset="0"/>
+                  <a:ea typeface="Times New Roman" panose="02020603050405020304" pitchFamily="18" charset="0"/>
+                </a:endParaRPr>
+              </a:p>
+              <a:p>
+                <a:pPr marL="0" indent="0">
+                  <a:spcAft>
+                    <a:spcPts val="600"/>
+                  </a:spcAft>
+                  <a:buNone/>
+                </a:pPr>
+                <a14:m>
+                  <m:oMathPara xmlns:m="http://schemas.openxmlformats.org/officeDocument/2006/math">
+                    <m:oMathParaPr>
+                      <m:jc m:val="centerGroup"/>
+                    </m:oMathParaPr>
+                    <m:oMath xmlns:m="http://schemas.openxmlformats.org/officeDocument/2006/math">
+                      <m:sSub>
+                        <m:sSubPr>
+                          <m:ctrlPr>
+                            <a:rPr lang="ru-RU" sz="1800" i="1">
+                              <a:effectLst/>
+                              <a:latin typeface="Cambria Math" panose="02040503050406030204" pitchFamily="18" charset="0"/>
+                              <a:ea typeface="Cambria Math" panose="02040503050406030204" pitchFamily="18" charset="0"/>
+                              <a:cs typeface="Calibri" panose="020F0502020204030204" pitchFamily="34" charset="0"/>
+                            </a:rPr>
+                          </m:ctrlPr>
+                        </m:sSubPr>
+                        <m:e>
+                          <m:r>
+                            <a:rPr lang="en-US" sz="1800" i="1">
+                              <a:effectLst/>
+                              <a:latin typeface="Cambria Math" panose="02040503050406030204" pitchFamily="18" charset="0"/>
+                              <a:ea typeface="Cambria Math" panose="02040503050406030204" pitchFamily="18" charset="0"/>
+                              <a:cs typeface="Calibri" panose="020F0502020204030204" pitchFamily="34" charset="0"/>
+                            </a:rPr>
+                            <m:t>𝑚</m:t>
+                          </m:r>
+                        </m:e>
+                        <m:sub>
+                          <m:r>
+                            <a:rPr lang="en-US" sz="1800" i="1">
+                              <a:effectLst/>
+                              <a:latin typeface="Cambria Math" panose="02040503050406030204" pitchFamily="18" charset="0"/>
+                              <a:ea typeface="Cambria Math" panose="02040503050406030204" pitchFamily="18" charset="0"/>
+                              <a:cs typeface="Calibri" panose="020F0502020204030204" pitchFamily="34" charset="0"/>
+                            </a:rPr>
+                            <m:t>𝑠</m:t>
+                          </m:r>
+                        </m:sub>
+                      </m:sSub>
+                      <m:r>
+                        <a:rPr lang="ru-RU" sz="1800" i="1">
+                          <a:effectLst/>
+                          <a:latin typeface="Cambria Math" panose="02040503050406030204" pitchFamily="18" charset="0"/>
+                          <a:ea typeface="Cambria Math" panose="02040503050406030204" pitchFamily="18" charset="0"/>
+                          <a:cs typeface="Calibri" panose="020F0502020204030204" pitchFamily="34" charset="0"/>
+                        </a:rPr>
+                        <m:t>=</m:t>
+                      </m:r>
+                      <m:f>
+                        <m:fPr>
+                          <m:ctrlPr>
+                            <a:rPr lang="ru-RU" sz="1800" i="1">
+                              <a:effectLst/>
+                              <a:latin typeface="Cambria Math" panose="02040503050406030204" pitchFamily="18" charset="0"/>
+                              <a:ea typeface="Cambria Math" panose="02040503050406030204" pitchFamily="18" charset="0"/>
+                              <a:cs typeface="Calibri" panose="020F0502020204030204" pitchFamily="34" charset="0"/>
+                            </a:rPr>
+                          </m:ctrlPr>
+                        </m:fPr>
+                        <m:num>
+                          <m:r>
+                            <m:rPr>
+                              <m:sty m:val="p"/>
+                            </m:rPr>
+                            <a:rPr lang="en-US" sz="1800">
+                              <a:effectLst/>
+                              <a:latin typeface="Cambria Math" panose="02040503050406030204" pitchFamily="18" charset="0"/>
+                              <a:ea typeface="Cambria Math" panose="02040503050406030204" pitchFamily="18" charset="0"/>
+                              <a:cs typeface="Calibri" panose="020F0502020204030204" pitchFamily="34" charset="0"/>
+                            </a:rPr>
+                            <m:t>α</m:t>
+                          </m:r>
+                        </m:num>
+                        <m:den>
+                          <m:r>
+                            <a:rPr lang="ru-RU" sz="1800" i="1">
+                              <a:effectLst/>
+                              <a:latin typeface="Cambria Math" panose="02040503050406030204" pitchFamily="18" charset="0"/>
+                              <a:ea typeface="Cambria Math" panose="02040503050406030204" pitchFamily="18" charset="0"/>
+                              <a:cs typeface="Calibri" panose="020F0502020204030204" pitchFamily="34" charset="0"/>
+                            </a:rPr>
+                            <m:t>1−</m:t>
+                          </m:r>
+                          <m:r>
+                            <m:rPr>
+                              <m:sty m:val="p"/>
+                            </m:rPr>
+                            <a:rPr lang="en-US" sz="1800">
+                              <a:effectLst/>
+                              <a:latin typeface="Cambria Math" panose="02040503050406030204" pitchFamily="18" charset="0"/>
+                              <a:ea typeface="Cambria Math" panose="02040503050406030204" pitchFamily="18" charset="0"/>
+                              <a:cs typeface="Calibri" panose="020F0502020204030204" pitchFamily="34" charset="0"/>
+                            </a:rPr>
+                            <m:t>α</m:t>
+                          </m:r>
+                        </m:den>
+                      </m:f>
+                      <m:r>
+                        <a:rPr lang="ru-RU" sz="1800">
+                          <a:effectLst/>
+                          <a:latin typeface="Cambria Math" panose="02040503050406030204" pitchFamily="18" charset="0"/>
+                          <a:ea typeface="Cambria Math" panose="02040503050406030204" pitchFamily="18" charset="0"/>
+                          <a:cs typeface="Calibri" panose="020F0502020204030204" pitchFamily="34" charset="0"/>
+                        </a:rPr>
+                        <m:t>⋅</m:t>
+                      </m:r>
+                      <m:sSub>
+                        <m:sSubPr>
+                          <m:ctrlPr>
+                            <a:rPr lang="ru-RU" sz="1800" i="1">
+                              <a:effectLst/>
+                              <a:latin typeface="Cambria Math" panose="02040503050406030204" pitchFamily="18" charset="0"/>
+                              <a:ea typeface="Cambria Math" panose="02040503050406030204" pitchFamily="18" charset="0"/>
+                              <a:cs typeface="Calibri" panose="020F0502020204030204" pitchFamily="34" charset="0"/>
+                            </a:rPr>
+                          </m:ctrlPr>
+                        </m:sSubPr>
+                        <m:e>
+                          <m:r>
+                            <a:rPr lang="en-US" sz="1800" i="1">
+                              <a:effectLst/>
+                              <a:latin typeface="Cambria Math" panose="02040503050406030204" pitchFamily="18" charset="0"/>
+                              <a:ea typeface="Cambria Math" panose="02040503050406030204" pitchFamily="18" charset="0"/>
+                              <a:cs typeface="Calibri" panose="020F0502020204030204" pitchFamily="34" charset="0"/>
+                            </a:rPr>
+                            <m:t>𝑚</m:t>
+                          </m:r>
+                        </m:e>
+                        <m:sub>
+                          <m:r>
+                            <m:rPr>
+                              <m:nor/>
+                            </m:rPr>
+                            <a:rPr lang="en-US" sz="1800">
+                              <a:effectLst/>
+                              <a:latin typeface="Cambria Math" panose="02040503050406030204" pitchFamily="18" charset="0"/>
+                              <a:ea typeface="Cambria Math" panose="02040503050406030204" pitchFamily="18" charset="0"/>
+                            </a:rPr>
+                            <m:t>fuel</m:t>
+                          </m:r>
+                        </m:sub>
+                      </m:sSub>
+                    </m:oMath>
+                  </m:oMathPara>
+                </a14:m>
+                <a:endParaRPr lang="ru-RU" sz="1800" dirty="0">
+                  <a:effectLst/>
+                  <a:latin typeface="Cambria Math" panose="02040503050406030204" pitchFamily="18" charset="0"/>
+                  <a:ea typeface="Cambria Math" panose="02040503050406030204" pitchFamily="18" charset="0"/>
+                </a:endParaRPr>
+              </a:p>
+              <a:p>
+                <a:pPr marL="0" indent="0">
+                  <a:spcAft>
+                    <a:spcPts val="600"/>
+                  </a:spcAft>
+                  <a:buNone/>
+                </a:pPr>
+                <a:r>
+                  <a:rPr lang="ru-RU" sz="1800" dirty="0">
+                    <a:effectLst/>
+                    <a:latin typeface="Calibri" panose="020F0502020204030204" pitchFamily="34" charset="0"/>
+                    <a:ea typeface="Times New Roman" panose="02020603050405020304" pitchFamily="18" charset="0"/>
+                  </a:rPr>
+                  <a:t>- </a:t>
+                </a:r>
+                <a14:m>
+                  <m:oMath xmlns:m="http://schemas.openxmlformats.org/officeDocument/2006/math">
+                    <m:r>
+                      <m:rPr>
+                        <m:lit/>
+                      </m:rPr>
+                      <a:rPr lang="ru-RU" sz="1800" i="1">
+                        <a:effectLst/>
+                        <a:latin typeface="Cambria Math" panose="02040503050406030204" pitchFamily="18" charset="0"/>
+                        <a:ea typeface="Times New Roman" panose="02020603050405020304" pitchFamily="18" charset="0"/>
+                        <a:cs typeface="Calibri" panose="020F0502020204030204" pitchFamily="34" charset="0"/>
+                      </a:rPr>
+                      <m:t>(</m:t>
+                    </m:r>
+                    <m:sSub>
+                      <m:sSubPr>
+                        <m:ctrlPr>
+                          <a:rPr lang="ru-RU" sz="1800" i="1">
+                            <a:effectLst/>
+                            <a:latin typeface="Cambria Math" panose="02040503050406030204" pitchFamily="18" charset="0"/>
+                            <a:ea typeface="Times New Roman" panose="02020603050405020304" pitchFamily="18" charset="0"/>
+                            <a:cs typeface="Calibri" panose="020F0502020204030204" pitchFamily="34" charset="0"/>
+                          </a:rPr>
+                        </m:ctrlPr>
+                      </m:sSubPr>
+                      <m:e>
+                        <m:r>
+                          <a:rPr lang="ru-RU" sz="1800" i="1">
+                            <a:effectLst/>
+                            <a:latin typeface="Cambria Math" panose="02040503050406030204" pitchFamily="18" charset="0"/>
+                            <a:ea typeface="Times New Roman" panose="02020603050405020304" pitchFamily="18" charset="0"/>
+                            <a:cs typeface="Calibri" panose="020F0502020204030204" pitchFamily="34" charset="0"/>
+                          </a:rPr>
+                          <m:t>𝑚</m:t>
+                        </m:r>
+                      </m:e>
+                      <m:sub>
+                        <m:r>
+                          <a:rPr lang="ru-RU" sz="1800" i="1">
+                            <a:effectLst/>
+                            <a:latin typeface="Cambria Math" panose="02040503050406030204" pitchFamily="18" charset="0"/>
+                            <a:ea typeface="Times New Roman" panose="02020603050405020304" pitchFamily="18" charset="0"/>
+                            <a:cs typeface="Calibri" panose="020F0502020204030204" pitchFamily="34" charset="0"/>
+                          </a:rPr>
+                          <m:t>𝑠</m:t>
+                        </m:r>
+                      </m:sub>
+                    </m:sSub>
+                    <m:r>
+                      <m:rPr>
+                        <m:lit/>
+                      </m:rPr>
+                      <a:rPr lang="ru-RU" sz="1800" i="1">
+                        <a:effectLst/>
+                        <a:latin typeface="Cambria Math" panose="02040503050406030204" pitchFamily="18" charset="0"/>
+                        <a:ea typeface="Times New Roman" panose="02020603050405020304" pitchFamily="18" charset="0"/>
+                        <a:cs typeface="Calibri" panose="020F0502020204030204" pitchFamily="34" charset="0"/>
+                      </a:rPr>
+                      <m:t>)</m:t>
+                    </m:r>
+                  </m:oMath>
+                </a14:m>
+                <a:r>
+                  <a:rPr lang="ru-RU" sz="1800" dirty="0">
+                    <a:effectLst/>
+                    <a:latin typeface="Calibri" panose="020F0502020204030204" pitchFamily="34" charset="0"/>
+                    <a:ea typeface="Times New Roman" panose="02020603050405020304" pitchFamily="18" charset="0"/>
+                  </a:rPr>
+                  <a:t> — структурная масса (кг) </a:t>
+                </a:r>
+                <a:endParaRPr lang="ru-RU" sz="1800" dirty="0">
+                  <a:effectLst/>
+                  <a:latin typeface="Times New Roman" panose="02020603050405020304" pitchFamily="18" charset="0"/>
+                  <a:ea typeface="Times New Roman" panose="02020603050405020304" pitchFamily="18" charset="0"/>
+                </a:endParaRPr>
+              </a:p>
+              <a:p>
+                <a:pPr marL="0" indent="0">
+                  <a:spcAft>
+                    <a:spcPts val="600"/>
+                  </a:spcAft>
+                  <a:buNone/>
+                </a:pPr>
+                <a:r>
+                  <a:rPr lang="ru-RU" sz="1800" dirty="0">
+                    <a:effectLst/>
+                    <a:latin typeface="Calibri" panose="020F0502020204030204" pitchFamily="34" charset="0"/>
+                    <a:ea typeface="Times New Roman" panose="02020603050405020304" pitchFamily="18" charset="0"/>
+                  </a:rPr>
+                  <a:t>- </a:t>
+                </a:r>
+                <a14:m>
+                  <m:oMath xmlns:m="http://schemas.openxmlformats.org/officeDocument/2006/math">
+                    <m:r>
+                      <m:rPr>
+                        <m:lit/>
+                      </m:rPr>
+                      <a:rPr lang="ru-RU" sz="1800" i="1">
+                        <a:effectLst/>
+                        <a:latin typeface="Cambria Math" panose="02040503050406030204" pitchFamily="18" charset="0"/>
+                        <a:ea typeface="Times New Roman" panose="02020603050405020304" pitchFamily="18" charset="0"/>
+                        <a:cs typeface="Calibri" panose="020F0502020204030204" pitchFamily="34" charset="0"/>
+                      </a:rPr>
+                      <m:t>(</m:t>
+                    </m:r>
+                    <m:r>
+                      <m:rPr>
+                        <m:sty m:val="p"/>
+                      </m:rPr>
+                      <a:rPr lang="ru-RU" sz="1800">
+                        <a:effectLst/>
+                        <a:latin typeface="Cambria Math" panose="02040503050406030204" pitchFamily="18" charset="0"/>
+                        <a:ea typeface="Times New Roman" panose="02020603050405020304" pitchFamily="18" charset="0"/>
+                        <a:cs typeface="Calibri" panose="020F0502020204030204" pitchFamily="34" charset="0"/>
+                      </a:rPr>
+                      <m:t>α</m:t>
+                    </m:r>
+                    <m:r>
+                      <m:rPr>
+                        <m:lit/>
+                      </m:rPr>
+                      <a:rPr lang="ru-RU" sz="1800" i="1">
+                        <a:effectLst/>
+                        <a:latin typeface="Cambria Math" panose="02040503050406030204" pitchFamily="18" charset="0"/>
+                        <a:ea typeface="Times New Roman" panose="02020603050405020304" pitchFamily="18" charset="0"/>
+                        <a:cs typeface="Calibri" panose="020F0502020204030204" pitchFamily="34" charset="0"/>
+                      </a:rPr>
+                      <m:t>)</m:t>
+                    </m:r>
+                  </m:oMath>
+                </a14:m>
+                <a:r>
+                  <a:rPr lang="ru-RU" sz="1800" dirty="0">
+                    <a:effectLst/>
+                    <a:latin typeface="Calibri" panose="020F0502020204030204" pitchFamily="34" charset="0"/>
+                    <a:ea typeface="Times New Roman" panose="02020603050405020304" pitchFamily="18" charset="0"/>
+                  </a:rPr>
+                  <a:t> — структурная доля (безразмерная, </a:t>
+                </a:r>
+                <a14:m>
+                  <m:oMath xmlns:m="http://schemas.openxmlformats.org/officeDocument/2006/math">
+                    <m:r>
+                      <m:rPr>
+                        <m:lit/>
+                      </m:rPr>
+                      <a:rPr lang="ru-RU" sz="1800" i="1">
+                        <a:effectLst/>
+                        <a:latin typeface="Cambria Math" panose="02040503050406030204" pitchFamily="18" charset="0"/>
+                        <a:ea typeface="Times New Roman" panose="02020603050405020304" pitchFamily="18" charset="0"/>
+                        <a:cs typeface="Calibri" panose="020F0502020204030204" pitchFamily="34" charset="0"/>
+                      </a:rPr>
+                      <m:t>(</m:t>
+                    </m:r>
+                    <m:r>
+                      <a:rPr lang="ru-RU" sz="1800" i="1">
+                        <a:effectLst/>
+                        <a:latin typeface="Cambria Math" panose="02040503050406030204" pitchFamily="18" charset="0"/>
+                        <a:ea typeface="Times New Roman" panose="02020603050405020304" pitchFamily="18" charset="0"/>
+                        <a:cs typeface="Calibri" panose="020F0502020204030204" pitchFamily="34" charset="0"/>
+                      </a:rPr>
+                      <m:t>0 &lt; </m:t>
+                    </m:r>
+                    <m:r>
+                      <m:rPr>
+                        <m:sty m:val="p"/>
+                      </m:rPr>
+                      <a:rPr lang="ru-RU" sz="1800">
+                        <a:effectLst/>
+                        <a:latin typeface="Cambria Math" panose="02040503050406030204" pitchFamily="18" charset="0"/>
+                        <a:ea typeface="Times New Roman" panose="02020603050405020304" pitchFamily="18" charset="0"/>
+                        <a:cs typeface="Calibri" panose="020F0502020204030204" pitchFamily="34" charset="0"/>
+                      </a:rPr>
+                      <m:t>α</m:t>
+                    </m:r>
+                    <m:r>
+                      <a:rPr lang="ru-RU" sz="1800" i="1">
+                        <a:effectLst/>
+                        <a:latin typeface="Cambria Math" panose="02040503050406030204" pitchFamily="18" charset="0"/>
+                        <a:ea typeface="Times New Roman" panose="02020603050405020304" pitchFamily="18" charset="0"/>
+                        <a:cs typeface="Calibri" panose="020F0502020204030204" pitchFamily="34" charset="0"/>
+                      </a:rPr>
+                      <m:t>&lt; 1</m:t>
+                    </m:r>
+                    <m:r>
+                      <m:rPr>
+                        <m:lit/>
+                      </m:rPr>
+                      <a:rPr lang="ru-RU" sz="1800" i="1">
+                        <a:effectLst/>
+                        <a:latin typeface="Cambria Math" panose="02040503050406030204" pitchFamily="18" charset="0"/>
+                        <a:ea typeface="Times New Roman" panose="02020603050405020304" pitchFamily="18" charset="0"/>
+                        <a:cs typeface="Calibri" panose="020F0502020204030204" pitchFamily="34" charset="0"/>
+                      </a:rPr>
+                      <m:t>)</m:t>
+                    </m:r>
+                  </m:oMath>
+                </a14:m>
+                <a:r>
+                  <a:rPr lang="ru-RU" sz="1800" dirty="0">
+                    <a:effectLst/>
+                    <a:latin typeface="Calibri" panose="020F0502020204030204" pitchFamily="34" charset="0"/>
+                    <a:ea typeface="Times New Roman" panose="02020603050405020304" pitchFamily="18" charset="0"/>
+                  </a:rPr>
+                  <a:t>) </a:t>
+                </a:r>
+                <a:endParaRPr lang="ru-RU" sz="1800" dirty="0">
+                  <a:effectLst/>
+                  <a:latin typeface="Times New Roman" panose="02020603050405020304" pitchFamily="18" charset="0"/>
+                  <a:ea typeface="Times New Roman" panose="02020603050405020304" pitchFamily="18" charset="0"/>
+                </a:endParaRPr>
+              </a:p>
+              <a:p>
+                <a:pPr marL="0" indent="0">
+                  <a:spcAft>
+                    <a:spcPts val="600"/>
+                  </a:spcAft>
+                  <a:buNone/>
+                </a:pPr>
+                <a:r>
+                  <a:rPr lang="ru-RU" sz="1800" dirty="0">
+                    <a:effectLst/>
+                    <a:latin typeface="Calibri" panose="020F0502020204030204" pitchFamily="34" charset="0"/>
+                    <a:ea typeface="Times New Roman" panose="02020603050405020304" pitchFamily="18" charset="0"/>
+                  </a:rPr>
+                  <a:t>- </a:t>
+                </a:r>
+                <a14:m>
+                  <m:oMath xmlns:m="http://schemas.openxmlformats.org/officeDocument/2006/math">
+                    <m:r>
+                      <m:rPr>
+                        <m:lit/>
+                      </m:rPr>
+                      <a:rPr lang="ru-RU" sz="1800" i="1">
+                        <a:effectLst/>
+                        <a:latin typeface="Cambria Math" panose="02040503050406030204" pitchFamily="18" charset="0"/>
+                        <a:ea typeface="Times New Roman" panose="02020603050405020304" pitchFamily="18" charset="0"/>
+                        <a:cs typeface="Calibri" panose="020F0502020204030204" pitchFamily="34" charset="0"/>
+                      </a:rPr>
+                      <m:t>(</m:t>
+                    </m:r>
+                    <m:sSub>
+                      <m:sSubPr>
+                        <m:ctrlPr>
+                          <a:rPr lang="ru-RU" sz="1800" i="1">
+                            <a:effectLst/>
+                            <a:latin typeface="Cambria Math" panose="02040503050406030204" pitchFamily="18" charset="0"/>
+                            <a:ea typeface="Times New Roman" panose="02020603050405020304" pitchFamily="18" charset="0"/>
+                            <a:cs typeface="Calibri" panose="020F0502020204030204" pitchFamily="34" charset="0"/>
+                          </a:rPr>
+                        </m:ctrlPr>
+                      </m:sSubPr>
+                      <m:e>
+                        <m:r>
+                          <a:rPr lang="ru-RU" sz="1800" i="1">
+                            <a:effectLst/>
+                            <a:latin typeface="Cambria Math" panose="02040503050406030204" pitchFamily="18" charset="0"/>
+                            <a:ea typeface="Times New Roman" panose="02020603050405020304" pitchFamily="18" charset="0"/>
+                            <a:cs typeface="Calibri" panose="020F0502020204030204" pitchFamily="34" charset="0"/>
+                          </a:rPr>
+                          <m:t>𝑚</m:t>
+                        </m:r>
+                      </m:e>
+                      <m:sub>
+                        <m:r>
+                          <m:rPr>
+                            <m:nor/>
+                          </m:rPr>
+                          <a:rPr lang="ru-RU" sz="1800">
+                            <a:effectLst/>
+                            <a:latin typeface="Calibri" panose="020F0502020204030204" pitchFamily="34" charset="0"/>
+                            <a:ea typeface="Times New Roman" panose="02020603050405020304" pitchFamily="18" charset="0"/>
+                          </a:rPr>
+                          <m:t>fuel</m:t>
+                        </m:r>
+                      </m:sub>
+                    </m:sSub>
+                    <m:r>
+                      <m:rPr>
+                        <m:lit/>
+                      </m:rPr>
+                      <a:rPr lang="ru-RU" sz="1800" i="1">
+                        <a:effectLst/>
+                        <a:latin typeface="Cambria Math" panose="02040503050406030204" pitchFamily="18" charset="0"/>
+                        <a:ea typeface="Times New Roman" panose="02020603050405020304" pitchFamily="18" charset="0"/>
+                        <a:cs typeface="Calibri" panose="020F0502020204030204" pitchFamily="34" charset="0"/>
+                      </a:rPr>
+                      <m:t>)</m:t>
+                    </m:r>
+                  </m:oMath>
+                </a14:m>
+                <a:r>
+                  <a:rPr lang="ru-RU" sz="1800" dirty="0">
+                    <a:effectLst/>
+                    <a:latin typeface="Calibri" panose="020F0502020204030204" pitchFamily="34" charset="0"/>
+                    <a:ea typeface="Times New Roman" panose="02020603050405020304" pitchFamily="18" charset="0"/>
+                  </a:rPr>
+                  <a:t> — масса топлива (кг) </a:t>
+                </a:r>
+                <a:endParaRPr lang="ru-RU" sz="1800" dirty="0">
+                  <a:effectLst/>
+                  <a:latin typeface="Times New Roman" panose="02020603050405020304" pitchFamily="18" charset="0"/>
+                  <a:ea typeface="Times New Roman" panose="02020603050405020304" pitchFamily="18" charset="0"/>
+                </a:endParaRPr>
+              </a:p>
+            </p:txBody>
+          </p:sp>
+        </mc:Choice>
+        <mc:Fallback>
+          <p:sp>
+            <p:nvSpPr>
+              <p:cNvPr id="5" name="TextBox 4">
+                <a:extLst>
+                  <a:ext uri="{FF2B5EF4-FFF2-40B4-BE49-F238E27FC236}">
+                    <a16:creationId xmlns:a16="http://schemas.microsoft.com/office/drawing/2014/main" id="{684BC9F1-2AD5-4AC6-9622-348ABE77C287}"/>
+                  </a:ext>
+                </a:extLst>
+              </p:cNvPr>
+              <p:cNvSpPr txBox="1">
+                <a:spLocks noRot="1" noChangeAspect="1" noMove="1" noResize="1" noEditPoints="1" noAdjustHandles="1" noChangeArrowheads="1" noChangeShapeType="1" noTextEdit="1"/>
+              </p:cNvSpPr>
+              <p:nvPr/>
+            </p:nvSpPr>
+            <p:spPr>
+              <a:xfrm>
+                <a:off x="4473777" y="285893"/>
+                <a:ext cx="5737480" cy="1999137"/>
+              </a:xfrm>
+              <a:prstGeom prst="rect">
+                <a:avLst/>
+              </a:prstGeom>
+              <a:blipFill>
+                <a:blip r:embed="rId3"/>
+                <a:stretch>
+                  <a:fillRect l="-848" t="-1515" b="-3030"/>
+                </a:stretch>
+              </a:blipFill>
+              <a:ln>
+                <a:solidFill>
+                  <a:schemeClr val="tx1">
+                    <a:lumMod val="50000"/>
+                    <a:lumOff val="50000"/>
+                  </a:schemeClr>
+                </a:solidFill>
+              </a:ln>
+            </p:spPr>
+            <p:txBody>
+              <a:bodyPr/>
+              <a:lstStyle/>
+              <a:p>
+                <a:r>
+                  <a:rPr lang="ru-RU">
+                    <a:noFill/>
+                  </a:rPr>
+                  <a:t> </a:t>
+                </a:r>
+              </a:p>
+            </p:txBody>
+          </p:sp>
+        </mc:Fallback>
+      </mc:AlternateContent>
+      <mc:AlternateContent xmlns:mc="http://schemas.openxmlformats.org/markup-compatibility/2006">
+        <mc:Choice xmlns:a14="http://schemas.microsoft.com/office/drawing/2010/main" Requires="a14">
+          <p:sp>
+            <p:nvSpPr>
+              <p:cNvPr id="7" name="TextBox 6">
+                <a:extLst>
+                  <a:ext uri="{FF2B5EF4-FFF2-40B4-BE49-F238E27FC236}">
+                    <a16:creationId xmlns:a16="http://schemas.microsoft.com/office/drawing/2014/main" id="{FF2040B8-EC3E-4372-8C9D-722ACE00D3B5}"/>
+                  </a:ext>
+                </a:extLst>
+              </p:cNvPr>
+              <p:cNvSpPr txBox="1"/>
+              <p:nvPr/>
+            </p:nvSpPr>
+            <p:spPr>
+              <a:xfrm>
+                <a:off x="514342" y="5478105"/>
+                <a:ext cx="4199340" cy="1547924"/>
+              </a:xfrm>
+              <a:prstGeom prst="rect">
+                <a:avLst/>
+              </a:prstGeom>
+              <a:noFill/>
+              <a:ln>
+                <a:solidFill>
+                  <a:schemeClr val="tx1">
+                    <a:lumMod val="50000"/>
+                    <a:lumOff val="50000"/>
+                  </a:schemeClr>
+                </a:solidFill>
+              </a:ln>
+            </p:spPr>
+            <p:txBody>
+              <a:bodyPr wrap="square">
+                <a:spAutoFit/>
+              </a:bodyPr>
+              <a:lstStyle/>
+              <a:p>
+                <a:pPr>
+                  <a:spcAft>
+                    <a:spcPts val="600"/>
+                  </a:spcAft>
+                </a:pPr>
+                <a:r>
+                  <a:rPr lang="ru-RU" sz="1800" b="1" dirty="0">
+                    <a:effectLst/>
+                    <a:latin typeface="Calibri" panose="020F0502020204030204" pitchFamily="34" charset="0"/>
+                    <a:ea typeface="Times New Roman" panose="02020603050405020304" pitchFamily="18" charset="0"/>
+                  </a:rPr>
+                  <a:t>Текущая масса всей ракеты</a:t>
+                </a:r>
+                <a:endParaRPr lang="ru-RU" sz="1800" dirty="0">
+                  <a:effectLst/>
+                  <a:latin typeface="Times New Roman" panose="02020603050405020304" pitchFamily="18" charset="0"/>
+                  <a:ea typeface="Times New Roman" panose="02020603050405020304" pitchFamily="18" charset="0"/>
+                </a:endParaRPr>
+              </a:p>
+              <a:p>
+                <a:pPr>
+                  <a:spcAft>
+                    <a:spcPts val="600"/>
+                  </a:spcAft>
+                </a:pPr>
+                <a14:m>
+                  <m:oMathPara xmlns:m="http://schemas.openxmlformats.org/officeDocument/2006/math">
+                    <m:oMathParaPr>
+                      <m:jc m:val="centerGroup"/>
+                    </m:oMathParaPr>
+                    <m:oMath xmlns:m="http://schemas.openxmlformats.org/officeDocument/2006/math">
+                      <m:sSub>
+                        <m:sSubPr>
+                          <m:ctrlPr>
+                            <a:rPr lang="ru-RU" sz="1800" i="1">
+                              <a:effectLst/>
+                              <a:latin typeface="Cambria Math" panose="02040503050406030204" pitchFamily="18" charset="0"/>
+                              <a:ea typeface="Times New Roman" panose="02020603050405020304" pitchFamily="18" charset="0"/>
+                              <a:cs typeface="Calibri" panose="020F0502020204030204" pitchFamily="34" charset="0"/>
+                            </a:rPr>
+                          </m:ctrlPr>
+                        </m:sSubPr>
+                        <m:e>
+                          <m:r>
+                            <a:rPr lang="ru-RU" sz="1800" i="1">
+                              <a:effectLst/>
+                              <a:latin typeface="Cambria Math" panose="02040503050406030204" pitchFamily="18" charset="0"/>
+                              <a:ea typeface="Times New Roman" panose="02020603050405020304" pitchFamily="18" charset="0"/>
+                              <a:cs typeface="Calibri" panose="020F0502020204030204" pitchFamily="34" charset="0"/>
+                            </a:rPr>
+                            <m:t>𝑚</m:t>
+                          </m:r>
+                        </m:e>
+                        <m:sub>
+                          <m:r>
+                            <m:rPr>
+                              <m:nor/>
+                            </m:rPr>
+                            <a:rPr lang="ru-RU" sz="1800">
+                              <a:effectLst/>
+                              <a:latin typeface="Calibri" panose="020F0502020204030204" pitchFamily="34" charset="0"/>
+                              <a:ea typeface="Times New Roman" panose="02020603050405020304" pitchFamily="18" charset="0"/>
+                            </a:rPr>
+                            <m:t>rocket</m:t>
+                          </m:r>
+                        </m:sub>
+                      </m:sSub>
+                      <m:r>
+                        <a:rPr lang="ru-RU" sz="1800" i="1">
+                          <a:effectLst/>
+                          <a:latin typeface="Cambria Math" panose="02040503050406030204" pitchFamily="18" charset="0"/>
+                          <a:ea typeface="Times New Roman" panose="02020603050405020304" pitchFamily="18" charset="0"/>
+                          <a:cs typeface="Calibri" panose="020F0502020204030204" pitchFamily="34" charset="0"/>
+                        </a:rPr>
+                        <m:t>=</m:t>
+                      </m:r>
+                      <m:sSub>
+                        <m:sSubPr>
+                          <m:ctrlPr>
+                            <a:rPr lang="ru-RU" sz="1800" i="1">
+                              <a:effectLst/>
+                              <a:latin typeface="Cambria Math" panose="02040503050406030204" pitchFamily="18" charset="0"/>
+                              <a:ea typeface="Times New Roman" panose="02020603050405020304" pitchFamily="18" charset="0"/>
+                              <a:cs typeface="Calibri" panose="020F0502020204030204" pitchFamily="34" charset="0"/>
+                            </a:rPr>
+                          </m:ctrlPr>
+                        </m:sSubPr>
+                        <m:e>
+                          <m:r>
+                            <a:rPr lang="ru-RU" sz="1800" i="1">
+                              <a:effectLst/>
+                              <a:latin typeface="Cambria Math" panose="02040503050406030204" pitchFamily="18" charset="0"/>
+                              <a:ea typeface="Times New Roman" panose="02020603050405020304" pitchFamily="18" charset="0"/>
+                              <a:cs typeface="Calibri" panose="020F0502020204030204" pitchFamily="34" charset="0"/>
+                            </a:rPr>
+                            <m:t>𝑚</m:t>
+                          </m:r>
+                        </m:e>
+                        <m:sub>
+                          <m:r>
+                            <m:rPr>
+                              <m:nor/>
+                            </m:rPr>
+                            <a:rPr lang="ru-RU" sz="1800">
+                              <a:effectLst/>
+                              <a:latin typeface="Calibri" panose="020F0502020204030204" pitchFamily="34" charset="0"/>
+                              <a:ea typeface="Times New Roman" panose="02020603050405020304" pitchFamily="18" charset="0"/>
+                            </a:rPr>
+                            <m:t>payload</m:t>
+                          </m:r>
+                        </m:sub>
+                      </m:sSub>
+                      <m:r>
+                        <a:rPr lang="ru-RU" sz="1800" i="1">
+                          <a:effectLst/>
+                          <a:latin typeface="Cambria Math" panose="02040503050406030204" pitchFamily="18" charset="0"/>
+                          <a:ea typeface="Times New Roman" panose="02020603050405020304" pitchFamily="18" charset="0"/>
+                          <a:cs typeface="Calibri" panose="020F0502020204030204" pitchFamily="34" charset="0"/>
+                        </a:rPr>
+                        <m:t>+</m:t>
+                      </m:r>
+                      <m:nary>
+                        <m:naryPr>
+                          <m:chr m:val="∑"/>
+                          <m:subHide m:val="on"/>
+                          <m:supHide m:val="on"/>
+                          <m:ctrlPr>
+                            <a:rPr lang="ru-RU" sz="1800" i="1">
+                              <a:effectLst/>
+                              <a:latin typeface="Cambria Math" panose="02040503050406030204" pitchFamily="18" charset="0"/>
+                              <a:ea typeface="Times New Roman" panose="02020603050405020304" pitchFamily="18" charset="0"/>
+                              <a:cs typeface="Calibri" panose="020F0502020204030204" pitchFamily="34" charset="0"/>
+                            </a:rPr>
+                          </m:ctrlPr>
+                        </m:naryPr>
+                        <m:sub/>
+                        <m:sup/>
+                        <m:e>
+                          <m:sSub>
+                            <m:sSubPr>
+                              <m:ctrlPr>
+                                <a:rPr lang="ru-RU" sz="1800" i="1">
+                                  <a:effectLst/>
+                                  <a:latin typeface="Cambria Math" panose="02040503050406030204" pitchFamily="18" charset="0"/>
+                                  <a:ea typeface="Times New Roman" panose="02020603050405020304" pitchFamily="18" charset="0"/>
+                                  <a:cs typeface="Calibri" panose="020F0502020204030204" pitchFamily="34" charset="0"/>
+                                </a:rPr>
+                              </m:ctrlPr>
+                            </m:sSubPr>
+                            <m:e>
+                              <m:r>
+                                <a:rPr lang="ru-RU" sz="1800" i="1">
+                                  <a:effectLst/>
+                                  <a:latin typeface="Cambria Math" panose="02040503050406030204" pitchFamily="18" charset="0"/>
+                                  <a:ea typeface="Times New Roman" panose="02020603050405020304" pitchFamily="18" charset="0"/>
+                                  <a:cs typeface="Calibri" panose="020F0502020204030204" pitchFamily="34" charset="0"/>
+                                </a:rPr>
+                                <m:t>𝑚</m:t>
+                              </m:r>
+                            </m:e>
+                            <m:sub>
+                              <m:r>
+                                <m:rPr>
+                                  <m:nor/>
+                                </m:rPr>
+                                <a:rPr lang="ru-RU" sz="1800">
+                                  <a:effectLst/>
+                                  <a:latin typeface="Calibri" panose="020F0502020204030204" pitchFamily="34" charset="0"/>
+                                  <a:ea typeface="Times New Roman" panose="02020603050405020304" pitchFamily="18" charset="0"/>
+                                </a:rPr>
+                                <m:t>stage</m:t>
+                              </m:r>
+                              <m:r>
+                                <a:rPr lang="ru-RU" sz="1800" i="1">
+                                  <a:effectLst/>
+                                  <a:latin typeface="Cambria Math" panose="02040503050406030204" pitchFamily="18" charset="0"/>
+                                  <a:ea typeface="Times New Roman" panose="02020603050405020304" pitchFamily="18" charset="0"/>
+                                  <a:cs typeface="Calibri" panose="020F0502020204030204" pitchFamily="34" charset="0"/>
+                                </a:rPr>
+                                <m:t>,</m:t>
+                              </m:r>
+                              <m:r>
+                                <a:rPr lang="ru-RU" sz="1800" i="1">
+                                  <a:effectLst/>
+                                  <a:latin typeface="Cambria Math" panose="02040503050406030204" pitchFamily="18" charset="0"/>
+                                  <a:ea typeface="Times New Roman" panose="02020603050405020304" pitchFamily="18" charset="0"/>
+                                  <a:cs typeface="Calibri" panose="020F0502020204030204" pitchFamily="34" charset="0"/>
+                                </a:rPr>
+                                <m:t>𝑖</m:t>
+                              </m:r>
+                            </m:sub>
+                          </m:sSub>
+                          <m:d>
+                            <m:dPr>
+                              <m:ctrlPr>
+                                <a:rPr lang="ru-RU" sz="1800" i="1">
+                                  <a:effectLst/>
+                                  <a:latin typeface="Cambria Math" panose="02040503050406030204" pitchFamily="18" charset="0"/>
+                                  <a:ea typeface="Times New Roman" panose="02020603050405020304" pitchFamily="18" charset="0"/>
+                                  <a:cs typeface="Calibri" panose="020F0502020204030204" pitchFamily="34" charset="0"/>
+                                </a:rPr>
+                              </m:ctrlPr>
+                            </m:dPr>
+                            <m:e>
+                              <m:r>
+                                <a:rPr lang="ru-RU" sz="1800" i="1">
+                                  <a:effectLst/>
+                                  <a:latin typeface="Cambria Math" panose="02040503050406030204" pitchFamily="18" charset="0"/>
+                                  <a:ea typeface="Times New Roman" panose="02020603050405020304" pitchFamily="18" charset="0"/>
+                                  <a:cs typeface="Calibri" panose="020F0502020204030204" pitchFamily="34" charset="0"/>
+                                </a:rPr>
+                                <m:t>𝑡</m:t>
+                              </m:r>
+                            </m:e>
+                          </m:d>
+                        </m:e>
+                      </m:nary>
+                    </m:oMath>
+                  </m:oMathPara>
+                </a14:m>
+                <a:endParaRPr lang="ru-RU" sz="1800" i="1" dirty="0">
+                  <a:effectLst/>
+                  <a:latin typeface="Cambria Math" panose="02040503050406030204" pitchFamily="18" charset="0"/>
+                  <a:ea typeface="Times New Roman" panose="02020603050405020304" pitchFamily="18" charset="0"/>
+                  <a:cs typeface="Calibri" panose="020F0502020204030204" pitchFamily="34" charset="0"/>
+                </a:endParaRPr>
+              </a:p>
+              <a:p>
+                <a:pPr>
+                  <a:spcAft>
+                    <a:spcPts val="600"/>
+                  </a:spcAft>
+                </a:pPr>
+                <a14:m>
+                  <m:oMathPara xmlns:m="http://schemas.openxmlformats.org/officeDocument/2006/math">
+                    <m:oMathParaPr>
+                      <m:jc m:val="centerGroup"/>
+                    </m:oMathParaPr>
+                    <m:oMath xmlns:m="http://schemas.openxmlformats.org/officeDocument/2006/math">
+                      <m:d>
+                        <m:dPr>
+                          <m:ctrlPr>
+                            <a:rPr lang="ru-RU" sz="1800" i="1">
+                              <a:effectLst/>
+                              <a:latin typeface="Cambria Math" panose="02040503050406030204" pitchFamily="18" charset="0"/>
+                              <a:ea typeface="Times New Roman" panose="02020603050405020304" pitchFamily="18" charset="0"/>
+                              <a:cs typeface="Calibri" panose="020F0502020204030204" pitchFamily="34" charset="0"/>
+                            </a:rPr>
+                          </m:ctrlPr>
+                        </m:dPr>
+                        <m:e>
+                          <m:r>
+                            <m:rPr>
+                              <m:nor/>
+                            </m:rPr>
+                            <a:rPr lang="ru-RU" sz="1800">
+                              <a:effectLst/>
+                              <a:latin typeface="Calibri" panose="020F0502020204030204" pitchFamily="34" charset="0"/>
+                              <a:ea typeface="Times New Roman" panose="02020603050405020304" pitchFamily="18" charset="0"/>
+                            </a:rPr>
+                            <m:t>только активные ступени</m:t>
+                          </m:r>
+                        </m:e>
+                      </m:d>
+                    </m:oMath>
+                  </m:oMathPara>
+                </a14:m>
+                <a:endParaRPr lang="ru-RU" sz="1800" dirty="0">
+                  <a:effectLst/>
+                  <a:latin typeface="Times New Roman" panose="02020603050405020304" pitchFamily="18" charset="0"/>
+                  <a:ea typeface="Times New Roman" panose="02020603050405020304" pitchFamily="18" charset="0"/>
+                </a:endParaRPr>
+              </a:p>
+            </p:txBody>
+          </p:sp>
+        </mc:Choice>
+        <mc:Fallback>
+          <p:sp>
+            <p:nvSpPr>
+              <p:cNvPr id="7" name="TextBox 6">
+                <a:extLst>
+                  <a:ext uri="{FF2B5EF4-FFF2-40B4-BE49-F238E27FC236}">
+                    <a16:creationId xmlns:a16="http://schemas.microsoft.com/office/drawing/2014/main" id="{FF2040B8-EC3E-4372-8C9D-722ACE00D3B5}"/>
+                  </a:ext>
+                </a:extLst>
+              </p:cNvPr>
+              <p:cNvSpPr txBox="1">
+                <a:spLocks noRot="1" noChangeAspect="1" noMove="1" noResize="1" noEditPoints="1" noAdjustHandles="1" noChangeArrowheads="1" noChangeShapeType="1" noTextEdit="1"/>
+              </p:cNvSpPr>
+              <p:nvPr/>
+            </p:nvSpPr>
+            <p:spPr>
+              <a:xfrm>
+                <a:off x="514342" y="5478105"/>
+                <a:ext cx="4199340" cy="1547924"/>
+              </a:xfrm>
+              <a:prstGeom prst="rect">
+                <a:avLst/>
+              </a:prstGeom>
+              <a:blipFill>
+                <a:blip r:embed="rId4"/>
+                <a:stretch>
+                  <a:fillRect l="-1013" t="-1953"/>
+                </a:stretch>
+              </a:blipFill>
+              <a:ln>
+                <a:solidFill>
+                  <a:schemeClr val="tx1">
+                    <a:lumMod val="50000"/>
+                    <a:lumOff val="50000"/>
+                  </a:schemeClr>
+                </a:solidFill>
+              </a:ln>
+            </p:spPr>
+            <p:txBody>
+              <a:bodyPr/>
+              <a:lstStyle/>
+              <a:p>
+                <a:r>
+                  <a:rPr lang="ru-RU">
+                    <a:noFill/>
+                  </a:rPr>
+                  <a:t> </a:t>
+                </a:r>
+              </a:p>
+            </p:txBody>
+          </p:sp>
+        </mc:Fallback>
+      </mc:AlternateContent>
+      <mc:AlternateContent xmlns:mc="http://schemas.openxmlformats.org/markup-compatibility/2006">
+        <mc:Choice xmlns:a14="http://schemas.microsoft.com/office/drawing/2010/main" Requires="a14">
+          <p:sp>
+            <p:nvSpPr>
+              <p:cNvPr id="9" name="TextBox 8">
+                <a:extLst>
+                  <a:ext uri="{FF2B5EF4-FFF2-40B4-BE49-F238E27FC236}">
+                    <a16:creationId xmlns:a16="http://schemas.microsoft.com/office/drawing/2014/main" id="{F9A8D2F5-1A89-4C11-8C03-71C5DFB9CB62}"/>
+                  </a:ext>
+                </a:extLst>
+              </p:cNvPr>
+              <p:cNvSpPr txBox="1"/>
+              <p:nvPr/>
+            </p:nvSpPr>
+            <p:spPr>
+              <a:xfrm>
+                <a:off x="396474" y="2905875"/>
+                <a:ext cx="4511857" cy="1911292"/>
+              </a:xfrm>
+              <a:prstGeom prst="rect">
+                <a:avLst/>
+              </a:prstGeom>
+              <a:noFill/>
+              <a:ln>
+                <a:solidFill>
+                  <a:schemeClr val="tx1">
+                    <a:lumMod val="50000"/>
+                    <a:lumOff val="50000"/>
+                  </a:schemeClr>
+                </a:solidFill>
+              </a:ln>
+            </p:spPr>
+            <p:txBody>
+              <a:bodyPr wrap="square">
+                <a:spAutoFit/>
+              </a:bodyPr>
+              <a:lstStyle/>
+              <a:p>
+                <a:pPr marL="0" indent="0">
+                  <a:lnSpc>
+                    <a:spcPct val="100000"/>
+                  </a:lnSpc>
+                  <a:spcBef>
+                    <a:spcPts val="0"/>
+                  </a:spcBef>
+                  <a:spcAft>
+                    <a:spcPts val="600"/>
+                  </a:spcAft>
+                  <a:buNone/>
+                </a:pPr>
+                <a:r>
+                  <a:rPr lang="ru-RU" sz="1800" b="1" dirty="0">
+                    <a:effectLst/>
+                    <a:latin typeface="Calibri" panose="020F0502020204030204" pitchFamily="34" charset="0"/>
+                    <a:ea typeface="Times New Roman" panose="02020603050405020304" pitchFamily="18" charset="0"/>
+                  </a:rPr>
+                  <a:t>Текущая масса одной ступени</a:t>
+                </a:r>
+                <a:endParaRPr lang="ru-RU" sz="1800" dirty="0">
+                  <a:latin typeface="Times New Roman" panose="02020603050405020304" pitchFamily="18" charset="0"/>
+                  <a:ea typeface="Times New Roman" panose="02020603050405020304" pitchFamily="18" charset="0"/>
+                </a:endParaRPr>
+              </a:p>
+              <a:p>
+                <a:pPr marL="0" indent="0">
+                  <a:lnSpc>
+                    <a:spcPct val="100000"/>
+                  </a:lnSpc>
+                  <a:spcBef>
+                    <a:spcPts val="0"/>
+                  </a:spcBef>
+                  <a:spcAft>
+                    <a:spcPts val="600"/>
+                  </a:spcAft>
+                  <a:buNone/>
+                </a:pPr>
+                <a14:m>
+                  <m:oMathPara xmlns:m="http://schemas.openxmlformats.org/officeDocument/2006/math">
+                    <m:oMathParaPr>
+                      <m:jc m:val="centerGroup"/>
+                    </m:oMathParaPr>
+                    <m:oMath xmlns:m="http://schemas.openxmlformats.org/officeDocument/2006/math">
+                      <m:sSub>
+                        <m:sSubPr>
+                          <m:ctrlPr>
+                            <a:rPr lang="ru-RU" sz="1800" i="1" smtClean="0">
+                              <a:effectLst/>
+                              <a:latin typeface="Cambria Math" panose="02040503050406030204" pitchFamily="18" charset="0"/>
+                              <a:ea typeface="Times New Roman" panose="02020603050405020304" pitchFamily="18" charset="0"/>
+                              <a:cs typeface="Calibri" panose="020F0502020204030204" pitchFamily="34" charset="0"/>
+                            </a:rPr>
+                          </m:ctrlPr>
+                        </m:sSubPr>
+                        <m:e>
+                          <m:r>
+                            <a:rPr lang="ru-RU" sz="1800" i="1">
+                              <a:effectLst/>
+                              <a:latin typeface="Cambria Math" panose="02040503050406030204" pitchFamily="18" charset="0"/>
+                              <a:ea typeface="Times New Roman" panose="02020603050405020304" pitchFamily="18" charset="0"/>
+                              <a:cs typeface="Calibri" panose="020F0502020204030204" pitchFamily="34" charset="0"/>
+                            </a:rPr>
+                            <m:t>𝑚</m:t>
+                          </m:r>
+                        </m:e>
+                        <m:sub>
+                          <m:r>
+                            <m:rPr>
+                              <m:nor/>
+                            </m:rPr>
+                            <a:rPr lang="en-US" sz="1800">
+                              <a:effectLst/>
+                              <a:latin typeface="Calibri" panose="020F0502020204030204" pitchFamily="34" charset="0"/>
+                              <a:ea typeface="Times New Roman" panose="02020603050405020304" pitchFamily="18" charset="0"/>
+                            </a:rPr>
+                            <m:t>stage</m:t>
+                          </m:r>
+                        </m:sub>
+                      </m:sSub>
+                      <m:d>
+                        <m:dPr>
+                          <m:ctrlPr>
+                            <a:rPr lang="ru-RU" sz="1800" i="1">
+                              <a:effectLst/>
+                              <a:latin typeface="Cambria Math" panose="02040503050406030204" pitchFamily="18" charset="0"/>
+                              <a:ea typeface="Times New Roman" panose="02020603050405020304" pitchFamily="18" charset="0"/>
+                              <a:cs typeface="Calibri" panose="020F0502020204030204" pitchFamily="34" charset="0"/>
+                            </a:rPr>
+                          </m:ctrlPr>
+                        </m:dPr>
+                        <m:e>
+                          <m:r>
+                            <a:rPr lang="ru-RU" sz="1800" i="1">
+                              <a:effectLst/>
+                              <a:latin typeface="Cambria Math" panose="02040503050406030204" pitchFamily="18" charset="0"/>
+                              <a:ea typeface="Times New Roman" panose="02020603050405020304" pitchFamily="18" charset="0"/>
+                              <a:cs typeface="Calibri" panose="020F0502020204030204" pitchFamily="34" charset="0"/>
+                            </a:rPr>
+                            <m:t>𝑡</m:t>
+                          </m:r>
+                        </m:e>
+                      </m:d>
+                      <m:r>
+                        <a:rPr lang="ru-RU" sz="1800" i="1">
+                          <a:effectLst/>
+                          <a:latin typeface="Cambria Math" panose="02040503050406030204" pitchFamily="18" charset="0"/>
+                          <a:ea typeface="Times New Roman" panose="02020603050405020304" pitchFamily="18" charset="0"/>
+                          <a:cs typeface="Calibri" panose="020F0502020204030204" pitchFamily="34" charset="0"/>
+                        </a:rPr>
+                        <m:t>=</m:t>
+                      </m:r>
+                      <m:sSub>
+                        <m:sSubPr>
+                          <m:ctrlPr>
+                            <a:rPr lang="ru-RU" sz="1800" i="1">
+                              <a:effectLst/>
+                              <a:latin typeface="Cambria Math" panose="02040503050406030204" pitchFamily="18" charset="0"/>
+                              <a:ea typeface="Times New Roman" panose="02020603050405020304" pitchFamily="18" charset="0"/>
+                              <a:cs typeface="Calibri" panose="020F0502020204030204" pitchFamily="34" charset="0"/>
+                            </a:rPr>
+                          </m:ctrlPr>
+                        </m:sSubPr>
+                        <m:e>
+                          <m:r>
+                            <a:rPr lang="ru-RU" sz="1800" i="1">
+                              <a:effectLst/>
+                              <a:latin typeface="Cambria Math" panose="02040503050406030204" pitchFamily="18" charset="0"/>
+                              <a:ea typeface="Times New Roman" panose="02020603050405020304" pitchFamily="18" charset="0"/>
+                              <a:cs typeface="Calibri" panose="020F0502020204030204" pitchFamily="34" charset="0"/>
+                            </a:rPr>
+                            <m:t>𝑚</m:t>
+                          </m:r>
+                        </m:e>
+                        <m:sub>
+                          <m:r>
+                            <a:rPr lang="ru-RU" sz="1800" i="1">
+                              <a:effectLst/>
+                              <a:latin typeface="Cambria Math" panose="02040503050406030204" pitchFamily="18" charset="0"/>
+                              <a:ea typeface="Times New Roman" panose="02020603050405020304" pitchFamily="18" charset="0"/>
+                              <a:cs typeface="Calibri" panose="020F0502020204030204" pitchFamily="34" charset="0"/>
+                            </a:rPr>
+                            <m:t>𝑠</m:t>
+                          </m:r>
+                        </m:sub>
+                      </m:sSub>
+                      <m:r>
+                        <a:rPr lang="ru-RU" sz="1800" i="1">
+                          <a:effectLst/>
+                          <a:latin typeface="Cambria Math" panose="02040503050406030204" pitchFamily="18" charset="0"/>
+                          <a:ea typeface="Times New Roman" panose="02020603050405020304" pitchFamily="18" charset="0"/>
+                          <a:cs typeface="Calibri" panose="020F0502020204030204" pitchFamily="34" charset="0"/>
+                        </a:rPr>
+                        <m:t>+</m:t>
+                      </m:r>
+                      <m:sSub>
+                        <m:sSubPr>
+                          <m:ctrlPr>
+                            <a:rPr lang="ru-RU" sz="1800" i="1">
+                              <a:effectLst/>
+                              <a:latin typeface="Cambria Math" panose="02040503050406030204" pitchFamily="18" charset="0"/>
+                              <a:ea typeface="Times New Roman" panose="02020603050405020304" pitchFamily="18" charset="0"/>
+                              <a:cs typeface="Calibri" panose="020F0502020204030204" pitchFamily="34" charset="0"/>
+                            </a:rPr>
+                          </m:ctrlPr>
+                        </m:sSubPr>
+                        <m:e>
+                          <m:r>
+                            <a:rPr lang="ru-RU" sz="1800" i="1">
+                              <a:effectLst/>
+                              <a:latin typeface="Cambria Math" panose="02040503050406030204" pitchFamily="18" charset="0"/>
+                              <a:ea typeface="Times New Roman" panose="02020603050405020304" pitchFamily="18" charset="0"/>
+                              <a:cs typeface="Calibri" panose="020F0502020204030204" pitchFamily="34" charset="0"/>
+                            </a:rPr>
+                            <m:t>𝑚</m:t>
+                          </m:r>
+                        </m:e>
+                        <m:sub>
+                          <m:r>
+                            <m:rPr>
+                              <m:nor/>
+                            </m:rPr>
+                            <a:rPr lang="en-US" sz="1800">
+                              <a:effectLst/>
+                              <a:latin typeface="Calibri" panose="020F0502020204030204" pitchFamily="34" charset="0"/>
+                              <a:ea typeface="Times New Roman" panose="02020603050405020304" pitchFamily="18" charset="0"/>
+                            </a:rPr>
+                            <m:t>fuel</m:t>
+                          </m:r>
+                        </m:sub>
+                      </m:sSub>
+                      <m:d>
+                        <m:dPr>
+                          <m:ctrlPr>
+                            <a:rPr lang="ru-RU" sz="1800" i="1">
+                              <a:effectLst/>
+                              <a:latin typeface="Cambria Math" panose="02040503050406030204" pitchFamily="18" charset="0"/>
+                              <a:ea typeface="Times New Roman" panose="02020603050405020304" pitchFamily="18" charset="0"/>
+                              <a:cs typeface="Calibri" panose="020F0502020204030204" pitchFamily="34" charset="0"/>
+                            </a:rPr>
+                          </m:ctrlPr>
+                        </m:dPr>
+                        <m:e>
+                          <m:r>
+                            <a:rPr lang="ru-RU" sz="1800" i="1">
+                              <a:effectLst/>
+                              <a:latin typeface="Cambria Math" panose="02040503050406030204" pitchFamily="18" charset="0"/>
+                              <a:ea typeface="Times New Roman" panose="02020603050405020304" pitchFamily="18" charset="0"/>
+                              <a:cs typeface="Calibri" panose="020F0502020204030204" pitchFamily="34" charset="0"/>
+                            </a:rPr>
+                            <m:t>𝑡</m:t>
+                          </m:r>
+                        </m:e>
+                      </m:d>
+                      <m:r>
+                        <a:rPr lang="ru-RU" sz="1800" i="1">
+                          <a:effectLst/>
+                          <a:latin typeface="Cambria Math" panose="02040503050406030204" pitchFamily="18" charset="0"/>
+                          <a:ea typeface="Times New Roman" panose="02020603050405020304" pitchFamily="18" charset="0"/>
+                          <a:cs typeface="Calibri" panose="020F0502020204030204" pitchFamily="34" charset="0"/>
+                        </a:rPr>
+                        <m:t>+</m:t>
+                      </m:r>
+                      <m:sSub>
+                        <m:sSubPr>
+                          <m:ctrlPr>
+                            <a:rPr lang="ru-RU" sz="1800" i="1">
+                              <a:effectLst/>
+                              <a:latin typeface="Cambria Math" panose="02040503050406030204" pitchFamily="18" charset="0"/>
+                              <a:ea typeface="Times New Roman" panose="02020603050405020304" pitchFamily="18" charset="0"/>
+                              <a:cs typeface="Calibri" panose="020F0502020204030204" pitchFamily="34" charset="0"/>
+                            </a:rPr>
+                          </m:ctrlPr>
+                        </m:sSubPr>
+                        <m:e>
+                          <m:r>
+                            <a:rPr lang="ru-RU" sz="1800" i="1">
+                              <a:effectLst/>
+                              <a:latin typeface="Cambria Math" panose="02040503050406030204" pitchFamily="18" charset="0"/>
+                              <a:ea typeface="Times New Roman" panose="02020603050405020304" pitchFamily="18" charset="0"/>
+                              <a:cs typeface="Calibri" panose="020F0502020204030204" pitchFamily="34" charset="0"/>
+                            </a:rPr>
+                            <m:t>𝑚</m:t>
+                          </m:r>
+                        </m:e>
+                        <m:sub>
+                          <m:r>
+                            <m:rPr>
+                              <m:nor/>
+                            </m:rPr>
+                            <a:rPr lang="en-US" sz="1800">
+                              <a:effectLst/>
+                              <a:latin typeface="Calibri" panose="020F0502020204030204" pitchFamily="34" charset="0"/>
+                              <a:ea typeface="Times New Roman" panose="02020603050405020304" pitchFamily="18" charset="0"/>
+                            </a:rPr>
+                            <m:t>penalty</m:t>
+                          </m:r>
+                        </m:sub>
+                      </m:sSub>
+                    </m:oMath>
+                  </m:oMathPara>
+                </a14:m>
+                <a:endParaRPr lang="ru-RU" sz="1800" dirty="0">
+                  <a:effectLst/>
+                  <a:latin typeface="Times New Roman" panose="02020603050405020304" pitchFamily="18" charset="0"/>
+                  <a:ea typeface="Times New Roman" panose="02020603050405020304" pitchFamily="18" charset="0"/>
+                </a:endParaRPr>
+              </a:p>
+              <a:p>
+                <a:pPr marL="0" indent="0">
+                  <a:lnSpc>
+                    <a:spcPct val="100000"/>
+                  </a:lnSpc>
+                  <a:spcBef>
+                    <a:spcPts val="0"/>
+                  </a:spcBef>
+                  <a:spcAft>
+                    <a:spcPts val="600"/>
+                  </a:spcAft>
+                  <a:buNone/>
+                </a:pPr>
+                <a:r>
+                  <a:rPr lang="ru-RU" sz="1800" dirty="0">
+                    <a:effectLst/>
+                    <a:latin typeface="Calibri" panose="020F0502020204030204" pitchFamily="34" charset="0"/>
+                    <a:ea typeface="Times New Roman" panose="02020603050405020304" pitchFamily="18" charset="0"/>
+                  </a:rPr>
+                  <a:t>- </a:t>
+                </a:r>
+                <a14:m>
+                  <m:oMath xmlns:m="http://schemas.openxmlformats.org/officeDocument/2006/math">
+                    <m:r>
+                      <m:rPr>
+                        <m:lit/>
+                      </m:rPr>
+                      <a:rPr lang="ru-RU" sz="1800" i="1">
+                        <a:effectLst/>
+                        <a:latin typeface="Cambria Math" panose="02040503050406030204" pitchFamily="18" charset="0"/>
+                        <a:ea typeface="Times New Roman" panose="02020603050405020304" pitchFamily="18" charset="0"/>
+                        <a:cs typeface="Calibri" panose="020F0502020204030204" pitchFamily="34" charset="0"/>
+                      </a:rPr>
+                      <m:t>(</m:t>
+                    </m:r>
+                    <m:sSub>
+                      <m:sSubPr>
+                        <m:ctrlPr>
+                          <a:rPr lang="ru-RU" sz="1800" i="1">
+                            <a:effectLst/>
+                            <a:latin typeface="Cambria Math" panose="02040503050406030204" pitchFamily="18" charset="0"/>
+                            <a:ea typeface="Times New Roman" panose="02020603050405020304" pitchFamily="18" charset="0"/>
+                            <a:cs typeface="Calibri" panose="020F0502020204030204" pitchFamily="34" charset="0"/>
+                          </a:rPr>
+                        </m:ctrlPr>
+                      </m:sSubPr>
+                      <m:e>
+                        <m:r>
+                          <a:rPr lang="ru-RU" sz="1800" i="1">
+                            <a:effectLst/>
+                            <a:latin typeface="Cambria Math" panose="02040503050406030204" pitchFamily="18" charset="0"/>
+                            <a:ea typeface="Times New Roman" panose="02020603050405020304" pitchFamily="18" charset="0"/>
+                            <a:cs typeface="Calibri" panose="020F0502020204030204" pitchFamily="34" charset="0"/>
+                          </a:rPr>
+                          <m:t>𝑚</m:t>
+                        </m:r>
+                      </m:e>
+                      <m:sub>
+                        <m:r>
+                          <a:rPr lang="ru-RU" sz="1800" i="1">
+                            <a:effectLst/>
+                            <a:latin typeface="Cambria Math" panose="02040503050406030204" pitchFamily="18" charset="0"/>
+                            <a:ea typeface="Times New Roman" panose="02020603050405020304" pitchFamily="18" charset="0"/>
+                            <a:cs typeface="Calibri" panose="020F0502020204030204" pitchFamily="34" charset="0"/>
+                          </a:rPr>
+                          <m:t>𝑠</m:t>
+                        </m:r>
+                      </m:sub>
+                    </m:sSub>
+                    <m:r>
+                      <m:rPr>
+                        <m:lit/>
+                      </m:rPr>
+                      <a:rPr lang="ru-RU" sz="1800" i="1">
+                        <a:effectLst/>
+                        <a:latin typeface="Cambria Math" panose="02040503050406030204" pitchFamily="18" charset="0"/>
+                        <a:ea typeface="Times New Roman" panose="02020603050405020304" pitchFamily="18" charset="0"/>
+                        <a:cs typeface="Calibri" panose="020F0502020204030204" pitchFamily="34" charset="0"/>
+                      </a:rPr>
+                      <m:t>)</m:t>
+                    </m:r>
+                  </m:oMath>
+                </a14:m>
+                <a:r>
+                  <a:rPr lang="ru-RU" sz="1800" dirty="0">
+                    <a:effectLst/>
+                    <a:latin typeface="Calibri" panose="020F0502020204030204" pitchFamily="34" charset="0"/>
+                    <a:ea typeface="Times New Roman" panose="02020603050405020304" pitchFamily="18" charset="0"/>
+                  </a:rPr>
+                  <a:t>— структурная масса (кг) </a:t>
+                </a:r>
+                <a:endParaRPr lang="ru-RU" sz="1800" dirty="0">
+                  <a:effectLst/>
+                  <a:latin typeface="Times New Roman" panose="02020603050405020304" pitchFamily="18" charset="0"/>
+                  <a:ea typeface="Times New Roman" panose="02020603050405020304" pitchFamily="18" charset="0"/>
+                </a:endParaRPr>
+              </a:p>
+              <a:p>
+                <a:pPr marL="0" indent="0">
+                  <a:lnSpc>
+                    <a:spcPct val="100000"/>
+                  </a:lnSpc>
+                  <a:spcBef>
+                    <a:spcPts val="0"/>
+                  </a:spcBef>
+                  <a:spcAft>
+                    <a:spcPts val="600"/>
+                  </a:spcAft>
+                  <a:buNone/>
+                </a:pPr>
+                <a:r>
+                  <a:rPr lang="ru-RU" sz="1800" dirty="0">
+                    <a:effectLst/>
+                    <a:latin typeface="Calibri" panose="020F0502020204030204" pitchFamily="34" charset="0"/>
+                    <a:ea typeface="Times New Roman" panose="02020603050405020304" pitchFamily="18" charset="0"/>
+                  </a:rPr>
+                  <a:t>- </a:t>
+                </a:r>
+                <a14:m>
+                  <m:oMath xmlns:m="http://schemas.openxmlformats.org/officeDocument/2006/math">
+                    <m:r>
+                      <m:rPr>
+                        <m:lit/>
+                      </m:rPr>
+                      <a:rPr lang="ru-RU" sz="1800" i="1">
+                        <a:effectLst/>
+                        <a:latin typeface="Cambria Math" panose="02040503050406030204" pitchFamily="18" charset="0"/>
+                        <a:ea typeface="Times New Roman" panose="02020603050405020304" pitchFamily="18" charset="0"/>
+                        <a:cs typeface="Calibri" panose="020F0502020204030204" pitchFamily="34" charset="0"/>
+                      </a:rPr>
+                      <m:t>(</m:t>
+                    </m:r>
+                    <m:sSub>
+                      <m:sSubPr>
+                        <m:ctrlPr>
+                          <a:rPr lang="ru-RU" sz="1800" i="1">
+                            <a:effectLst/>
+                            <a:latin typeface="Cambria Math" panose="02040503050406030204" pitchFamily="18" charset="0"/>
+                            <a:ea typeface="Times New Roman" panose="02020603050405020304" pitchFamily="18" charset="0"/>
+                            <a:cs typeface="Calibri" panose="020F0502020204030204" pitchFamily="34" charset="0"/>
+                          </a:rPr>
+                        </m:ctrlPr>
+                      </m:sSubPr>
+                      <m:e>
+                        <m:r>
+                          <a:rPr lang="ru-RU" sz="1800" i="1">
+                            <a:effectLst/>
+                            <a:latin typeface="Cambria Math" panose="02040503050406030204" pitchFamily="18" charset="0"/>
+                            <a:ea typeface="Times New Roman" panose="02020603050405020304" pitchFamily="18" charset="0"/>
+                            <a:cs typeface="Calibri" panose="020F0502020204030204" pitchFamily="34" charset="0"/>
+                          </a:rPr>
+                          <m:t>𝑚</m:t>
+                        </m:r>
+                      </m:e>
+                      <m:sub>
+                        <m:r>
+                          <m:rPr>
+                            <m:nor/>
+                          </m:rPr>
+                          <a:rPr lang="ru-RU" sz="1800">
+                            <a:effectLst/>
+                            <a:latin typeface="Calibri" panose="020F0502020204030204" pitchFamily="34" charset="0"/>
+                            <a:ea typeface="Times New Roman" panose="02020603050405020304" pitchFamily="18" charset="0"/>
+                          </a:rPr>
+                          <m:t>fuel</m:t>
+                        </m:r>
+                      </m:sub>
+                    </m:sSub>
+                    <m:d>
+                      <m:dPr>
+                        <m:ctrlPr>
+                          <a:rPr lang="ru-RU" sz="1800" i="1">
+                            <a:effectLst/>
+                            <a:latin typeface="Cambria Math" panose="02040503050406030204" pitchFamily="18" charset="0"/>
+                            <a:ea typeface="Times New Roman" panose="02020603050405020304" pitchFamily="18" charset="0"/>
+                            <a:cs typeface="Calibri" panose="020F0502020204030204" pitchFamily="34" charset="0"/>
+                          </a:rPr>
+                        </m:ctrlPr>
+                      </m:dPr>
+                      <m:e>
+                        <m:r>
+                          <a:rPr lang="ru-RU" sz="1800" i="1">
+                            <a:effectLst/>
+                            <a:latin typeface="Cambria Math" panose="02040503050406030204" pitchFamily="18" charset="0"/>
+                            <a:ea typeface="Times New Roman" panose="02020603050405020304" pitchFamily="18" charset="0"/>
+                            <a:cs typeface="Calibri" panose="020F0502020204030204" pitchFamily="34" charset="0"/>
+                          </a:rPr>
+                          <m:t>𝑡</m:t>
+                        </m:r>
+                      </m:e>
+                    </m:d>
+                    <m:r>
+                      <m:rPr>
+                        <m:lit/>
+                      </m:rPr>
+                      <a:rPr lang="ru-RU" sz="1800" i="1">
+                        <a:effectLst/>
+                        <a:latin typeface="Cambria Math" panose="02040503050406030204" pitchFamily="18" charset="0"/>
+                        <a:ea typeface="Times New Roman" panose="02020603050405020304" pitchFamily="18" charset="0"/>
+                        <a:cs typeface="Calibri" panose="020F0502020204030204" pitchFamily="34" charset="0"/>
+                      </a:rPr>
+                      <m:t>)</m:t>
+                    </m:r>
+                  </m:oMath>
+                </a14:m>
+                <a:r>
+                  <a:rPr lang="ru-RU" sz="1800" dirty="0">
+                    <a:effectLst/>
+                    <a:latin typeface="Calibri" panose="020F0502020204030204" pitchFamily="34" charset="0"/>
+                    <a:ea typeface="Times New Roman" panose="02020603050405020304" pitchFamily="18" charset="0"/>
+                  </a:rPr>
+                  <a:t> — текущая масса топлива (кг) </a:t>
+                </a:r>
+                <a:endParaRPr lang="ru-RU" sz="1800" dirty="0">
+                  <a:effectLst/>
+                  <a:latin typeface="Times New Roman" panose="02020603050405020304" pitchFamily="18" charset="0"/>
+                  <a:ea typeface="Times New Roman" panose="02020603050405020304" pitchFamily="18" charset="0"/>
+                </a:endParaRPr>
+              </a:p>
+              <a:p>
+                <a:pPr marL="0" indent="0">
+                  <a:lnSpc>
+                    <a:spcPct val="100000"/>
+                  </a:lnSpc>
+                  <a:spcBef>
+                    <a:spcPts val="0"/>
+                  </a:spcBef>
+                  <a:spcAft>
+                    <a:spcPts val="600"/>
+                  </a:spcAft>
+                  <a:buNone/>
+                </a:pPr>
+                <a:r>
+                  <a:rPr lang="ru-RU" sz="1800" dirty="0">
+                    <a:effectLst/>
+                    <a:latin typeface="Calibri" panose="020F0502020204030204" pitchFamily="34" charset="0"/>
+                    <a:ea typeface="Times New Roman" panose="02020603050405020304" pitchFamily="18" charset="0"/>
+                  </a:rPr>
+                  <a:t>- </a:t>
+                </a:r>
+                <a14:m>
+                  <m:oMath xmlns:m="http://schemas.openxmlformats.org/officeDocument/2006/math">
+                    <m:r>
+                      <m:rPr>
+                        <m:lit/>
+                      </m:rPr>
+                      <a:rPr lang="ru-RU" sz="1800" i="1">
+                        <a:effectLst/>
+                        <a:latin typeface="Cambria Math" panose="02040503050406030204" pitchFamily="18" charset="0"/>
+                        <a:ea typeface="Times New Roman" panose="02020603050405020304" pitchFamily="18" charset="0"/>
+                        <a:cs typeface="Calibri" panose="020F0502020204030204" pitchFamily="34" charset="0"/>
+                      </a:rPr>
+                      <m:t>(</m:t>
+                    </m:r>
+                    <m:sSub>
+                      <m:sSubPr>
+                        <m:ctrlPr>
+                          <a:rPr lang="ru-RU" sz="1800" i="1">
+                            <a:effectLst/>
+                            <a:latin typeface="Cambria Math" panose="02040503050406030204" pitchFamily="18" charset="0"/>
+                            <a:ea typeface="Times New Roman" panose="02020603050405020304" pitchFamily="18" charset="0"/>
+                            <a:cs typeface="Calibri" panose="020F0502020204030204" pitchFamily="34" charset="0"/>
+                          </a:rPr>
+                        </m:ctrlPr>
+                      </m:sSubPr>
+                      <m:e>
+                        <m:r>
+                          <a:rPr lang="ru-RU" sz="1800" i="1">
+                            <a:effectLst/>
+                            <a:latin typeface="Cambria Math" panose="02040503050406030204" pitchFamily="18" charset="0"/>
+                            <a:ea typeface="Times New Roman" panose="02020603050405020304" pitchFamily="18" charset="0"/>
+                            <a:cs typeface="Calibri" panose="020F0502020204030204" pitchFamily="34" charset="0"/>
+                          </a:rPr>
+                          <m:t>𝑚</m:t>
+                        </m:r>
+                      </m:e>
+                      <m:sub>
+                        <m:r>
+                          <m:rPr>
+                            <m:nor/>
+                          </m:rPr>
+                          <a:rPr lang="ru-RU" sz="1800">
+                            <a:effectLst/>
+                            <a:latin typeface="Calibri" panose="020F0502020204030204" pitchFamily="34" charset="0"/>
+                            <a:ea typeface="Times New Roman" panose="02020603050405020304" pitchFamily="18" charset="0"/>
+                          </a:rPr>
+                          <m:t>penalty</m:t>
+                        </m:r>
+                      </m:sub>
+                    </m:sSub>
+                    <m:r>
+                      <m:rPr>
+                        <m:lit/>
+                      </m:rPr>
+                      <a:rPr lang="ru-RU" sz="1800" i="1">
+                        <a:effectLst/>
+                        <a:latin typeface="Cambria Math" panose="02040503050406030204" pitchFamily="18" charset="0"/>
+                        <a:ea typeface="Times New Roman" panose="02020603050405020304" pitchFamily="18" charset="0"/>
+                        <a:cs typeface="Calibri" panose="020F0502020204030204" pitchFamily="34" charset="0"/>
+                      </a:rPr>
+                      <m:t>)</m:t>
+                    </m:r>
+                  </m:oMath>
+                </a14:m>
+                <a:r>
+                  <a:rPr lang="ru-RU" sz="1800" dirty="0">
+                    <a:effectLst/>
+                    <a:latin typeface="Calibri" panose="020F0502020204030204" pitchFamily="34" charset="0"/>
+                    <a:ea typeface="Times New Roman" panose="02020603050405020304" pitchFamily="18" charset="0"/>
+                  </a:rPr>
+                  <a:t> — межступенчатый штраф (кг) </a:t>
+                </a:r>
+                <a:endParaRPr lang="ru-RU" sz="1800" dirty="0">
+                  <a:effectLst/>
+                  <a:latin typeface="Times New Roman" panose="02020603050405020304" pitchFamily="18" charset="0"/>
+                  <a:ea typeface="Times New Roman" panose="02020603050405020304" pitchFamily="18" charset="0"/>
+                </a:endParaRPr>
+              </a:p>
+            </p:txBody>
+          </p:sp>
+        </mc:Choice>
+        <mc:Fallback>
+          <p:sp>
+            <p:nvSpPr>
+              <p:cNvPr id="9" name="TextBox 8">
+                <a:extLst>
+                  <a:ext uri="{FF2B5EF4-FFF2-40B4-BE49-F238E27FC236}">
+                    <a16:creationId xmlns:a16="http://schemas.microsoft.com/office/drawing/2014/main" id="{F9A8D2F5-1A89-4C11-8C03-71C5DFB9CB62}"/>
+                  </a:ext>
+                </a:extLst>
+              </p:cNvPr>
+              <p:cNvSpPr txBox="1">
+                <a:spLocks noRot="1" noChangeAspect="1" noMove="1" noResize="1" noEditPoints="1" noAdjustHandles="1" noChangeArrowheads="1" noChangeShapeType="1" noTextEdit="1"/>
+              </p:cNvSpPr>
+              <p:nvPr/>
+            </p:nvSpPr>
+            <p:spPr>
+              <a:xfrm>
+                <a:off x="396474" y="2905875"/>
+                <a:ext cx="4511857" cy="1911292"/>
+              </a:xfrm>
+              <a:prstGeom prst="rect">
+                <a:avLst/>
+              </a:prstGeom>
+              <a:blipFill>
+                <a:blip r:embed="rId5"/>
+                <a:stretch>
+                  <a:fillRect l="-943" t="-1587" b="-1905"/>
+                </a:stretch>
+              </a:blipFill>
+              <a:ln>
+                <a:solidFill>
+                  <a:schemeClr val="tx1">
+                    <a:lumMod val="50000"/>
+                    <a:lumOff val="50000"/>
+                  </a:schemeClr>
+                </a:solidFill>
+              </a:ln>
+            </p:spPr>
+            <p:txBody>
+              <a:bodyPr/>
+              <a:lstStyle/>
+              <a:p>
+                <a:r>
+                  <a:rPr lang="ru-RU">
+                    <a:noFill/>
+                  </a:rPr>
+                  <a:t> </a:t>
+                </a:r>
+              </a:p>
+            </p:txBody>
+          </p:sp>
+        </mc:Fallback>
+      </mc:AlternateContent>
+      <mc:AlternateContent xmlns:mc="http://schemas.openxmlformats.org/markup-compatibility/2006">
+        <mc:Choice xmlns:a14="http://schemas.microsoft.com/office/drawing/2010/main" Requires="a14">
+          <p:sp>
+            <p:nvSpPr>
+              <p:cNvPr id="12" name="TextBox 11">
+                <a:extLst>
+                  <a:ext uri="{FF2B5EF4-FFF2-40B4-BE49-F238E27FC236}">
+                    <a16:creationId xmlns:a16="http://schemas.microsoft.com/office/drawing/2014/main" id="{46B86D8D-75DA-4D70-895D-66D095C16BAA}"/>
+                  </a:ext>
+                </a:extLst>
+              </p:cNvPr>
+              <p:cNvSpPr txBox="1"/>
+              <p:nvPr/>
+            </p:nvSpPr>
+            <p:spPr>
+              <a:xfrm>
+                <a:off x="5163208" y="3476435"/>
+                <a:ext cx="5344510" cy="2775632"/>
+              </a:xfrm>
+              <a:prstGeom prst="rect">
+                <a:avLst/>
+              </a:prstGeom>
+              <a:noFill/>
+              <a:ln>
+                <a:solidFill>
+                  <a:schemeClr val="tx1">
+                    <a:lumMod val="50000"/>
+                    <a:lumOff val="50000"/>
+                  </a:schemeClr>
+                </a:solidFill>
+              </a:ln>
+            </p:spPr>
+            <p:txBody>
+              <a:bodyPr wrap="square">
+                <a:spAutoFit/>
+              </a:bodyPr>
+              <a:lstStyle/>
+              <a:p>
+                <a:pPr>
+                  <a:spcAft>
+                    <a:spcPts val="600"/>
+                  </a:spcAft>
+                </a:pPr>
+                <a:r>
+                  <a:rPr lang="ru-RU" b="1" dirty="0">
+                    <a:latin typeface="Calibri" panose="020F0502020204030204" pitchFamily="34" charset="0"/>
+                    <a:ea typeface="Times New Roman" panose="02020603050405020304" pitchFamily="18" charset="0"/>
+                  </a:rPr>
+                  <a:t>Ускорение свободного падения на высоте</a:t>
+                </a:r>
+                <a:endParaRPr lang="ru-RU" dirty="0">
+                  <a:latin typeface="Times New Roman" panose="02020603050405020304" pitchFamily="18" charset="0"/>
+                  <a:ea typeface="Times New Roman" panose="02020603050405020304" pitchFamily="18" charset="0"/>
+                </a:endParaRPr>
+              </a:p>
+              <a:p>
+                <a:pPr>
+                  <a:spcAft>
+                    <a:spcPts val="600"/>
+                  </a:spcAft>
+                </a:pPr>
+                <a14:m>
+                  <m:oMathPara xmlns:m="http://schemas.openxmlformats.org/officeDocument/2006/math">
+                    <m:oMathParaPr>
+                      <m:jc m:val="centerGroup"/>
+                    </m:oMathParaPr>
+                    <m:oMath xmlns:m="http://schemas.openxmlformats.org/officeDocument/2006/math">
+                      <m:r>
+                        <a:rPr lang="en-US" i="1">
+                          <a:latin typeface="Cambria Math" panose="02040503050406030204" pitchFamily="18" charset="0"/>
+                          <a:ea typeface="Times New Roman" panose="02020603050405020304" pitchFamily="18" charset="0"/>
+                          <a:cs typeface="Calibri" panose="020F0502020204030204" pitchFamily="34" charset="0"/>
+                        </a:rPr>
+                        <m:t>𝑔</m:t>
+                      </m:r>
+                      <m:d>
+                        <m:dPr>
+                          <m:ctrlPr>
+                            <a:rPr lang="ru-RU" i="1">
+                              <a:latin typeface="Cambria Math" panose="02040503050406030204" pitchFamily="18" charset="0"/>
+                              <a:ea typeface="Times New Roman" panose="02020603050405020304" pitchFamily="18" charset="0"/>
+                              <a:cs typeface="Calibri" panose="020F0502020204030204" pitchFamily="34" charset="0"/>
+                            </a:rPr>
+                          </m:ctrlPr>
+                        </m:dPr>
+                        <m:e>
+                          <m:r>
+                            <a:rPr lang="en-US" i="1">
+                              <a:latin typeface="Cambria Math" panose="02040503050406030204" pitchFamily="18" charset="0"/>
+                              <a:ea typeface="Times New Roman" panose="02020603050405020304" pitchFamily="18" charset="0"/>
+                              <a:cs typeface="Calibri" panose="020F0502020204030204" pitchFamily="34" charset="0"/>
+                            </a:rPr>
+                            <m:t>h</m:t>
+                          </m:r>
+                        </m:e>
+                      </m:d>
+                      <m:r>
+                        <a:rPr lang="en-US" i="1">
+                          <a:latin typeface="Cambria Math" panose="02040503050406030204" pitchFamily="18" charset="0"/>
+                          <a:ea typeface="Times New Roman" panose="02020603050405020304" pitchFamily="18" charset="0"/>
+                          <a:cs typeface="Calibri" panose="020F0502020204030204" pitchFamily="34" charset="0"/>
+                        </a:rPr>
+                        <m:t>=</m:t>
+                      </m:r>
+                      <m:f>
+                        <m:fPr>
+                          <m:ctrlPr>
+                            <a:rPr lang="ru-RU" i="1">
+                              <a:latin typeface="Cambria Math" panose="02040503050406030204" pitchFamily="18" charset="0"/>
+                              <a:ea typeface="Times New Roman" panose="02020603050405020304" pitchFamily="18" charset="0"/>
+                              <a:cs typeface="Calibri" panose="020F0502020204030204" pitchFamily="34" charset="0"/>
+                            </a:rPr>
+                          </m:ctrlPr>
+                        </m:fPr>
+                        <m:num>
+                          <m:r>
+                            <a:rPr lang="en-US" i="1">
+                              <a:latin typeface="Cambria Math" panose="02040503050406030204" pitchFamily="18" charset="0"/>
+                              <a:ea typeface="Times New Roman" panose="02020603050405020304" pitchFamily="18" charset="0"/>
+                              <a:cs typeface="Calibri" panose="020F0502020204030204" pitchFamily="34" charset="0"/>
+                            </a:rPr>
+                            <m:t>𝐺𝑀</m:t>
+                          </m:r>
+                        </m:num>
+                        <m:den>
+                          <m:sSup>
+                            <m:sSupPr>
+                              <m:ctrlPr>
+                                <a:rPr lang="ru-RU" i="1">
+                                  <a:latin typeface="Cambria Math" panose="02040503050406030204" pitchFamily="18" charset="0"/>
+                                  <a:ea typeface="Times New Roman" panose="02020603050405020304" pitchFamily="18" charset="0"/>
+                                  <a:cs typeface="Calibri" panose="020F0502020204030204" pitchFamily="34" charset="0"/>
+                                </a:rPr>
+                              </m:ctrlPr>
+                            </m:sSupPr>
+                            <m:e>
+                              <m:d>
+                                <m:dPr>
+                                  <m:ctrlPr>
+                                    <a:rPr lang="ru-RU" i="1">
+                                      <a:latin typeface="Cambria Math" panose="02040503050406030204" pitchFamily="18" charset="0"/>
+                                      <a:ea typeface="Times New Roman" panose="02020603050405020304" pitchFamily="18" charset="0"/>
+                                      <a:cs typeface="Calibri" panose="020F0502020204030204" pitchFamily="34" charset="0"/>
+                                    </a:rPr>
+                                  </m:ctrlPr>
+                                </m:dPr>
+                                <m:e>
+                                  <m:r>
+                                    <a:rPr lang="en-US" i="1">
+                                      <a:latin typeface="Cambria Math" panose="02040503050406030204" pitchFamily="18" charset="0"/>
+                                      <a:ea typeface="Times New Roman" panose="02020603050405020304" pitchFamily="18" charset="0"/>
+                                      <a:cs typeface="Calibri" panose="020F0502020204030204" pitchFamily="34" charset="0"/>
+                                    </a:rPr>
+                                    <m:t>𝑅</m:t>
+                                  </m:r>
+                                  <m:r>
+                                    <a:rPr lang="en-US" i="1">
+                                      <a:latin typeface="Cambria Math" panose="02040503050406030204" pitchFamily="18" charset="0"/>
+                                      <a:ea typeface="Times New Roman" panose="02020603050405020304" pitchFamily="18" charset="0"/>
+                                      <a:cs typeface="Calibri" panose="020F0502020204030204" pitchFamily="34" charset="0"/>
+                                    </a:rPr>
+                                    <m:t>+</m:t>
+                                  </m:r>
+                                  <m:r>
+                                    <a:rPr lang="en-US" i="1">
+                                      <a:latin typeface="Cambria Math" panose="02040503050406030204" pitchFamily="18" charset="0"/>
+                                      <a:ea typeface="Times New Roman" panose="02020603050405020304" pitchFamily="18" charset="0"/>
+                                      <a:cs typeface="Calibri" panose="020F0502020204030204" pitchFamily="34" charset="0"/>
+                                    </a:rPr>
+                                    <m:t>h</m:t>
+                                  </m:r>
+                                </m:e>
+                              </m:d>
+                            </m:e>
+                            <m:sup>
+                              <m:r>
+                                <a:rPr lang="en-US" i="1">
+                                  <a:latin typeface="Cambria Math" panose="02040503050406030204" pitchFamily="18" charset="0"/>
+                                  <a:ea typeface="Times New Roman" panose="02020603050405020304" pitchFamily="18" charset="0"/>
+                                  <a:cs typeface="Calibri" panose="020F0502020204030204" pitchFamily="34" charset="0"/>
+                                </a:rPr>
+                                <m:t>2</m:t>
+                              </m:r>
+                            </m:sup>
+                          </m:sSup>
+                        </m:den>
+                      </m:f>
+                    </m:oMath>
+                  </m:oMathPara>
+                </a14:m>
+                <a:endParaRPr lang="ru-RU" dirty="0">
+                  <a:latin typeface="Times New Roman" panose="02020603050405020304" pitchFamily="18" charset="0"/>
+                  <a:ea typeface="Times New Roman" panose="02020603050405020304" pitchFamily="18" charset="0"/>
+                </a:endParaRPr>
+              </a:p>
+              <a:p>
+                <a:pPr>
+                  <a:spcAft>
+                    <a:spcPts val="600"/>
+                  </a:spcAft>
+                </a:pPr>
+                <a:r>
+                  <a:rPr lang="ru-RU" dirty="0">
+                    <a:latin typeface="Calibri" panose="020F0502020204030204" pitchFamily="34" charset="0"/>
+                    <a:ea typeface="Times New Roman" panose="02020603050405020304" pitchFamily="18" charset="0"/>
+                  </a:rPr>
+                  <a:t>- </a:t>
+                </a:r>
+                <a14:m>
+                  <m:oMath xmlns:m="http://schemas.openxmlformats.org/officeDocument/2006/math">
+                    <m:r>
+                      <m:rPr>
+                        <m:lit/>
+                      </m:rPr>
+                      <a:rPr lang="ru-RU" i="1">
+                        <a:latin typeface="Cambria Math" panose="02040503050406030204" pitchFamily="18" charset="0"/>
+                        <a:ea typeface="Times New Roman" panose="02020603050405020304" pitchFamily="18" charset="0"/>
+                        <a:cs typeface="Calibri" panose="020F0502020204030204" pitchFamily="34" charset="0"/>
+                      </a:rPr>
+                      <m:t>(</m:t>
+                    </m:r>
+                    <m:r>
+                      <a:rPr lang="ru-RU" i="1">
+                        <a:latin typeface="Cambria Math" panose="02040503050406030204" pitchFamily="18" charset="0"/>
+                        <a:ea typeface="Times New Roman" panose="02020603050405020304" pitchFamily="18" charset="0"/>
+                        <a:cs typeface="Calibri" panose="020F0502020204030204" pitchFamily="34" charset="0"/>
+                      </a:rPr>
+                      <m:t>𝑔</m:t>
+                    </m:r>
+                    <m:d>
+                      <m:dPr>
+                        <m:ctrlPr>
+                          <a:rPr lang="ru-RU" i="1">
+                            <a:latin typeface="Cambria Math" panose="02040503050406030204" pitchFamily="18" charset="0"/>
+                            <a:ea typeface="Times New Roman" panose="02020603050405020304" pitchFamily="18" charset="0"/>
+                            <a:cs typeface="Calibri" panose="020F0502020204030204" pitchFamily="34" charset="0"/>
+                          </a:rPr>
+                        </m:ctrlPr>
+                      </m:dPr>
+                      <m:e>
+                        <m:r>
+                          <a:rPr lang="ru-RU" i="1">
+                            <a:latin typeface="Cambria Math" panose="02040503050406030204" pitchFamily="18" charset="0"/>
+                            <a:ea typeface="Times New Roman" panose="02020603050405020304" pitchFamily="18" charset="0"/>
+                            <a:cs typeface="Calibri" panose="020F0502020204030204" pitchFamily="34" charset="0"/>
+                          </a:rPr>
+                          <m:t>h</m:t>
+                        </m:r>
+                      </m:e>
+                    </m:d>
+                    <m:r>
+                      <m:rPr>
+                        <m:lit/>
+                      </m:rPr>
+                      <a:rPr lang="ru-RU" i="1">
+                        <a:latin typeface="Cambria Math" panose="02040503050406030204" pitchFamily="18" charset="0"/>
+                        <a:ea typeface="Times New Roman" panose="02020603050405020304" pitchFamily="18" charset="0"/>
+                        <a:cs typeface="Calibri" panose="020F0502020204030204" pitchFamily="34" charset="0"/>
+                      </a:rPr>
+                      <m:t>)</m:t>
+                    </m:r>
+                  </m:oMath>
+                </a14:m>
+                <a:r>
+                  <a:rPr lang="ru-RU" dirty="0">
+                    <a:latin typeface="Calibri" panose="020F0502020204030204" pitchFamily="34" charset="0"/>
+                    <a:ea typeface="Times New Roman" panose="02020603050405020304" pitchFamily="18" charset="0"/>
+                  </a:rPr>
+                  <a:t> — ускорение силы тяжести (м/с²) </a:t>
+                </a:r>
+                <a:endParaRPr lang="ru-RU" dirty="0">
+                  <a:latin typeface="Times New Roman" panose="02020603050405020304" pitchFamily="18" charset="0"/>
+                  <a:ea typeface="Times New Roman" panose="02020603050405020304" pitchFamily="18" charset="0"/>
+                </a:endParaRPr>
+              </a:p>
+              <a:p>
+                <a:pPr>
+                  <a:spcAft>
+                    <a:spcPts val="600"/>
+                  </a:spcAft>
+                </a:pPr>
+                <a:r>
+                  <a:rPr lang="ru-RU" dirty="0">
+                    <a:latin typeface="Calibri" panose="020F0502020204030204" pitchFamily="34" charset="0"/>
+                    <a:ea typeface="Times New Roman" panose="02020603050405020304" pitchFamily="18" charset="0"/>
+                  </a:rPr>
+                  <a:t>- </a:t>
+                </a:r>
+                <a14:m>
+                  <m:oMath xmlns:m="http://schemas.openxmlformats.org/officeDocument/2006/math">
+                    <m:r>
+                      <m:rPr>
+                        <m:lit/>
+                      </m:rPr>
+                      <a:rPr lang="ru-RU" i="1">
+                        <a:latin typeface="Cambria Math" panose="02040503050406030204" pitchFamily="18" charset="0"/>
+                        <a:ea typeface="Times New Roman" panose="02020603050405020304" pitchFamily="18" charset="0"/>
+                        <a:cs typeface="Calibri" panose="020F0502020204030204" pitchFamily="34" charset="0"/>
+                      </a:rPr>
+                      <m:t>(</m:t>
+                    </m:r>
+                    <m:r>
+                      <a:rPr lang="ru-RU" i="1">
+                        <a:latin typeface="Cambria Math" panose="02040503050406030204" pitchFamily="18" charset="0"/>
+                        <a:ea typeface="Times New Roman" panose="02020603050405020304" pitchFamily="18" charset="0"/>
+                        <a:cs typeface="Calibri" panose="020F0502020204030204" pitchFamily="34" charset="0"/>
+                      </a:rPr>
+                      <m:t>𝐺</m:t>
+                    </m:r>
+                    <m:r>
+                      <m:rPr>
+                        <m:lit/>
+                      </m:rPr>
+                      <a:rPr lang="ru-RU" i="1">
+                        <a:latin typeface="Cambria Math" panose="02040503050406030204" pitchFamily="18" charset="0"/>
+                        <a:ea typeface="Times New Roman" panose="02020603050405020304" pitchFamily="18" charset="0"/>
+                        <a:cs typeface="Calibri" panose="020F0502020204030204" pitchFamily="34" charset="0"/>
+                      </a:rPr>
+                      <m:t>)</m:t>
+                    </m:r>
+                  </m:oMath>
+                </a14:m>
+                <a:r>
+                  <a:rPr lang="ru-RU" dirty="0">
+                    <a:latin typeface="Calibri" panose="020F0502020204030204" pitchFamily="34" charset="0"/>
+                    <a:ea typeface="Times New Roman" panose="02020603050405020304" pitchFamily="18" charset="0"/>
+                  </a:rPr>
+                  <a:t> — гравитационная постоянная (м³·кг⁻¹·с⁻²) </a:t>
+                </a:r>
+                <a:endParaRPr lang="ru-RU" dirty="0">
+                  <a:latin typeface="Times New Roman" panose="02020603050405020304" pitchFamily="18" charset="0"/>
+                  <a:ea typeface="Times New Roman" panose="02020603050405020304" pitchFamily="18" charset="0"/>
+                </a:endParaRPr>
+              </a:p>
+              <a:p>
+                <a:pPr>
+                  <a:spcAft>
+                    <a:spcPts val="600"/>
+                  </a:spcAft>
+                </a:pPr>
+                <a:r>
+                  <a:rPr lang="ru-RU" dirty="0">
+                    <a:latin typeface="Calibri" panose="020F0502020204030204" pitchFamily="34" charset="0"/>
+                    <a:ea typeface="Times New Roman" panose="02020603050405020304" pitchFamily="18" charset="0"/>
+                  </a:rPr>
+                  <a:t>- </a:t>
+                </a:r>
+                <a14:m>
+                  <m:oMath xmlns:m="http://schemas.openxmlformats.org/officeDocument/2006/math">
+                    <m:r>
+                      <m:rPr>
+                        <m:lit/>
+                      </m:rPr>
+                      <a:rPr lang="ru-RU" i="1">
+                        <a:latin typeface="Cambria Math" panose="02040503050406030204" pitchFamily="18" charset="0"/>
+                        <a:ea typeface="Times New Roman" panose="02020603050405020304" pitchFamily="18" charset="0"/>
+                        <a:cs typeface="Calibri" panose="020F0502020204030204" pitchFamily="34" charset="0"/>
+                      </a:rPr>
+                      <m:t>(</m:t>
+                    </m:r>
+                    <m:r>
+                      <a:rPr lang="ru-RU" i="1">
+                        <a:latin typeface="Cambria Math" panose="02040503050406030204" pitchFamily="18" charset="0"/>
+                        <a:ea typeface="Times New Roman" panose="02020603050405020304" pitchFamily="18" charset="0"/>
+                        <a:cs typeface="Calibri" panose="020F0502020204030204" pitchFamily="34" charset="0"/>
+                      </a:rPr>
+                      <m:t>𝑀</m:t>
+                    </m:r>
+                    <m:r>
+                      <m:rPr>
+                        <m:lit/>
+                      </m:rPr>
+                      <a:rPr lang="ru-RU" i="1">
+                        <a:latin typeface="Cambria Math" panose="02040503050406030204" pitchFamily="18" charset="0"/>
+                        <a:ea typeface="Times New Roman" panose="02020603050405020304" pitchFamily="18" charset="0"/>
+                        <a:cs typeface="Calibri" panose="020F0502020204030204" pitchFamily="34" charset="0"/>
+                      </a:rPr>
+                      <m:t>)</m:t>
+                    </m:r>
+                  </m:oMath>
+                </a14:m>
+                <a:r>
+                  <a:rPr lang="ru-RU" dirty="0">
+                    <a:latin typeface="Calibri" panose="020F0502020204030204" pitchFamily="34" charset="0"/>
+                    <a:ea typeface="Times New Roman" panose="02020603050405020304" pitchFamily="18" charset="0"/>
+                  </a:rPr>
+                  <a:t> — масса планеты (кг) </a:t>
+                </a:r>
+                <a:endParaRPr lang="ru-RU" dirty="0">
+                  <a:latin typeface="Times New Roman" panose="02020603050405020304" pitchFamily="18" charset="0"/>
+                  <a:ea typeface="Times New Roman" panose="02020603050405020304" pitchFamily="18" charset="0"/>
+                </a:endParaRPr>
+              </a:p>
+              <a:p>
+                <a:pPr>
+                  <a:spcAft>
+                    <a:spcPts val="600"/>
+                  </a:spcAft>
+                </a:pPr>
+                <a:r>
+                  <a:rPr lang="ru-RU" dirty="0">
+                    <a:latin typeface="Calibri" panose="020F0502020204030204" pitchFamily="34" charset="0"/>
+                    <a:ea typeface="Times New Roman" panose="02020603050405020304" pitchFamily="18" charset="0"/>
+                  </a:rPr>
+                  <a:t>- </a:t>
+                </a:r>
+                <a14:m>
+                  <m:oMath xmlns:m="http://schemas.openxmlformats.org/officeDocument/2006/math">
+                    <m:r>
+                      <m:rPr>
+                        <m:lit/>
+                      </m:rPr>
+                      <a:rPr lang="ru-RU" i="1">
+                        <a:latin typeface="Cambria Math" panose="02040503050406030204" pitchFamily="18" charset="0"/>
+                        <a:ea typeface="Times New Roman" panose="02020603050405020304" pitchFamily="18" charset="0"/>
+                        <a:cs typeface="Calibri" panose="020F0502020204030204" pitchFamily="34" charset="0"/>
+                      </a:rPr>
+                      <m:t>(</m:t>
+                    </m:r>
+                    <m:r>
+                      <a:rPr lang="ru-RU" i="1">
+                        <a:latin typeface="Cambria Math" panose="02040503050406030204" pitchFamily="18" charset="0"/>
+                        <a:ea typeface="Times New Roman" panose="02020603050405020304" pitchFamily="18" charset="0"/>
+                        <a:cs typeface="Calibri" panose="020F0502020204030204" pitchFamily="34" charset="0"/>
+                      </a:rPr>
+                      <m:t>𝑅</m:t>
+                    </m:r>
+                    <m:r>
+                      <m:rPr>
+                        <m:lit/>
+                      </m:rPr>
+                      <a:rPr lang="ru-RU" i="1">
+                        <a:latin typeface="Cambria Math" panose="02040503050406030204" pitchFamily="18" charset="0"/>
+                        <a:ea typeface="Times New Roman" panose="02020603050405020304" pitchFamily="18" charset="0"/>
+                        <a:cs typeface="Calibri" panose="020F0502020204030204" pitchFamily="34" charset="0"/>
+                      </a:rPr>
+                      <m:t>)</m:t>
+                    </m:r>
+                  </m:oMath>
+                </a14:m>
+                <a:r>
+                  <a:rPr lang="ru-RU" dirty="0">
+                    <a:latin typeface="Calibri" panose="020F0502020204030204" pitchFamily="34" charset="0"/>
+                    <a:ea typeface="Times New Roman" panose="02020603050405020304" pitchFamily="18" charset="0"/>
+                  </a:rPr>
+                  <a:t> — радиус планеты (м) </a:t>
+                </a:r>
+                <a:endParaRPr lang="ru-RU" dirty="0">
+                  <a:latin typeface="Times New Roman" panose="02020603050405020304" pitchFamily="18" charset="0"/>
+                  <a:ea typeface="Times New Roman" panose="02020603050405020304" pitchFamily="18" charset="0"/>
+                </a:endParaRPr>
+              </a:p>
+              <a:p>
+                <a:pPr>
+                  <a:spcAft>
+                    <a:spcPts val="600"/>
+                  </a:spcAft>
+                </a:pPr>
+                <a:r>
+                  <a:rPr lang="ru-RU" dirty="0">
+                    <a:latin typeface="Calibri" panose="020F0502020204030204" pitchFamily="34" charset="0"/>
+                    <a:ea typeface="Times New Roman" panose="02020603050405020304" pitchFamily="18" charset="0"/>
+                  </a:rPr>
+                  <a:t>- </a:t>
+                </a:r>
+                <a14:m>
+                  <m:oMath xmlns:m="http://schemas.openxmlformats.org/officeDocument/2006/math">
+                    <m:r>
+                      <m:rPr>
+                        <m:lit/>
+                      </m:rPr>
+                      <a:rPr lang="ru-RU" i="1">
+                        <a:latin typeface="Cambria Math" panose="02040503050406030204" pitchFamily="18" charset="0"/>
+                        <a:ea typeface="Times New Roman" panose="02020603050405020304" pitchFamily="18" charset="0"/>
+                        <a:cs typeface="Calibri" panose="020F0502020204030204" pitchFamily="34" charset="0"/>
+                      </a:rPr>
+                      <m:t>(</m:t>
+                    </m:r>
+                    <m:r>
+                      <a:rPr lang="ru-RU" i="1">
+                        <a:latin typeface="Cambria Math" panose="02040503050406030204" pitchFamily="18" charset="0"/>
+                        <a:ea typeface="Times New Roman" panose="02020603050405020304" pitchFamily="18" charset="0"/>
+                        <a:cs typeface="Calibri" panose="020F0502020204030204" pitchFamily="34" charset="0"/>
+                      </a:rPr>
+                      <m:t>h</m:t>
+                    </m:r>
+                    <m:r>
+                      <m:rPr>
+                        <m:lit/>
+                      </m:rPr>
+                      <a:rPr lang="ru-RU" i="1">
+                        <a:latin typeface="Cambria Math" panose="02040503050406030204" pitchFamily="18" charset="0"/>
+                        <a:ea typeface="Times New Roman" panose="02020603050405020304" pitchFamily="18" charset="0"/>
+                        <a:cs typeface="Calibri" panose="020F0502020204030204" pitchFamily="34" charset="0"/>
+                      </a:rPr>
+                      <m:t>)</m:t>
+                    </m:r>
+                  </m:oMath>
+                </a14:m>
+                <a:r>
+                  <a:rPr lang="ru-RU" dirty="0">
+                    <a:latin typeface="Calibri" panose="020F0502020204030204" pitchFamily="34" charset="0"/>
+                    <a:ea typeface="Times New Roman" panose="02020603050405020304" pitchFamily="18" charset="0"/>
+                  </a:rPr>
+                  <a:t> — высота над поверхностью (м) </a:t>
+                </a:r>
+                <a:endParaRPr lang="ru-RU" dirty="0">
+                  <a:latin typeface="Times New Roman" panose="02020603050405020304" pitchFamily="18" charset="0"/>
+                  <a:ea typeface="Times New Roman" panose="02020603050405020304" pitchFamily="18" charset="0"/>
+                </a:endParaRPr>
+              </a:p>
+            </p:txBody>
+          </p:sp>
+        </mc:Choice>
+        <mc:Fallback>
+          <p:sp>
+            <p:nvSpPr>
+              <p:cNvPr id="12" name="TextBox 11">
+                <a:extLst>
+                  <a:ext uri="{FF2B5EF4-FFF2-40B4-BE49-F238E27FC236}">
+                    <a16:creationId xmlns:a16="http://schemas.microsoft.com/office/drawing/2014/main" id="{46B86D8D-75DA-4D70-895D-66D095C16BAA}"/>
+                  </a:ext>
+                </a:extLst>
+              </p:cNvPr>
+              <p:cNvSpPr txBox="1">
+                <a:spLocks noRot="1" noChangeAspect="1" noMove="1" noResize="1" noEditPoints="1" noAdjustHandles="1" noChangeArrowheads="1" noChangeShapeType="1" noTextEdit="1"/>
+              </p:cNvSpPr>
+              <p:nvPr/>
+            </p:nvSpPr>
+            <p:spPr>
+              <a:xfrm>
+                <a:off x="5163208" y="3476435"/>
+                <a:ext cx="5344510" cy="2775632"/>
+              </a:xfrm>
+              <a:prstGeom prst="rect">
+                <a:avLst/>
+              </a:prstGeom>
+              <a:blipFill>
+                <a:blip r:embed="rId6"/>
+                <a:stretch>
+                  <a:fillRect l="-910" t="-873" b="-2183"/>
+                </a:stretch>
+              </a:blipFill>
+              <a:ln>
+                <a:solidFill>
+                  <a:schemeClr val="tx1">
+                    <a:lumMod val="50000"/>
+                    <a:lumOff val="50000"/>
+                  </a:schemeClr>
+                </a:solidFill>
+              </a:ln>
+            </p:spPr>
+            <p:txBody>
+              <a:bodyPr/>
+              <a:lstStyle/>
+              <a:p>
+                <a:r>
+                  <a:rPr lang="ru-RU">
+                    <a:noFill/>
+                  </a:rPr>
+                  <a:t> </a:t>
+                </a:r>
+              </a:p>
+            </p:txBody>
+          </p:sp>
+        </mc:Fallback>
+      </mc:AlternateContent>
+    </p:spTree>
+    <p:extLst>
+      <p:ext uri="{BB962C8B-B14F-4D97-AF65-F5344CB8AC3E}">
+        <p14:creationId xmlns:p14="http://schemas.microsoft.com/office/powerpoint/2010/main" val="1661069513"/>
+      </p:ext>
+    </p:extLst>
+  </p:cSld>
+  <p:clrMapOvr>
+    <a:masterClrMapping/>
+  </p:clrMapOvr>
+</p:sld>
+</file>
+
+<file path=ppt/slides/slide3.xml><?xml version="1.0" encoding="utf-8"?>
+<p:sld xmlns:a="http://schemas.openxmlformats.org/drawingml/2006/main" xmlns:r="http://schemas.openxmlformats.org/officeDocument/2006/relationships" xmlns:p="http://schemas.openxmlformats.org/presentationml/2006/main">
+  <p:cSld>
+    <p:spTree>
+      <p:nvGrpSpPr>
+        <p:cNvPr id="1" name=""/>
+        <p:cNvGrpSpPr/>
+        <p:nvPr/>
+      </p:nvGrpSpPr>
+      <p:grpSpPr>
+        <a:xfrm>
+          <a:off x="0" y="0"/>
+          <a:ext cx="0" cy="0"/>
+          <a:chOff x="0" y="0"/>
+          <a:chExt cx="0" cy="0"/>
+        </a:xfrm>
+      </p:grpSpPr>
+      <mc:AlternateContent xmlns:mc="http://schemas.openxmlformats.org/markup-compatibility/2006">
+        <mc:Choice xmlns:a14="http://schemas.microsoft.com/office/drawing/2010/main" Requires="a14">
+          <p:sp>
+            <p:nvSpPr>
+              <p:cNvPr id="8" name="TextBox 7">
+                <a:extLst>
+                  <a:ext uri="{FF2B5EF4-FFF2-40B4-BE49-F238E27FC236}">
+                    <a16:creationId xmlns:a16="http://schemas.microsoft.com/office/drawing/2014/main" id="{F8CFBDAA-B845-4C53-8511-67F56157498B}"/>
+                  </a:ext>
+                </a:extLst>
+              </p:cNvPr>
+              <p:cNvSpPr txBox="1"/>
+              <p:nvPr/>
+            </p:nvSpPr>
+            <p:spPr>
+              <a:xfrm>
+                <a:off x="249620" y="683763"/>
+                <a:ext cx="4947744" cy="2734595"/>
+              </a:xfrm>
+              <a:prstGeom prst="rect">
+                <a:avLst/>
+              </a:prstGeom>
+              <a:noFill/>
+              <a:ln>
+                <a:solidFill>
+                  <a:schemeClr val="tx1">
+                    <a:lumMod val="50000"/>
+                    <a:lumOff val="50000"/>
+                  </a:schemeClr>
+                </a:solidFill>
+              </a:ln>
+            </p:spPr>
+            <p:txBody>
+              <a:bodyPr wrap="square">
+                <a:spAutoFit/>
+              </a:bodyPr>
+              <a:lstStyle/>
+              <a:p>
+                <a:pPr>
+                  <a:spcAft>
+                    <a:spcPts val="600"/>
+                  </a:spcAft>
+                </a:pPr>
+                <a:r>
+                  <a:rPr lang="ru-RU" sz="1800" b="1" dirty="0">
+                    <a:effectLst/>
+                    <a:latin typeface="Calibri" panose="020F0502020204030204" pitchFamily="34" charset="0"/>
+                    <a:ea typeface="Times New Roman" panose="02020603050405020304" pitchFamily="18" charset="0"/>
+                  </a:rPr>
+                  <a:t>Сила аэродинамического сопротивления</a:t>
+                </a:r>
+                <a:endParaRPr lang="ru-RU" sz="1800" dirty="0">
+                  <a:effectLst/>
+                  <a:latin typeface="Times New Roman" panose="02020603050405020304" pitchFamily="18" charset="0"/>
+                  <a:ea typeface="Times New Roman" panose="02020603050405020304" pitchFamily="18" charset="0"/>
+                </a:endParaRPr>
+              </a:p>
+              <a:p>
+                <a:pPr>
+                  <a:spcAft>
+                    <a:spcPts val="600"/>
+                  </a:spcAft>
+                </a:pPr>
+                <a14:m>
+                  <m:oMathPara xmlns:m="http://schemas.openxmlformats.org/officeDocument/2006/math">
+                    <m:oMathParaPr>
+                      <m:jc m:val="centerGroup"/>
+                    </m:oMathParaPr>
+                    <m:oMath xmlns:m="http://schemas.openxmlformats.org/officeDocument/2006/math">
+                      <m:sSub>
+                        <m:sSubPr>
+                          <m:ctrlPr>
+                            <a:rPr lang="ru-RU" sz="1800" i="1">
+                              <a:effectLst/>
+                              <a:latin typeface="Cambria Math" panose="02040503050406030204" pitchFamily="18" charset="0"/>
+                              <a:ea typeface="Times New Roman" panose="02020603050405020304" pitchFamily="18" charset="0"/>
+                              <a:cs typeface="Calibri" panose="020F0502020204030204" pitchFamily="34" charset="0"/>
+                            </a:rPr>
+                          </m:ctrlPr>
+                        </m:sSubPr>
+                        <m:e>
+                          <m:r>
+                            <a:rPr lang="en-US" sz="1800" i="1">
+                              <a:effectLst/>
+                              <a:latin typeface="Cambria Math" panose="02040503050406030204" pitchFamily="18" charset="0"/>
+                              <a:ea typeface="Times New Roman" panose="02020603050405020304" pitchFamily="18" charset="0"/>
+                              <a:cs typeface="Calibri" panose="020F0502020204030204" pitchFamily="34" charset="0"/>
+                            </a:rPr>
+                            <m:t>𝐹</m:t>
+                          </m:r>
+                        </m:e>
+                        <m:sub>
+                          <m:r>
+                            <a:rPr lang="en-US" sz="1800" i="1">
+                              <a:effectLst/>
+                              <a:latin typeface="Cambria Math" panose="02040503050406030204" pitchFamily="18" charset="0"/>
+                              <a:ea typeface="Times New Roman" panose="02020603050405020304" pitchFamily="18" charset="0"/>
+                              <a:cs typeface="Calibri" panose="020F0502020204030204" pitchFamily="34" charset="0"/>
+                            </a:rPr>
+                            <m:t>𝑑</m:t>
+                          </m:r>
+                        </m:sub>
+                      </m:sSub>
+                      <m:r>
+                        <a:rPr lang="en-US" sz="1800" i="1">
+                          <a:effectLst/>
+                          <a:latin typeface="Cambria Math" panose="02040503050406030204" pitchFamily="18" charset="0"/>
+                          <a:ea typeface="Times New Roman" panose="02020603050405020304" pitchFamily="18" charset="0"/>
+                          <a:cs typeface="Calibri" panose="020F0502020204030204" pitchFamily="34" charset="0"/>
+                        </a:rPr>
+                        <m:t>=</m:t>
+                      </m:r>
+                      <m:f>
+                        <m:fPr>
+                          <m:ctrlPr>
+                            <a:rPr lang="ru-RU" sz="1800" i="1">
+                              <a:effectLst/>
+                              <a:latin typeface="Cambria Math" panose="02040503050406030204" pitchFamily="18" charset="0"/>
+                              <a:ea typeface="Times New Roman" panose="02020603050405020304" pitchFamily="18" charset="0"/>
+                              <a:cs typeface="Calibri" panose="020F0502020204030204" pitchFamily="34" charset="0"/>
+                            </a:rPr>
+                          </m:ctrlPr>
+                        </m:fPr>
+                        <m:num>
+                          <m:r>
+                            <a:rPr lang="en-US" sz="1800" i="1">
+                              <a:effectLst/>
+                              <a:latin typeface="Cambria Math" panose="02040503050406030204" pitchFamily="18" charset="0"/>
+                              <a:ea typeface="Times New Roman" panose="02020603050405020304" pitchFamily="18" charset="0"/>
+                              <a:cs typeface="Calibri" panose="020F0502020204030204" pitchFamily="34" charset="0"/>
+                            </a:rPr>
+                            <m:t>1</m:t>
+                          </m:r>
+                        </m:num>
+                        <m:den>
+                          <m:r>
+                            <a:rPr lang="en-US" sz="1800" i="1">
+                              <a:effectLst/>
+                              <a:latin typeface="Cambria Math" panose="02040503050406030204" pitchFamily="18" charset="0"/>
+                              <a:ea typeface="Times New Roman" panose="02020603050405020304" pitchFamily="18" charset="0"/>
+                              <a:cs typeface="Calibri" panose="020F0502020204030204" pitchFamily="34" charset="0"/>
+                            </a:rPr>
+                            <m:t>2</m:t>
+                          </m:r>
+                        </m:den>
+                      </m:f>
+                      <m:sSub>
+                        <m:sSubPr>
+                          <m:ctrlPr>
+                            <a:rPr lang="ru-RU" sz="1800" i="1">
+                              <a:effectLst/>
+                              <a:latin typeface="Cambria Math" panose="02040503050406030204" pitchFamily="18" charset="0"/>
+                              <a:ea typeface="Times New Roman" panose="02020603050405020304" pitchFamily="18" charset="0"/>
+                              <a:cs typeface="Calibri" panose="020F0502020204030204" pitchFamily="34" charset="0"/>
+                            </a:rPr>
+                          </m:ctrlPr>
+                        </m:sSubPr>
+                        <m:e>
+                          <m:r>
+                            <a:rPr lang="en-US" sz="1800" i="1">
+                              <a:effectLst/>
+                              <a:latin typeface="Cambria Math" panose="02040503050406030204" pitchFamily="18" charset="0"/>
+                              <a:ea typeface="Times New Roman" panose="02020603050405020304" pitchFamily="18" charset="0"/>
+                              <a:cs typeface="Calibri" panose="020F0502020204030204" pitchFamily="34" charset="0"/>
+                            </a:rPr>
+                            <m:t>𝐶</m:t>
+                          </m:r>
+                        </m:e>
+                        <m:sub>
+                          <m:r>
+                            <a:rPr lang="en-US" sz="1800" i="1">
+                              <a:effectLst/>
+                              <a:latin typeface="Cambria Math" panose="02040503050406030204" pitchFamily="18" charset="0"/>
+                              <a:ea typeface="Times New Roman" panose="02020603050405020304" pitchFamily="18" charset="0"/>
+                              <a:cs typeface="Calibri" panose="020F0502020204030204" pitchFamily="34" charset="0"/>
+                            </a:rPr>
+                            <m:t>𝑑</m:t>
+                          </m:r>
+                        </m:sub>
+                      </m:sSub>
+                      <m:r>
+                        <m:rPr>
+                          <m:sty m:val="p"/>
+                        </m:rPr>
+                        <a:rPr lang="en-US" sz="1800">
+                          <a:effectLst/>
+                          <a:latin typeface="Cambria Math" panose="02040503050406030204" pitchFamily="18" charset="0"/>
+                          <a:ea typeface="Times New Roman" panose="02020603050405020304" pitchFamily="18" charset="0"/>
+                          <a:cs typeface="Calibri" panose="020F0502020204030204" pitchFamily="34" charset="0"/>
+                        </a:rPr>
+                        <m:t>ρ</m:t>
+                      </m:r>
+                      <m:sSup>
+                        <m:sSupPr>
+                          <m:ctrlPr>
+                            <a:rPr lang="ru-RU" sz="1800" i="1">
+                              <a:effectLst/>
+                              <a:latin typeface="Cambria Math" panose="02040503050406030204" pitchFamily="18" charset="0"/>
+                              <a:ea typeface="Times New Roman" panose="02020603050405020304" pitchFamily="18" charset="0"/>
+                              <a:cs typeface="Calibri" panose="020F0502020204030204" pitchFamily="34" charset="0"/>
+                            </a:rPr>
+                          </m:ctrlPr>
+                        </m:sSupPr>
+                        <m:e>
+                          <m:r>
+                            <a:rPr lang="en-US" sz="1800" i="1">
+                              <a:effectLst/>
+                              <a:latin typeface="Cambria Math" panose="02040503050406030204" pitchFamily="18" charset="0"/>
+                              <a:ea typeface="Times New Roman" panose="02020603050405020304" pitchFamily="18" charset="0"/>
+                              <a:cs typeface="Calibri" panose="020F0502020204030204" pitchFamily="34" charset="0"/>
+                            </a:rPr>
+                            <m:t>𝑣</m:t>
+                          </m:r>
+                        </m:e>
+                        <m:sup>
+                          <m:r>
+                            <a:rPr lang="en-US" sz="1800" i="1">
+                              <a:effectLst/>
+                              <a:latin typeface="Cambria Math" panose="02040503050406030204" pitchFamily="18" charset="0"/>
+                              <a:ea typeface="Times New Roman" panose="02020603050405020304" pitchFamily="18" charset="0"/>
+                              <a:cs typeface="Calibri" panose="020F0502020204030204" pitchFamily="34" charset="0"/>
+                            </a:rPr>
+                            <m:t>2</m:t>
+                          </m:r>
+                        </m:sup>
+                      </m:sSup>
+                      <m:r>
+                        <a:rPr lang="en-US" sz="1800" i="1">
+                          <a:effectLst/>
+                          <a:latin typeface="Cambria Math" panose="02040503050406030204" pitchFamily="18" charset="0"/>
+                          <a:ea typeface="Times New Roman" panose="02020603050405020304" pitchFamily="18" charset="0"/>
+                          <a:cs typeface="Calibri" panose="020F0502020204030204" pitchFamily="34" charset="0"/>
+                        </a:rPr>
+                        <m:t>𝐴</m:t>
+                      </m:r>
+                    </m:oMath>
+                  </m:oMathPara>
+                </a14:m>
+                <a:endParaRPr lang="ru-RU" sz="1800" dirty="0">
+                  <a:effectLst/>
+                  <a:latin typeface="Times New Roman" panose="02020603050405020304" pitchFamily="18" charset="0"/>
+                  <a:ea typeface="Times New Roman" panose="02020603050405020304" pitchFamily="18" charset="0"/>
+                </a:endParaRPr>
+              </a:p>
+              <a:p>
+                <a:pPr>
+                  <a:spcAft>
+                    <a:spcPts val="600"/>
+                  </a:spcAft>
+                </a:pPr>
+                <a:r>
+                  <a:rPr lang="ru-RU" sz="1800" dirty="0">
+                    <a:effectLst/>
+                    <a:latin typeface="Calibri" panose="020F0502020204030204" pitchFamily="34" charset="0"/>
+                    <a:ea typeface="Times New Roman" panose="02020603050405020304" pitchFamily="18" charset="0"/>
+                  </a:rPr>
+                  <a:t>- </a:t>
+                </a:r>
+                <a14:m>
+                  <m:oMath xmlns:m="http://schemas.openxmlformats.org/officeDocument/2006/math">
+                    <m:r>
+                      <m:rPr>
+                        <m:lit/>
+                      </m:rPr>
+                      <a:rPr lang="ru-RU" sz="1800" i="1">
+                        <a:effectLst/>
+                        <a:latin typeface="Cambria Math" panose="02040503050406030204" pitchFamily="18" charset="0"/>
+                        <a:ea typeface="Times New Roman" panose="02020603050405020304" pitchFamily="18" charset="0"/>
+                        <a:cs typeface="Calibri" panose="020F0502020204030204" pitchFamily="34" charset="0"/>
+                      </a:rPr>
+                      <m:t>(</m:t>
+                    </m:r>
+                    <m:sSub>
+                      <m:sSubPr>
+                        <m:ctrlPr>
+                          <a:rPr lang="ru-RU" sz="1800" i="1">
+                            <a:effectLst/>
+                            <a:latin typeface="Cambria Math" panose="02040503050406030204" pitchFamily="18" charset="0"/>
+                            <a:ea typeface="Times New Roman" panose="02020603050405020304" pitchFamily="18" charset="0"/>
+                            <a:cs typeface="Calibri" panose="020F0502020204030204" pitchFamily="34" charset="0"/>
+                          </a:rPr>
+                        </m:ctrlPr>
+                      </m:sSubPr>
+                      <m:e>
+                        <m:r>
+                          <a:rPr lang="ru-RU" sz="1800" i="1">
+                            <a:effectLst/>
+                            <a:latin typeface="Cambria Math" panose="02040503050406030204" pitchFamily="18" charset="0"/>
+                            <a:ea typeface="Times New Roman" panose="02020603050405020304" pitchFamily="18" charset="0"/>
+                            <a:cs typeface="Calibri" panose="020F0502020204030204" pitchFamily="34" charset="0"/>
+                          </a:rPr>
+                          <m:t>𝐹</m:t>
+                        </m:r>
+                      </m:e>
+                      <m:sub>
+                        <m:r>
+                          <a:rPr lang="ru-RU" sz="1800" i="1">
+                            <a:effectLst/>
+                            <a:latin typeface="Cambria Math" panose="02040503050406030204" pitchFamily="18" charset="0"/>
+                            <a:ea typeface="Times New Roman" panose="02020603050405020304" pitchFamily="18" charset="0"/>
+                            <a:cs typeface="Calibri" panose="020F0502020204030204" pitchFamily="34" charset="0"/>
+                          </a:rPr>
+                          <m:t>𝑑</m:t>
+                        </m:r>
+                      </m:sub>
+                    </m:sSub>
+                    <m:r>
+                      <m:rPr>
+                        <m:lit/>
+                      </m:rPr>
+                      <a:rPr lang="ru-RU" sz="1800" i="1">
+                        <a:effectLst/>
+                        <a:latin typeface="Cambria Math" panose="02040503050406030204" pitchFamily="18" charset="0"/>
+                        <a:ea typeface="Times New Roman" panose="02020603050405020304" pitchFamily="18" charset="0"/>
+                        <a:cs typeface="Calibri" panose="020F0502020204030204" pitchFamily="34" charset="0"/>
+                      </a:rPr>
+                      <m:t>)</m:t>
+                    </m:r>
+                  </m:oMath>
+                </a14:m>
+                <a:r>
+                  <a:rPr lang="ru-RU" sz="1800" dirty="0">
+                    <a:effectLst/>
+                    <a:latin typeface="Calibri" panose="020F0502020204030204" pitchFamily="34" charset="0"/>
+                    <a:ea typeface="Times New Roman" panose="02020603050405020304" pitchFamily="18" charset="0"/>
+                  </a:rPr>
+                  <a:t> — сила сопротивления (Н) </a:t>
+                </a:r>
+                <a:endParaRPr lang="ru-RU" sz="1800" dirty="0">
+                  <a:effectLst/>
+                  <a:latin typeface="Times New Roman" panose="02020603050405020304" pitchFamily="18" charset="0"/>
+                  <a:ea typeface="Times New Roman" panose="02020603050405020304" pitchFamily="18" charset="0"/>
+                </a:endParaRPr>
+              </a:p>
+              <a:p>
+                <a:pPr>
+                  <a:spcAft>
+                    <a:spcPts val="600"/>
+                  </a:spcAft>
+                </a:pPr>
+                <a:r>
+                  <a:rPr lang="ru-RU" sz="1800" dirty="0">
+                    <a:effectLst/>
+                    <a:latin typeface="Calibri" panose="020F0502020204030204" pitchFamily="34" charset="0"/>
+                    <a:ea typeface="Times New Roman" panose="02020603050405020304" pitchFamily="18" charset="0"/>
+                  </a:rPr>
+                  <a:t>- </a:t>
+                </a:r>
+                <a14:m>
+                  <m:oMath xmlns:m="http://schemas.openxmlformats.org/officeDocument/2006/math">
+                    <m:r>
+                      <m:rPr>
+                        <m:lit/>
+                      </m:rPr>
+                      <a:rPr lang="ru-RU" sz="1800" i="1">
+                        <a:effectLst/>
+                        <a:latin typeface="Cambria Math" panose="02040503050406030204" pitchFamily="18" charset="0"/>
+                        <a:ea typeface="Times New Roman" panose="02020603050405020304" pitchFamily="18" charset="0"/>
+                        <a:cs typeface="Calibri" panose="020F0502020204030204" pitchFamily="34" charset="0"/>
+                      </a:rPr>
+                      <m:t>(</m:t>
+                    </m:r>
+                    <m:sSub>
+                      <m:sSubPr>
+                        <m:ctrlPr>
+                          <a:rPr lang="ru-RU" sz="1800" i="1">
+                            <a:effectLst/>
+                            <a:latin typeface="Cambria Math" panose="02040503050406030204" pitchFamily="18" charset="0"/>
+                            <a:ea typeface="Times New Roman" panose="02020603050405020304" pitchFamily="18" charset="0"/>
+                            <a:cs typeface="Calibri" panose="020F0502020204030204" pitchFamily="34" charset="0"/>
+                          </a:rPr>
+                        </m:ctrlPr>
+                      </m:sSubPr>
+                      <m:e>
+                        <m:r>
+                          <a:rPr lang="ru-RU" sz="1800" i="1">
+                            <a:effectLst/>
+                            <a:latin typeface="Cambria Math" panose="02040503050406030204" pitchFamily="18" charset="0"/>
+                            <a:ea typeface="Times New Roman" panose="02020603050405020304" pitchFamily="18" charset="0"/>
+                            <a:cs typeface="Calibri" panose="020F0502020204030204" pitchFamily="34" charset="0"/>
+                          </a:rPr>
+                          <m:t>𝐶</m:t>
+                        </m:r>
+                      </m:e>
+                      <m:sub>
+                        <m:r>
+                          <a:rPr lang="ru-RU" sz="1800" i="1">
+                            <a:effectLst/>
+                            <a:latin typeface="Cambria Math" panose="02040503050406030204" pitchFamily="18" charset="0"/>
+                            <a:ea typeface="Times New Roman" panose="02020603050405020304" pitchFamily="18" charset="0"/>
+                            <a:cs typeface="Calibri" panose="020F0502020204030204" pitchFamily="34" charset="0"/>
+                          </a:rPr>
+                          <m:t>𝑑</m:t>
+                        </m:r>
+                      </m:sub>
+                    </m:sSub>
+                    <m:r>
+                      <m:rPr>
+                        <m:lit/>
+                      </m:rPr>
+                      <a:rPr lang="ru-RU" sz="1800" i="1">
+                        <a:effectLst/>
+                        <a:latin typeface="Cambria Math" panose="02040503050406030204" pitchFamily="18" charset="0"/>
+                        <a:ea typeface="Times New Roman" panose="02020603050405020304" pitchFamily="18" charset="0"/>
+                        <a:cs typeface="Calibri" panose="020F0502020204030204" pitchFamily="34" charset="0"/>
+                      </a:rPr>
+                      <m:t>)</m:t>
+                    </m:r>
+                  </m:oMath>
+                </a14:m>
+                <a:r>
+                  <a:rPr lang="ru-RU" sz="1800" dirty="0">
+                    <a:effectLst/>
+                    <a:latin typeface="Calibri" panose="020F0502020204030204" pitchFamily="34" charset="0"/>
+                    <a:ea typeface="Times New Roman" panose="02020603050405020304" pitchFamily="18" charset="0"/>
+                  </a:rPr>
+                  <a:t> — коэффициент сопротивления () </a:t>
+                </a:r>
+                <a:endParaRPr lang="ru-RU" sz="1800" dirty="0">
+                  <a:effectLst/>
+                  <a:latin typeface="Times New Roman" panose="02020603050405020304" pitchFamily="18" charset="0"/>
+                  <a:ea typeface="Times New Roman" panose="02020603050405020304" pitchFamily="18" charset="0"/>
+                </a:endParaRPr>
+              </a:p>
+              <a:p>
+                <a:pPr>
+                  <a:spcAft>
+                    <a:spcPts val="600"/>
+                  </a:spcAft>
+                </a:pPr>
+                <a:r>
+                  <a:rPr lang="ru-RU" sz="1800" dirty="0">
+                    <a:effectLst/>
+                    <a:latin typeface="Calibri" panose="020F0502020204030204" pitchFamily="34" charset="0"/>
+                    <a:ea typeface="Times New Roman" panose="02020603050405020304" pitchFamily="18" charset="0"/>
+                  </a:rPr>
+                  <a:t>- </a:t>
+                </a:r>
+                <a14:m>
+                  <m:oMath xmlns:m="http://schemas.openxmlformats.org/officeDocument/2006/math">
+                    <m:r>
+                      <m:rPr>
+                        <m:lit/>
+                      </m:rPr>
+                      <a:rPr lang="ru-RU" sz="1800" i="1">
+                        <a:effectLst/>
+                        <a:latin typeface="Cambria Math" panose="02040503050406030204" pitchFamily="18" charset="0"/>
+                        <a:ea typeface="Times New Roman" panose="02020603050405020304" pitchFamily="18" charset="0"/>
+                        <a:cs typeface="Calibri" panose="020F0502020204030204" pitchFamily="34" charset="0"/>
+                      </a:rPr>
+                      <m:t>(</m:t>
+                    </m:r>
+                    <m:r>
+                      <m:rPr>
+                        <m:sty m:val="p"/>
+                      </m:rPr>
+                      <a:rPr lang="ru-RU" sz="1800">
+                        <a:effectLst/>
+                        <a:latin typeface="Cambria Math" panose="02040503050406030204" pitchFamily="18" charset="0"/>
+                        <a:ea typeface="Times New Roman" panose="02020603050405020304" pitchFamily="18" charset="0"/>
+                        <a:cs typeface="Calibri" panose="020F0502020204030204" pitchFamily="34" charset="0"/>
+                      </a:rPr>
+                      <m:t>ρ</m:t>
+                    </m:r>
+                    <m:r>
+                      <m:rPr>
+                        <m:lit/>
+                      </m:rPr>
+                      <a:rPr lang="ru-RU" sz="1800" i="1">
+                        <a:effectLst/>
+                        <a:latin typeface="Cambria Math" panose="02040503050406030204" pitchFamily="18" charset="0"/>
+                        <a:ea typeface="Times New Roman" panose="02020603050405020304" pitchFamily="18" charset="0"/>
+                        <a:cs typeface="Calibri" panose="020F0502020204030204" pitchFamily="34" charset="0"/>
+                      </a:rPr>
+                      <m:t>)</m:t>
+                    </m:r>
+                  </m:oMath>
+                </a14:m>
+                <a:r>
+                  <a:rPr lang="ru-RU" sz="1800" dirty="0">
+                    <a:effectLst/>
+                    <a:latin typeface="Calibri" panose="020F0502020204030204" pitchFamily="34" charset="0"/>
+                    <a:ea typeface="Times New Roman" panose="02020603050405020304" pitchFamily="18" charset="0"/>
+                  </a:rPr>
+                  <a:t> — плотность воздуха (кг/м³) </a:t>
+                </a:r>
+                <a:endParaRPr lang="ru-RU" sz="1800" dirty="0">
+                  <a:effectLst/>
+                  <a:latin typeface="Times New Roman" panose="02020603050405020304" pitchFamily="18" charset="0"/>
+                  <a:ea typeface="Times New Roman" panose="02020603050405020304" pitchFamily="18" charset="0"/>
+                </a:endParaRPr>
+              </a:p>
+              <a:p>
+                <a:pPr>
+                  <a:spcAft>
+                    <a:spcPts val="600"/>
+                  </a:spcAft>
+                </a:pPr>
+                <a:r>
+                  <a:rPr lang="ru-RU" sz="1800" dirty="0">
+                    <a:effectLst/>
+                    <a:latin typeface="Calibri" panose="020F0502020204030204" pitchFamily="34" charset="0"/>
+                    <a:ea typeface="Times New Roman" panose="02020603050405020304" pitchFamily="18" charset="0"/>
+                  </a:rPr>
+                  <a:t>- </a:t>
+                </a:r>
+                <a14:m>
+                  <m:oMath xmlns:m="http://schemas.openxmlformats.org/officeDocument/2006/math">
+                    <m:r>
+                      <m:rPr>
+                        <m:lit/>
+                      </m:rPr>
+                      <a:rPr lang="ru-RU" sz="1800" i="1">
+                        <a:effectLst/>
+                        <a:latin typeface="Cambria Math" panose="02040503050406030204" pitchFamily="18" charset="0"/>
+                        <a:ea typeface="Times New Roman" panose="02020603050405020304" pitchFamily="18" charset="0"/>
+                        <a:cs typeface="Calibri" panose="020F0502020204030204" pitchFamily="34" charset="0"/>
+                      </a:rPr>
+                      <m:t>(</m:t>
+                    </m:r>
+                    <m:r>
+                      <a:rPr lang="ru-RU" sz="1800" i="1">
+                        <a:effectLst/>
+                        <a:latin typeface="Cambria Math" panose="02040503050406030204" pitchFamily="18" charset="0"/>
+                        <a:ea typeface="Times New Roman" panose="02020603050405020304" pitchFamily="18" charset="0"/>
+                        <a:cs typeface="Calibri" panose="020F0502020204030204" pitchFamily="34" charset="0"/>
+                      </a:rPr>
+                      <m:t>𝑣</m:t>
+                    </m:r>
+                    <m:r>
+                      <m:rPr>
+                        <m:lit/>
+                      </m:rPr>
+                      <a:rPr lang="ru-RU" sz="1800" i="1">
+                        <a:effectLst/>
+                        <a:latin typeface="Cambria Math" panose="02040503050406030204" pitchFamily="18" charset="0"/>
+                        <a:ea typeface="Times New Roman" panose="02020603050405020304" pitchFamily="18" charset="0"/>
+                        <a:cs typeface="Calibri" panose="020F0502020204030204" pitchFamily="34" charset="0"/>
+                      </a:rPr>
+                      <m:t>)</m:t>
+                    </m:r>
+                  </m:oMath>
+                </a14:m>
+                <a:r>
+                  <a:rPr lang="ru-RU" sz="1800" dirty="0">
+                    <a:effectLst/>
+                    <a:latin typeface="Calibri" panose="020F0502020204030204" pitchFamily="34" charset="0"/>
+                    <a:ea typeface="Times New Roman" panose="02020603050405020304" pitchFamily="18" charset="0"/>
+                  </a:rPr>
+                  <a:t> — скорость (м/с) </a:t>
+                </a:r>
+                <a:endParaRPr lang="ru-RU" sz="1800" dirty="0">
+                  <a:effectLst/>
+                  <a:latin typeface="Times New Roman" panose="02020603050405020304" pitchFamily="18" charset="0"/>
+                  <a:ea typeface="Times New Roman" panose="02020603050405020304" pitchFamily="18" charset="0"/>
+                </a:endParaRPr>
+              </a:p>
+              <a:p>
+                <a:pPr>
+                  <a:spcAft>
+                    <a:spcPts val="600"/>
+                  </a:spcAft>
+                </a:pPr>
+                <a:r>
+                  <a:rPr lang="ru-RU" sz="1800" dirty="0">
+                    <a:effectLst/>
+                    <a:latin typeface="Calibri" panose="020F0502020204030204" pitchFamily="34" charset="0"/>
+                    <a:ea typeface="Times New Roman" panose="02020603050405020304" pitchFamily="18" charset="0"/>
+                  </a:rPr>
+                  <a:t>- </a:t>
+                </a:r>
+                <a14:m>
+                  <m:oMath xmlns:m="http://schemas.openxmlformats.org/officeDocument/2006/math">
+                    <m:r>
+                      <m:rPr>
+                        <m:lit/>
+                      </m:rPr>
+                      <a:rPr lang="ru-RU" sz="1800" i="1">
+                        <a:effectLst/>
+                        <a:latin typeface="Cambria Math" panose="02040503050406030204" pitchFamily="18" charset="0"/>
+                        <a:ea typeface="Times New Roman" panose="02020603050405020304" pitchFamily="18" charset="0"/>
+                        <a:cs typeface="Calibri" panose="020F0502020204030204" pitchFamily="34" charset="0"/>
+                      </a:rPr>
+                      <m:t>(</m:t>
+                    </m:r>
+                    <m:r>
+                      <a:rPr lang="ru-RU" sz="1800" i="1">
+                        <a:effectLst/>
+                        <a:latin typeface="Cambria Math" panose="02040503050406030204" pitchFamily="18" charset="0"/>
+                        <a:ea typeface="Times New Roman" panose="02020603050405020304" pitchFamily="18" charset="0"/>
+                        <a:cs typeface="Calibri" panose="020F0502020204030204" pitchFamily="34" charset="0"/>
+                      </a:rPr>
+                      <m:t>𝐴</m:t>
+                    </m:r>
+                    <m:r>
+                      <m:rPr>
+                        <m:lit/>
+                      </m:rPr>
+                      <a:rPr lang="ru-RU" sz="1800" i="1">
+                        <a:effectLst/>
+                        <a:latin typeface="Cambria Math" panose="02040503050406030204" pitchFamily="18" charset="0"/>
+                        <a:ea typeface="Times New Roman" panose="02020603050405020304" pitchFamily="18" charset="0"/>
+                        <a:cs typeface="Calibri" panose="020F0502020204030204" pitchFamily="34" charset="0"/>
+                      </a:rPr>
+                      <m:t>)</m:t>
+                    </m:r>
+                  </m:oMath>
+                </a14:m>
+                <a:r>
+                  <a:rPr lang="ru-RU" sz="1800" dirty="0">
+                    <a:effectLst/>
+                    <a:latin typeface="Calibri" panose="020F0502020204030204" pitchFamily="34" charset="0"/>
+                    <a:ea typeface="Times New Roman" panose="02020603050405020304" pitchFamily="18" charset="0"/>
+                  </a:rPr>
+                  <a:t> — характерная площадь поп. сечения (м²) </a:t>
+                </a:r>
+                <a:endParaRPr lang="ru-RU" sz="1800" dirty="0">
+                  <a:effectLst/>
+                  <a:latin typeface="Times New Roman" panose="02020603050405020304" pitchFamily="18" charset="0"/>
+                  <a:ea typeface="Times New Roman" panose="02020603050405020304" pitchFamily="18" charset="0"/>
+                </a:endParaRPr>
+              </a:p>
+            </p:txBody>
+          </p:sp>
+        </mc:Choice>
+        <mc:Fallback>
+          <p:sp>
+            <p:nvSpPr>
+              <p:cNvPr id="8" name="TextBox 7">
+                <a:extLst>
+                  <a:ext uri="{FF2B5EF4-FFF2-40B4-BE49-F238E27FC236}">
+                    <a16:creationId xmlns:a16="http://schemas.microsoft.com/office/drawing/2014/main" id="{F8CFBDAA-B845-4C53-8511-67F56157498B}"/>
+                  </a:ext>
+                </a:extLst>
+              </p:cNvPr>
+              <p:cNvSpPr txBox="1">
+                <a:spLocks noRot="1" noChangeAspect="1" noMove="1" noResize="1" noEditPoints="1" noAdjustHandles="1" noChangeArrowheads="1" noChangeShapeType="1" noTextEdit="1"/>
+              </p:cNvSpPr>
+              <p:nvPr/>
+            </p:nvSpPr>
+            <p:spPr>
+              <a:xfrm>
+                <a:off x="249620" y="683763"/>
+                <a:ext cx="4947744" cy="2734595"/>
+              </a:xfrm>
+              <a:prstGeom prst="rect">
+                <a:avLst/>
+              </a:prstGeom>
+              <a:blipFill>
+                <a:blip r:embed="rId2"/>
+                <a:stretch>
+                  <a:fillRect l="-983" t="-887" b="-2439"/>
+                </a:stretch>
+              </a:blipFill>
+              <a:ln>
+                <a:solidFill>
+                  <a:schemeClr val="tx1">
+                    <a:lumMod val="50000"/>
+                    <a:lumOff val="50000"/>
+                  </a:schemeClr>
+                </a:solidFill>
+              </a:ln>
+            </p:spPr>
+            <p:txBody>
+              <a:bodyPr/>
+              <a:lstStyle/>
+              <a:p>
+                <a:r>
+                  <a:rPr lang="ru-RU">
+                    <a:noFill/>
+                  </a:rPr>
+                  <a:t> </a:t>
+                </a:r>
+              </a:p>
+            </p:txBody>
+          </p:sp>
+        </mc:Fallback>
+      </mc:AlternateContent>
+      <mc:AlternateContent xmlns:mc="http://schemas.openxmlformats.org/markup-compatibility/2006">
+        <mc:Choice xmlns:a14="http://schemas.microsoft.com/office/drawing/2010/main" Requires="a14">
+          <p:sp>
+            <p:nvSpPr>
+              <p:cNvPr id="13" name="TextBox 12">
+                <a:extLst>
+                  <a:ext uri="{FF2B5EF4-FFF2-40B4-BE49-F238E27FC236}">
+                    <a16:creationId xmlns:a16="http://schemas.microsoft.com/office/drawing/2014/main" id="{98C239B4-0FFD-4322-9B37-292DBF6807A0}"/>
+                  </a:ext>
+                </a:extLst>
+              </p:cNvPr>
+              <p:cNvSpPr txBox="1"/>
+              <p:nvPr/>
+            </p:nvSpPr>
+            <p:spPr>
+              <a:xfrm>
+                <a:off x="5552088" y="933960"/>
+                <a:ext cx="4947745" cy="2484398"/>
+              </a:xfrm>
+              <a:prstGeom prst="rect">
+                <a:avLst/>
+              </a:prstGeom>
+              <a:noFill/>
+              <a:ln>
+                <a:solidFill>
+                  <a:schemeClr val="tx1">
+                    <a:lumMod val="50000"/>
+                    <a:lumOff val="50000"/>
+                  </a:schemeClr>
+                </a:solidFill>
+              </a:ln>
+            </p:spPr>
+            <p:txBody>
+              <a:bodyPr wrap="square">
+                <a:spAutoFit/>
+              </a:bodyPr>
+              <a:lstStyle/>
+              <a:p>
+                <a:pPr>
+                  <a:spcAft>
+                    <a:spcPts val="600"/>
+                  </a:spcAft>
+                </a:pPr>
+                <a:r>
+                  <a:rPr lang="ru-RU" sz="1800" b="1" dirty="0">
+                    <a:effectLst/>
+                    <a:latin typeface="Calibri" panose="020F0502020204030204" pitchFamily="34" charset="0"/>
+                    <a:ea typeface="Times New Roman" panose="02020603050405020304" pitchFamily="18" charset="0"/>
+                  </a:rPr>
+                  <a:t>Плотность воздуха</a:t>
+                </a:r>
+                <a:r>
+                  <a:rPr lang="ru-RU" sz="1800" dirty="0">
+                    <a:effectLst/>
+                    <a:latin typeface="Calibri" panose="020F0502020204030204" pitchFamily="34" charset="0"/>
+                    <a:ea typeface="Times New Roman" panose="02020603050405020304" pitchFamily="18" charset="0"/>
+                  </a:rPr>
+                  <a:t> </a:t>
+                </a:r>
+                <a:endParaRPr lang="ru-RU" sz="1800" dirty="0">
+                  <a:effectLst/>
+                  <a:latin typeface="Cambria Math" panose="02040503050406030204" pitchFamily="18" charset="0"/>
+                  <a:ea typeface="Times New Roman" panose="02020603050405020304" pitchFamily="18" charset="0"/>
+                  <a:cs typeface="Calibri" panose="020F0502020204030204" pitchFamily="34" charset="0"/>
+                </a:endParaRPr>
+              </a:p>
+              <a:p>
+                <a:pPr>
+                  <a:spcAft>
+                    <a:spcPts val="600"/>
+                  </a:spcAft>
+                </a:pPr>
+                <a14:m>
+                  <m:oMathPara xmlns:m="http://schemas.openxmlformats.org/officeDocument/2006/math">
+                    <m:oMathParaPr>
+                      <m:jc m:val="centerGroup"/>
+                    </m:oMathParaPr>
+                    <m:oMath xmlns:m="http://schemas.openxmlformats.org/officeDocument/2006/math">
+                      <m:r>
+                        <m:rPr>
+                          <m:sty m:val="p"/>
+                        </m:rPr>
+                        <a:rPr lang="en-US" sz="1800" smtClean="0">
+                          <a:effectLst/>
+                          <a:latin typeface="Cambria Math" panose="02040503050406030204" pitchFamily="18" charset="0"/>
+                          <a:ea typeface="Times New Roman" panose="02020603050405020304" pitchFamily="18" charset="0"/>
+                          <a:cs typeface="Calibri" panose="020F0502020204030204" pitchFamily="34" charset="0"/>
+                        </a:rPr>
+                        <m:t>ρ</m:t>
+                      </m:r>
+                      <m:d>
+                        <m:dPr>
+                          <m:ctrlPr>
+                            <a:rPr lang="ru-RU" sz="1800" i="1">
+                              <a:effectLst/>
+                              <a:latin typeface="Cambria Math" panose="02040503050406030204" pitchFamily="18" charset="0"/>
+                              <a:ea typeface="Times New Roman" panose="02020603050405020304" pitchFamily="18" charset="0"/>
+                              <a:cs typeface="Calibri" panose="020F0502020204030204" pitchFamily="34" charset="0"/>
+                            </a:rPr>
+                          </m:ctrlPr>
+                        </m:dPr>
+                        <m:e>
+                          <m:r>
+                            <a:rPr lang="en-US" sz="1800" i="1">
+                              <a:effectLst/>
+                              <a:latin typeface="Cambria Math" panose="02040503050406030204" pitchFamily="18" charset="0"/>
+                              <a:ea typeface="Times New Roman" panose="02020603050405020304" pitchFamily="18" charset="0"/>
+                              <a:cs typeface="Calibri" panose="020F0502020204030204" pitchFamily="34" charset="0"/>
+                            </a:rPr>
+                            <m:t>h</m:t>
+                          </m:r>
+                        </m:e>
+                      </m:d>
+                      <m:r>
+                        <a:rPr lang="en-US" sz="1800" i="1">
+                          <a:effectLst/>
+                          <a:latin typeface="Cambria Math" panose="02040503050406030204" pitchFamily="18" charset="0"/>
+                          <a:ea typeface="Times New Roman" panose="02020603050405020304" pitchFamily="18" charset="0"/>
+                          <a:cs typeface="Calibri" panose="020F0502020204030204" pitchFamily="34" charset="0"/>
+                        </a:rPr>
+                        <m:t>=</m:t>
+                      </m:r>
+                      <m:sSub>
+                        <m:sSubPr>
+                          <m:ctrlPr>
+                            <a:rPr lang="ru-RU" sz="1800" i="1">
+                              <a:effectLst/>
+                              <a:latin typeface="Cambria Math" panose="02040503050406030204" pitchFamily="18" charset="0"/>
+                              <a:ea typeface="Times New Roman" panose="02020603050405020304" pitchFamily="18" charset="0"/>
+                              <a:cs typeface="Calibri" panose="020F0502020204030204" pitchFamily="34" charset="0"/>
+                            </a:rPr>
+                          </m:ctrlPr>
+                        </m:sSubPr>
+                        <m:e>
+                          <m:r>
+                            <m:rPr>
+                              <m:sty m:val="p"/>
+                            </m:rPr>
+                            <a:rPr lang="en-US" sz="1800">
+                              <a:effectLst/>
+                              <a:latin typeface="Cambria Math" panose="02040503050406030204" pitchFamily="18" charset="0"/>
+                              <a:ea typeface="Times New Roman" panose="02020603050405020304" pitchFamily="18" charset="0"/>
+                              <a:cs typeface="Calibri" panose="020F0502020204030204" pitchFamily="34" charset="0"/>
+                            </a:rPr>
+                            <m:t>ρ</m:t>
+                          </m:r>
+                        </m:e>
+                        <m:sub>
+                          <m:r>
+                            <a:rPr lang="en-US" sz="1800" i="1">
+                              <a:effectLst/>
+                              <a:latin typeface="Cambria Math" panose="02040503050406030204" pitchFamily="18" charset="0"/>
+                              <a:ea typeface="Times New Roman" panose="02020603050405020304" pitchFamily="18" charset="0"/>
+                              <a:cs typeface="Calibri" panose="020F0502020204030204" pitchFamily="34" charset="0"/>
+                            </a:rPr>
+                            <m:t>0</m:t>
+                          </m:r>
+                        </m:sub>
+                      </m:sSub>
+                      <m:func>
+                        <m:funcPr>
+                          <m:ctrlPr>
+                            <a:rPr lang="ru-RU" sz="1800" i="1">
+                              <a:effectLst/>
+                              <a:latin typeface="Cambria Math" panose="02040503050406030204" pitchFamily="18" charset="0"/>
+                              <a:ea typeface="Times New Roman" panose="02020603050405020304" pitchFamily="18" charset="0"/>
+                              <a:cs typeface="Calibri" panose="020F0502020204030204" pitchFamily="34" charset="0"/>
+                            </a:rPr>
+                          </m:ctrlPr>
+                        </m:funcPr>
+                        <m:fName>
+                          <m:r>
+                            <m:rPr>
+                              <m:sty m:val="p"/>
+                            </m:rPr>
+                            <a:rPr lang="en-US" sz="1800">
+                              <a:effectLst/>
+                              <a:latin typeface="Cambria Math" panose="02040503050406030204" pitchFamily="18" charset="0"/>
+                              <a:ea typeface="Times New Roman" panose="02020603050405020304" pitchFamily="18" charset="0"/>
+                              <a:cs typeface="Calibri" panose="020F0502020204030204" pitchFamily="34" charset="0"/>
+                            </a:rPr>
+                            <m:t>exp</m:t>
+                          </m:r>
+                        </m:fName>
+                        <m:e>
+                          <m:d>
+                            <m:dPr>
+                              <m:ctrlPr>
+                                <a:rPr lang="ru-RU" sz="1800" i="1">
+                                  <a:effectLst/>
+                                  <a:latin typeface="Cambria Math" panose="02040503050406030204" pitchFamily="18" charset="0"/>
+                                  <a:ea typeface="Times New Roman" panose="02020603050405020304" pitchFamily="18" charset="0"/>
+                                  <a:cs typeface="Calibri" panose="020F0502020204030204" pitchFamily="34" charset="0"/>
+                                </a:rPr>
+                              </m:ctrlPr>
+                            </m:dPr>
+                            <m:e>
+                              <m:r>
+                                <a:rPr lang="en-US" sz="1800" i="1">
+                                  <a:effectLst/>
+                                  <a:latin typeface="Cambria Math" panose="02040503050406030204" pitchFamily="18" charset="0"/>
+                                  <a:ea typeface="Times New Roman" panose="02020603050405020304" pitchFamily="18" charset="0"/>
+                                  <a:cs typeface="Calibri" panose="020F0502020204030204" pitchFamily="34" charset="0"/>
+                                </a:rPr>
+                                <m:t>−</m:t>
+                              </m:r>
+                              <m:f>
+                                <m:fPr>
+                                  <m:ctrlPr>
+                                    <a:rPr lang="ru-RU" sz="1800" i="1">
+                                      <a:effectLst/>
+                                      <a:latin typeface="Cambria Math" panose="02040503050406030204" pitchFamily="18" charset="0"/>
+                                      <a:ea typeface="Times New Roman" panose="02020603050405020304" pitchFamily="18" charset="0"/>
+                                      <a:cs typeface="Calibri" panose="020F0502020204030204" pitchFamily="34" charset="0"/>
+                                    </a:rPr>
+                                  </m:ctrlPr>
+                                </m:fPr>
+                                <m:num>
+                                  <m:r>
+                                    <a:rPr lang="en-US" sz="1800" i="1">
+                                      <a:effectLst/>
+                                      <a:latin typeface="Cambria Math" panose="02040503050406030204" pitchFamily="18" charset="0"/>
+                                      <a:ea typeface="Times New Roman" panose="02020603050405020304" pitchFamily="18" charset="0"/>
+                                      <a:cs typeface="Calibri" panose="020F0502020204030204" pitchFamily="34" charset="0"/>
+                                    </a:rPr>
+                                    <m:t>h</m:t>
+                                  </m:r>
+                                </m:num>
+                                <m:den>
+                                  <m:r>
+                                    <a:rPr lang="en-US" sz="1800" i="1">
+                                      <a:effectLst/>
+                                      <a:latin typeface="Cambria Math" panose="02040503050406030204" pitchFamily="18" charset="0"/>
+                                      <a:ea typeface="Times New Roman" panose="02020603050405020304" pitchFamily="18" charset="0"/>
+                                      <a:cs typeface="Calibri" panose="020F0502020204030204" pitchFamily="34" charset="0"/>
+                                    </a:rPr>
+                                    <m:t>𝐻</m:t>
+                                  </m:r>
+                                </m:den>
+                              </m:f>
+                            </m:e>
+                          </m:d>
+                        </m:e>
+                      </m:func>
+                    </m:oMath>
+                  </m:oMathPara>
+                </a14:m>
+                <a:endParaRPr lang="ru-RU" sz="1800" dirty="0">
+                  <a:effectLst/>
+                  <a:latin typeface="Times New Roman" panose="02020603050405020304" pitchFamily="18" charset="0"/>
+                  <a:ea typeface="Times New Roman" panose="02020603050405020304" pitchFamily="18" charset="0"/>
+                </a:endParaRPr>
+              </a:p>
+              <a:p>
+                <a:pPr>
+                  <a:spcAft>
+                    <a:spcPts val="600"/>
+                  </a:spcAft>
+                </a:pPr>
+                <a:r>
+                  <a:rPr lang="ru-RU" sz="1800" dirty="0">
+                    <a:effectLst/>
+                    <a:latin typeface="Calibri" panose="020F0502020204030204" pitchFamily="34" charset="0"/>
+                    <a:ea typeface="Times New Roman" panose="02020603050405020304" pitchFamily="18" charset="0"/>
+                  </a:rPr>
+                  <a:t>- </a:t>
+                </a:r>
+                <a14:m>
+                  <m:oMath xmlns:m="http://schemas.openxmlformats.org/officeDocument/2006/math">
+                    <m:r>
+                      <m:rPr>
+                        <m:lit/>
+                      </m:rPr>
+                      <a:rPr lang="ru-RU" sz="1800" i="1">
+                        <a:effectLst/>
+                        <a:latin typeface="Cambria Math" panose="02040503050406030204" pitchFamily="18" charset="0"/>
+                        <a:ea typeface="Times New Roman" panose="02020603050405020304" pitchFamily="18" charset="0"/>
+                        <a:cs typeface="Calibri" panose="020F0502020204030204" pitchFamily="34" charset="0"/>
+                      </a:rPr>
+                      <m:t>(</m:t>
+                    </m:r>
+                    <m:r>
+                      <m:rPr>
+                        <m:sty m:val="p"/>
+                      </m:rPr>
+                      <a:rPr lang="ru-RU" sz="1800">
+                        <a:effectLst/>
+                        <a:latin typeface="Cambria Math" panose="02040503050406030204" pitchFamily="18" charset="0"/>
+                        <a:ea typeface="Times New Roman" panose="02020603050405020304" pitchFamily="18" charset="0"/>
+                        <a:cs typeface="Calibri" panose="020F0502020204030204" pitchFamily="34" charset="0"/>
+                      </a:rPr>
+                      <m:t>ρ</m:t>
+                    </m:r>
+                    <m:d>
+                      <m:dPr>
+                        <m:ctrlPr>
+                          <a:rPr lang="ru-RU" sz="1800" i="1">
+                            <a:effectLst/>
+                            <a:latin typeface="Cambria Math" panose="02040503050406030204" pitchFamily="18" charset="0"/>
+                            <a:ea typeface="Times New Roman" panose="02020603050405020304" pitchFamily="18" charset="0"/>
+                            <a:cs typeface="Calibri" panose="020F0502020204030204" pitchFamily="34" charset="0"/>
+                          </a:rPr>
+                        </m:ctrlPr>
+                      </m:dPr>
+                      <m:e>
+                        <m:r>
+                          <a:rPr lang="ru-RU" sz="1800" i="1">
+                            <a:effectLst/>
+                            <a:latin typeface="Cambria Math" panose="02040503050406030204" pitchFamily="18" charset="0"/>
+                            <a:ea typeface="Times New Roman" panose="02020603050405020304" pitchFamily="18" charset="0"/>
+                            <a:cs typeface="Calibri" panose="020F0502020204030204" pitchFamily="34" charset="0"/>
+                          </a:rPr>
+                          <m:t>h</m:t>
+                        </m:r>
+                      </m:e>
+                    </m:d>
+                    <m:r>
+                      <m:rPr>
+                        <m:lit/>
+                      </m:rPr>
+                      <a:rPr lang="ru-RU" sz="1800" i="1">
+                        <a:effectLst/>
+                        <a:latin typeface="Cambria Math" panose="02040503050406030204" pitchFamily="18" charset="0"/>
+                        <a:ea typeface="Times New Roman" panose="02020603050405020304" pitchFamily="18" charset="0"/>
+                        <a:cs typeface="Calibri" panose="020F0502020204030204" pitchFamily="34" charset="0"/>
+                      </a:rPr>
+                      <m:t>)</m:t>
+                    </m:r>
+                  </m:oMath>
+                </a14:m>
+                <a:r>
+                  <a:rPr lang="ru-RU" sz="1800" dirty="0">
+                    <a:effectLst/>
+                    <a:latin typeface="Calibri" panose="020F0502020204030204" pitchFamily="34" charset="0"/>
+                    <a:ea typeface="Times New Roman" panose="02020603050405020304" pitchFamily="18" charset="0"/>
+                  </a:rPr>
+                  <a:t> — плотность на высоте (кг/м³) </a:t>
+                </a:r>
+                <a:endParaRPr lang="ru-RU" sz="1800" dirty="0">
+                  <a:effectLst/>
+                  <a:latin typeface="Times New Roman" panose="02020603050405020304" pitchFamily="18" charset="0"/>
+                  <a:ea typeface="Times New Roman" panose="02020603050405020304" pitchFamily="18" charset="0"/>
+                </a:endParaRPr>
+              </a:p>
+              <a:p>
+                <a:pPr>
+                  <a:spcAft>
+                    <a:spcPts val="600"/>
+                  </a:spcAft>
+                </a:pPr>
+                <a:r>
+                  <a:rPr lang="ru-RU" sz="1800" dirty="0">
+                    <a:effectLst/>
+                    <a:latin typeface="Calibri" panose="020F0502020204030204" pitchFamily="34" charset="0"/>
+                    <a:ea typeface="Times New Roman" panose="02020603050405020304" pitchFamily="18" charset="0"/>
+                  </a:rPr>
+                  <a:t>- </a:t>
+                </a:r>
+                <a14:m>
+                  <m:oMath xmlns:m="http://schemas.openxmlformats.org/officeDocument/2006/math">
+                    <m:r>
+                      <m:rPr>
+                        <m:lit/>
+                      </m:rPr>
+                      <a:rPr lang="ru-RU" sz="1800" i="1">
+                        <a:effectLst/>
+                        <a:latin typeface="Cambria Math" panose="02040503050406030204" pitchFamily="18" charset="0"/>
+                        <a:ea typeface="Times New Roman" panose="02020603050405020304" pitchFamily="18" charset="0"/>
+                        <a:cs typeface="Calibri" panose="020F0502020204030204" pitchFamily="34" charset="0"/>
+                      </a:rPr>
+                      <m:t>(</m:t>
+                    </m:r>
+                    <m:sSub>
+                      <m:sSubPr>
+                        <m:ctrlPr>
+                          <a:rPr lang="ru-RU" sz="1800" i="1">
+                            <a:effectLst/>
+                            <a:latin typeface="Cambria Math" panose="02040503050406030204" pitchFamily="18" charset="0"/>
+                            <a:ea typeface="Times New Roman" panose="02020603050405020304" pitchFamily="18" charset="0"/>
+                            <a:cs typeface="Calibri" panose="020F0502020204030204" pitchFamily="34" charset="0"/>
+                          </a:rPr>
+                        </m:ctrlPr>
+                      </m:sSubPr>
+                      <m:e>
+                        <m:r>
+                          <m:rPr>
+                            <m:sty m:val="p"/>
+                          </m:rPr>
+                          <a:rPr lang="ru-RU" sz="1800">
+                            <a:effectLst/>
+                            <a:latin typeface="Cambria Math" panose="02040503050406030204" pitchFamily="18" charset="0"/>
+                            <a:ea typeface="Times New Roman" panose="02020603050405020304" pitchFamily="18" charset="0"/>
+                            <a:cs typeface="Calibri" panose="020F0502020204030204" pitchFamily="34" charset="0"/>
+                          </a:rPr>
+                          <m:t>ρ</m:t>
+                        </m:r>
+                      </m:e>
+                      <m:sub>
+                        <m:r>
+                          <a:rPr lang="ru-RU" sz="1800" i="1">
+                            <a:effectLst/>
+                            <a:latin typeface="Cambria Math" panose="02040503050406030204" pitchFamily="18" charset="0"/>
+                            <a:ea typeface="Times New Roman" panose="02020603050405020304" pitchFamily="18" charset="0"/>
+                            <a:cs typeface="Calibri" panose="020F0502020204030204" pitchFamily="34" charset="0"/>
+                          </a:rPr>
+                          <m:t>0</m:t>
+                        </m:r>
+                      </m:sub>
+                    </m:sSub>
+                    <m:r>
+                      <m:rPr>
+                        <m:lit/>
+                      </m:rPr>
+                      <a:rPr lang="ru-RU" sz="1800" i="1">
+                        <a:effectLst/>
+                        <a:latin typeface="Cambria Math" panose="02040503050406030204" pitchFamily="18" charset="0"/>
+                        <a:ea typeface="Times New Roman" panose="02020603050405020304" pitchFamily="18" charset="0"/>
+                        <a:cs typeface="Calibri" panose="020F0502020204030204" pitchFamily="34" charset="0"/>
+                      </a:rPr>
+                      <m:t>)</m:t>
+                    </m:r>
+                  </m:oMath>
+                </a14:m>
+                <a:r>
+                  <a:rPr lang="ru-RU" sz="1800" dirty="0">
+                    <a:effectLst/>
+                    <a:latin typeface="Calibri" panose="020F0502020204030204" pitchFamily="34" charset="0"/>
+                    <a:ea typeface="Times New Roman" panose="02020603050405020304" pitchFamily="18" charset="0"/>
+                  </a:rPr>
+                  <a:t> — плотность на уровне моря (1.225 кг/м³) </a:t>
+                </a:r>
+                <a:endParaRPr lang="ru-RU" sz="1800" dirty="0">
+                  <a:effectLst/>
+                  <a:latin typeface="Times New Roman" panose="02020603050405020304" pitchFamily="18" charset="0"/>
+                  <a:ea typeface="Times New Roman" panose="02020603050405020304" pitchFamily="18" charset="0"/>
+                </a:endParaRPr>
+              </a:p>
+              <a:p>
+                <a:pPr>
+                  <a:spcAft>
+                    <a:spcPts val="600"/>
+                  </a:spcAft>
+                </a:pPr>
+                <a:r>
+                  <a:rPr lang="ru-RU" sz="1800" dirty="0">
+                    <a:effectLst/>
+                    <a:latin typeface="Calibri" panose="020F0502020204030204" pitchFamily="34" charset="0"/>
+                    <a:ea typeface="Times New Roman" panose="02020603050405020304" pitchFamily="18" charset="0"/>
+                  </a:rPr>
+                  <a:t>- </a:t>
+                </a:r>
+                <a14:m>
+                  <m:oMath xmlns:m="http://schemas.openxmlformats.org/officeDocument/2006/math">
+                    <m:r>
+                      <m:rPr>
+                        <m:lit/>
+                      </m:rPr>
+                      <a:rPr lang="ru-RU" sz="1800" i="1">
+                        <a:effectLst/>
+                        <a:latin typeface="Cambria Math" panose="02040503050406030204" pitchFamily="18" charset="0"/>
+                        <a:ea typeface="Times New Roman" panose="02020603050405020304" pitchFamily="18" charset="0"/>
+                        <a:cs typeface="Calibri" panose="020F0502020204030204" pitchFamily="34" charset="0"/>
+                      </a:rPr>
+                      <m:t>(</m:t>
+                    </m:r>
+                    <m:r>
+                      <a:rPr lang="ru-RU" sz="1800" i="1">
+                        <a:effectLst/>
+                        <a:latin typeface="Cambria Math" panose="02040503050406030204" pitchFamily="18" charset="0"/>
+                        <a:ea typeface="Times New Roman" panose="02020603050405020304" pitchFamily="18" charset="0"/>
+                        <a:cs typeface="Calibri" panose="020F0502020204030204" pitchFamily="34" charset="0"/>
+                      </a:rPr>
+                      <m:t>𝐻</m:t>
+                    </m:r>
+                    <m:r>
+                      <m:rPr>
+                        <m:lit/>
+                      </m:rPr>
+                      <a:rPr lang="ru-RU" sz="1800" i="1">
+                        <a:effectLst/>
+                        <a:latin typeface="Cambria Math" panose="02040503050406030204" pitchFamily="18" charset="0"/>
+                        <a:ea typeface="Times New Roman" panose="02020603050405020304" pitchFamily="18" charset="0"/>
+                        <a:cs typeface="Calibri" panose="020F0502020204030204" pitchFamily="34" charset="0"/>
+                      </a:rPr>
+                      <m:t>)</m:t>
+                    </m:r>
+                  </m:oMath>
+                </a14:m>
+                <a:r>
+                  <a:rPr lang="ru-RU" sz="1800" dirty="0">
+                    <a:effectLst/>
+                    <a:latin typeface="Calibri" panose="020F0502020204030204" pitchFamily="34" charset="0"/>
+                    <a:ea typeface="Times New Roman" panose="02020603050405020304" pitchFamily="18" charset="0"/>
+                  </a:rPr>
+                  <a:t> — высота масштаба атмосферы (8500 м) </a:t>
+                </a:r>
+                <a:endParaRPr lang="ru-RU" sz="1800" dirty="0">
+                  <a:effectLst/>
+                  <a:latin typeface="Times New Roman" panose="02020603050405020304" pitchFamily="18" charset="0"/>
+                  <a:ea typeface="Times New Roman" panose="02020603050405020304" pitchFamily="18" charset="0"/>
+                </a:endParaRPr>
+              </a:p>
+              <a:p>
+                <a:pPr>
+                  <a:spcAft>
+                    <a:spcPts val="600"/>
+                  </a:spcAft>
+                </a:pPr>
+                <a:r>
+                  <a:rPr lang="ru-RU" sz="1800" dirty="0">
+                    <a:effectLst/>
+                    <a:latin typeface="Calibri" panose="020F0502020204030204" pitchFamily="34" charset="0"/>
+                    <a:ea typeface="Times New Roman" panose="02020603050405020304" pitchFamily="18" charset="0"/>
+                  </a:rPr>
+                  <a:t>- </a:t>
+                </a:r>
+                <a14:m>
+                  <m:oMath xmlns:m="http://schemas.openxmlformats.org/officeDocument/2006/math">
+                    <m:r>
+                      <m:rPr>
+                        <m:lit/>
+                      </m:rPr>
+                      <a:rPr lang="ru-RU" sz="1800" i="1">
+                        <a:effectLst/>
+                        <a:latin typeface="Cambria Math" panose="02040503050406030204" pitchFamily="18" charset="0"/>
+                        <a:ea typeface="Times New Roman" panose="02020603050405020304" pitchFamily="18" charset="0"/>
+                        <a:cs typeface="Calibri" panose="020F0502020204030204" pitchFamily="34" charset="0"/>
+                      </a:rPr>
+                      <m:t>(</m:t>
+                    </m:r>
+                    <m:r>
+                      <a:rPr lang="ru-RU" sz="1800" i="1">
+                        <a:effectLst/>
+                        <a:latin typeface="Cambria Math" panose="02040503050406030204" pitchFamily="18" charset="0"/>
+                        <a:ea typeface="Times New Roman" panose="02020603050405020304" pitchFamily="18" charset="0"/>
+                        <a:cs typeface="Calibri" panose="020F0502020204030204" pitchFamily="34" charset="0"/>
+                      </a:rPr>
+                      <m:t>h</m:t>
+                    </m:r>
+                    <m:r>
+                      <m:rPr>
+                        <m:lit/>
+                      </m:rPr>
+                      <a:rPr lang="ru-RU" sz="1800" i="1">
+                        <a:effectLst/>
+                        <a:latin typeface="Cambria Math" panose="02040503050406030204" pitchFamily="18" charset="0"/>
+                        <a:ea typeface="Times New Roman" panose="02020603050405020304" pitchFamily="18" charset="0"/>
+                        <a:cs typeface="Calibri" panose="020F0502020204030204" pitchFamily="34" charset="0"/>
+                      </a:rPr>
+                      <m:t>)</m:t>
+                    </m:r>
+                  </m:oMath>
+                </a14:m>
+                <a:r>
+                  <a:rPr lang="ru-RU" sz="1800" dirty="0">
+                    <a:effectLst/>
+                    <a:latin typeface="Calibri" panose="020F0502020204030204" pitchFamily="34" charset="0"/>
+                    <a:ea typeface="Times New Roman" panose="02020603050405020304" pitchFamily="18" charset="0"/>
+                  </a:rPr>
+                  <a:t> — высота (м) </a:t>
+                </a:r>
+                <a:endParaRPr lang="ru-RU" sz="1800" dirty="0">
+                  <a:effectLst/>
+                  <a:latin typeface="Times New Roman" panose="02020603050405020304" pitchFamily="18" charset="0"/>
+                  <a:ea typeface="Times New Roman" panose="02020603050405020304" pitchFamily="18" charset="0"/>
+                </a:endParaRPr>
+              </a:p>
+            </p:txBody>
+          </p:sp>
+        </mc:Choice>
+        <mc:Fallback>
+          <p:sp>
+            <p:nvSpPr>
+              <p:cNvPr id="13" name="TextBox 12">
+                <a:extLst>
+                  <a:ext uri="{FF2B5EF4-FFF2-40B4-BE49-F238E27FC236}">
+                    <a16:creationId xmlns:a16="http://schemas.microsoft.com/office/drawing/2014/main" id="{98C239B4-0FFD-4322-9B37-292DBF6807A0}"/>
+                  </a:ext>
+                </a:extLst>
+              </p:cNvPr>
+              <p:cNvSpPr txBox="1">
+                <a:spLocks noRot="1" noChangeAspect="1" noMove="1" noResize="1" noEditPoints="1" noAdjustHandles="1" noChangeArrowheads="1" noChangeShapeType="1" noTextEdit="1"/>
+              </p:cNvSpPr>
+              <p:nvPr/>
+            </p:nvSpPr>
+            <p:spPr>
+              <a:xfrm>
+                <a:off x="5552088" y="933960"/>
+                <a:ext cx="4947745" cy="2484398"/>
+              </a:xfrm>
+              <a:prstGeom prst="rect">
+                <a:avLst/>
+              </a:prstGeom>
+              <a:blipFill>
+                <a:blip r:embed="rId3"/>
+                <a:stretch>
+                  <a:fillRect l="-984" t="-976" r="-369" b="-2683"/>
+                </a:stretch>
+              </a:blipFill>
+              <a:ln>
+                <a:solidFill>
+                  <a:schemeClr val="tx1">
+                    <a:lumMod val="50000"/>
+                    <a:lumOff val="50000"/>
+                  </a:schemeClr>
+                </a:solidFill>
+              </a:ln>
+            </p:spPr>
+            <p:txBody>
+              <a:bodyPr/>
+              <a:lstStyle/>
+              <a:p>
+                <a:r>
+                  <a:rPr lang="ru-RU">
+                    <a:noFill/>
+                  </a:rPr>
+                  <a:t> </a:t>
+                </a:r>
+              </a:p>
+            </p:txBody>
+          </p:sp>
+        </mc:Fallback>
+      </mc:AlternateContent>
+      <mc:AlternateContent xmlns:mc="http://schemas.openxmlformats.org/markup-compatibility/2006">
+        <mc:Choice xmlns:a14="http://schemas.microsoft.com/office/drawing/2010/main" Requires="a14">
+          <p:sp>
+            <p:nvSpPr>
+              <p:cNvPr id="15" name="TextBox 14">
+                <a:extLst>
+                  <a:ext uri="{FF2B5EF4-FFF2-40B4-BE49-F238E27FC236}">
+                    <a16:creationId xmlns:a16="http://schemas.microsoft.com/office/drawing/2014/main" id="{A7010AF4-E67F-4CE0-A7C0-A9F5264FE515}"/>
+                  </a:ext>
+                </a:extLst>
+              </p:cNvPr>
+              <p:cNvSpPr txBox="1"/>
+              <p:nvPr/>
+            </p:nvSpPr>
+            <p:spPr>
+              <a:xfrm>
+                <a:off x="591205" y="3985113"/>
+                <a:ext cx="4264574" cy="2751972"/>
+              </a:xfrm>
+              <a:prstGeom prst="rect">
+                <a:avLst/>
+              </a:prstGeom>
+              <a:noFill/>
+              <a:ln>
+                <a:solidFill>
+                  <a:schemeClr val="tx1">
+                    <a:lumMod val="50000"/>
+                    <a:lumOff val="50000"/>
+                  </a:schemeClr>
+                </a:solidFill>
+              </a:ln>
+            </p:spPr>
+            <p:txBody>
+              <a:bodyPr wrap="square">
+                <a:spAutoFit/>
+              </a:bodyPr>
+              <a:lstStyle/>
+              <a:p>
+                <a:pPr>
+                  <a:spcAft>
+                    <a:spcPts val="600"/>
+                  </a:spcAft>
+                </a:pPr>
+                <a:r>
+                  <a:rPr lang="ru-RU" sz="1800" b="1" dirty="0">
+                    <a:effectLst/>
+                    <a:latin typeface="Calibri" panose="020F0502020204030204" pitchFamily="34" charset="0"/>
+                    <a:ea typeface="Times New Roman" panose="02020603050405020304" pitchFamily="18" charset="0"/>
+                  </a:rPr>
+                  <a:t>Уравнение движения ракеты</a:t>
+                </a:r>
+                <a:r>
+                  <a:rPr lang="ru-RU" sz="1800" dirty="0">
+                    <a:effectLst/>
+                    <a:latin typeface="Calibri" panose="020F0502020204030204" pitchFamily="34" charset="0"/>
+                    <a:ea typeface="Times New Roman" panose="02020603050405020304" pitchFamily="18" charset="0"/>
+                  </a:rPr>
+                  <a:t> </a:t>
+                </a:r>
+                <a:endParaRPr lang="ru-RU" sz="1800" i="1" dirty="0">
+                  <a:effectLst/>
+                  <a:latin typeface="Cambria Math" panose="02040503050406030204" pitchFamily="18" charset="0"/>
+                  <a:ea typeface="Times New Roman" panose="02020603050405020304" pitchFamily="18" charset="0"/>
+                  <a:cs typeface="Calibri" panose="020F0502020204030204" pitchFamily="34" charset="0"/>
+                </a:endParaRPr>
+              </a:p>
+              <a:p>
+                <a:pPr>
+                  <a:spcAft>
+                    <a:spcPts val="600"/>
+                  </a:spcAft>
+                </a:pPr>
+                <a14:m>
+                  <m:oMathPara xmlns:m="http://schemas.openxmlformats.org/officeDocument/2006/math">
+                    <m:oMathParaPr>
+                      <m:jc m:val="centerGroup"/>
+                    </m:oMathParaPr>
+                    <m:oMath xmlns:m="http://schemas.openxmlformats.org/officeDocument/2006/math">
+                      <m:r>
+                        <a:rPr lang="en-US" sz="1800" i="1">
+                          <a:effectLst/>
+                          <a:latin typeface="Cambria Math" panose="02040503050406030204" pitchFamily="18" charset="0"/>
+                          <a:ea typeface="Times New Roman" panose="02020603050405020304" pitchFamily="18" charset="0"/>
+                          <a:cs typeface="Calibri" panose="020F0502020204030204" pitchFamily="34" charset="0"/>
+                        </a:rPr>
+                        <m:t>𝑎</m:t>
+                      </m:r>
+                      <m:r>
+                        <a:rPr lang="en-US" sz="1800" i="1">
+                          <a:effectLst/>
+                          <a:latin typeface="Cambria Math" panose="02040503050406030204" pitchFamily="18" charset="0"/>
+                          <a:ea typeface="Times New Roman" panose="02020603050405020304" pitchFamily="18" charset="0"/>
+                          <a:cs typeface="Calibri" panose="020F0502020204030204" pitchFamily="34" charset="0"/>
+                        </a:rPr>
+                        <m:t>=</m:t>
+                      </m:r>
+                      <m:f>
+                        <m:fPr>
+                          <m:ctrlPr>
+                            <a:rPr lang="ru-RU" sz="1800" i="1">
+                              <a:effectLst/>
+                              <a:latin typeface="Cambria Math" panose="02040503050406030204" pitchFamily="18" charset="0"/>
+                              <a:ea typeface="Times New Roman" panose="02020603050405020304" pitchFamily="18" charset="0"/>
+                              <a:cs typeface="Calibri" panose="020F0502020204030204" pitchFamily="34" charset="0"/>
+                            </a:rPr>
+                          </m:ctrlPr>
+                        </m:fPr>
+                        <m:num>
+                          <m:sSub>
+                            <m:sSubPr>
+                              <m:ctrlPr>
+                                <a:rPr lang="ru-RU" sz="1800" i="1">
+                                  <a:effectLst/>
+                                  <a:latin typeface="Cambria Math" panose="02040503050406030204" pitchFamily="18" charset="0"/>
+                                  <a:ea typeface="Times New Roman" panose="02020603050405020304" pitchFamily="18" charset="0"/>
+                                  <a:cs typeface="Calibri" panose="020F0502020204030204" pitchFamily="34" charset="0"/>
+                                </a:rPr>
+                              </m:ctrlPr>
+                            </m:sSubPr>
+                            <m:e>
+                              <m:r>
+                                <a:rPr lang="en-US" sz="1800" i="1">
+                                  <a:effectLst/>
+                                  <a:latin typeface="Cambria Math" panose="02040503050406030204" pitchFamily="18" charset="0"/>
+                                  <a:ea typeface="Times New Roman" panose="02020603050405020304" pitchFamily="18" charset="0"/>
+                                  <a:cs typeface="Calibri" panose="020F0502020204030204" pitchFamily="34" charset="0"/>
+                                </a:rPr>
+                                <m:t>𝐹</m:t>
+                              </m:r>
+                            </m:e>
+                            <m:sub>
+                              <m:r>
+                                <m:rPr>
+                                  <m:nor/>
+                                </m:rPr>
+                                <a:rPr lang="en-US" sz="1800">
+                                  <a:effectLst/>
+                                  <a:latin typeface="Calibri" panose="020F0502020204030204" pitchFamily="34" charset="0"/>
+                                  <a:ea typeface="Times New Roman" panose="02020603050405020304" pitchFamily="18" charset="0"/>
+                                </a:rPr>
+                                <m:t>thrust</m:t>
+                              </m:r>
+                            </m:sub>
+                          </m:sSub>
+                          <m:r>
+                            <a:rPr lang="en-US" sz="1800" i="1">
+                              <a:effectLst/>
+                              <a:latin typeface="Cambria Math" panose="02040503050406030204" pitchFamily="18" charset="0"/>
+                              <a:ea typeface="Times New Roman" panose="02020603050405020304" pitchFamily="18" charset="0"/>
+                              <a:cs typeface="Calibri" panose="020F0502020204030204" pitchFamily="34" charset="0"/>
+                            </a:rPr>
+                            <m:t>−</m:t>
+                          </m:r>
+                          <m:sSub>
+                            <m:sSubPr>
+                              <m:ctrlPr>
+                                <a:rPr lang="ru-RU" sz="1800" i="1">
+                                  <a:effectLst/>
+                                  <a:latin typeface="Cambria Math" panose="02040503050406030204" pitchFamily="18" charset="0"/>
+                                  <a:ea typeface="Times New Roman" panose="02020603050405020304" pitchFamily="18" charset="0"/>
+                                  <a:cs typeface="Calibri" panose="020F0502020204030204" pitchFamily="34" charset="0"/>
+                                </a:rPr>
+                              </m:ctrlPr>
+                            </m:sSubPr>
+                            <m:e>
+                              <m:r>
+                                <a:rPr lang="en-US" sz="1800" i="1">
+                                  <a:effectLst/>
+                                  <a:latin typeface="Cambria Math" panose="02040503050406030204" pitchFamily="18" charset="0"/>
+                                  <a:ea typeface="Times New Roman" panose="02020603050405020304" pitchFamily="18" charset="0"/>
+                                  <a:cs typeface="Calibri" panose="020F0502020204030204" pitchFamily="34" charset="0"/>
+                                </a:rPr>
+                                <m:t>𝐹</m:t>
+                              </m:r>
+                            </m:e>
+                            <m:sub>
+                              <m:r>
+                                <a:rPr lang="en-US" sz="1800" i="1">
+                                  <a:effectLst/>
+                                  <a:latin typeface="Cambria Math" panose="02040503050406030204" pitchFamily="18" charset="0"/>
+                                  <a:ea typeface="Times New Roman" panose="02020603050405020304" pitchFamily="18" charset="0"/>
+                                  <a:cs typeface="Calibri" panose="020F0502020204030204" pitchFamily="34" charset="0"/>
+                                </a:rPr>
+                                <m:t>𝑑</m:t>
+                              </m:r>
+                            </m:sub>
+                          </m:sSub>
+                          <m:r>
+                            <a:rPr lang="en-US" sz="1800" i="1">
+                              <a:effectLst/>
+                              <a:latin typeface="Cambria Math" panose="02040503050406030204" pitchFamily="18" charset="0"/>
+                              <a:ea typeface="Times New Roman" panose="02020603050405020304" pitchFamily="18" charset="0"/>
+                              <a:cs typeface="Calibri" panose="020F0502020204030204" pitchFamily="34" charset="0"/>
+                            </a:rPr>
+                            <m:t>−</m:t>
+                          </m:r>
+                          <m:r>
+                            <a:rPr lang="en-US" sz="1800" i="1">
+                              <a:effectLst/>
+                              <a:latin typeface="Cambria Math" panose="02040503050406030204" pitchFamily="18" charset="0"/>
+                              <a:ea typeface="Times New Roman" panose="02020603050405020304" pitchFamily="18" charset="0"/>
+                              <a:cs typeface="Calibri" panose="020F0502020204030204" pitchFamily="34" charset="0"/>
+                            </a:rPr>
+                            <m:t>𝑚𝑔</m:t>
+                          </m:r>
+                        </m:num>
+                        <m:den>
+                          <m:r>
+                            <a:rPr lang="en-US" sz="1800" i="1">
+                              <a:effectLst/>
+                              <a:latin typeface="Cambria Math" panose="02040503050406030204" pitchFamily="18" charset="0"/>
+                              <a:ea typeface="Times New Roman" panose="02020603050405020304" pitchFamily="18" charset="0"/>
+                              <a:cs typeface="Calibri" panose="020F0502020204030204" pitchFamily="34" charset="0"/>
+                            </a:rPr>
+                            <m:t>𝑚</m:t>
+                          </m:r>
+                        </m:den>
+                      </m:f>
+                    </m:oMath>
+                  </m:oMathPara>
+                </a14:m>
+                <a:endParaRPr lang="ru-RU" sz="1800" dirty="0">
+                  <a:effectLst/>
+                  <a:latin typeface="Times New Roman" panose="02020603050405020304" pitchFamily="18" charset="0"/>
+                  <a:ea typeface="Times New Roman" panose="02020603050405020304" pitchFamily="18" charset="0"/>
+                </a:endParaRPr>
+              </a:p>
+              <a:p>
+                <a:pPr>
+                  <a:spcAft>
+                    <a:spcPts val="600"/>
+                  </a:spcAft>
+                </a:pPr>
+                <a:r>
+                  <a:rPr lang="ru-RU" sz="1800" dirty="0">
+                    <a:effectLst/>
+                    <a:latin typeface="Calibri" panose="020F0502020204030204" pitchFamily="34" charset="0"/>
+                    <a:ea typeface="Times New Roman" panose="02020603050405020304" pitchFamily="18" charset="0"/>
+                  </a:rPr>
+                  <a:t>- </a:t>
+                </a:r>
+                <a14:m>
+                  <m:oMath xmlns:m="http://schemas.openxmlformats.org/officeDocument/2006/math">
+                    <m:r>
+                      <m:rPr>
+                        <m:lit/>
+                      </m:rPr>
+                      <a:rPr lang="ru-RU" sz="1800" i="1">
+                        <a:effectLst/>
+                        <a:latin typeface="Cambria Math" panose="02040503050406030204" pitchFamily="18" charset="0"/>
+                        <a:ea typeface="Times New Roman" panose="02020603050405020304" pitchFamily="18" charset="0"/>
+                        <a:cs typeface="Calibri" panose="020F0502020204030204" pitchFamily="34" charset="0"/>
+                      </a:rPr>
+                      <m:t>(</m:t>
+                    </m:r>
+                    <m:r>
+                      <a:rPr lang="ru-RU" sz="1800" i="1">
+                        <a:effectLst/>
+                        <a:latin typeface="Cambria Math" panose="02040503050406030204" pitchFamily="18" charset="0"/>
+                        <a:ea typeface="Times New Roman" panose="02020603050405020304" pitchFamily="18" charset="0"/>
+                        <a:cs typeface="Calibri" panose="020F0502020204030204" pitchFamily="34" charset="0"/>
+                      </a:rPr>
+                      <m:t>𝑎</m:t>
+                    </m:r>
+                    <m:r>
+                      <m:rPr>
+                        <m:lit/>
+                      </m:rPr>
+                      <a:rPr lang="ru-RU" sz="1800" i="1">
+                        <a:effectLst/>
+                        <a:latin typeface="Cambria Math" panose="02040503050406030204" pitchFamily="18" charset="0"/>
+                        <a:ea typeface="Times New Roman" panose="02020603050405020304" pitchFamily="18" charset="0"/>
+                        <a:cs typeface="Calibri" panose="020F0502020204030204" pitchFamily="34" charset="0"/>
+                      </a:rPr>
+                      <m:t>)</m:t>
+                    </m:r>
+                  </m:oMath>
+                </a14:m>
+                <a:r>
+                  <a:rPr lang="ru-RU" sz="1800" dirty="0">
+                    <a:effectLst/>
+                    <a:latin typeface="Calibri" panose="020F0502020204030204" pitchFamily="34" charset="0"/>
+                    <a:ea typeface="Times New Roman" panose="02020603050405020304" pitchFamily="18" charset="0"/>
+                  </a:rPr>
+                  <a:t> — ускорение (м/с²) </a:t>
+                </a:r>
+                <a:endParaRPr lang="ru-RU" sz="1800" dirty="0">
+                  <a:effectLst/>
+                  <a:latin typeface="Times New Roman" panose="02020603050405020304" pitchFamily="18" charset="0"/>
+                  <a:ea typeface="Times New Roman" panose="02020603050405020304" pitchFamily="18" charset="0"/>
+                </a:endParaRPr>
+              </a:p>
+              <a:p>
+                <a:pPr>
+                  <a:spcAft>
+                    <a:spcPts val="600"/>
+                  </a:spcAft>
+                </a:pPr>
+                <a:r>
+                  <a:rPr lang="ru-RU" sz="1800" dirty="0">
+                    <a:effectLst/>
+                    <a:latin typeface="Calibri" panose="020F0502020204030204" pitchFamily="34" charset="0"/>
+                    <a:ea typeface="Times New Roman" panose="02020603050405020304" pitchFamily="18" charset="0"/>
+                  </a:rPr>
+                  <a:t>- </a:t>
+                </a:r>
+                <a14:m>
+                  <m:oMath xmlns:m="http://schemas.openxmlformats.org/officeDocument/2006/math">
+                    <m:r>
+                      <m:rPr>
+                        <m:lit/>
+                      </m:rPr>
+                      <a:rPr lang="ru-RU" sz="1800" i="1">
+                        <a:effectLst/>
+                        <a:latin typeface="Cambria Math" panose="02040503050406030204" pitchFamily="18" charset="0"/>
+                        <a:ea typeface="Times New Roman" panose="02020603050405020304" pitchFamily="18" charset="0"/>
+                        <a:cs typeface="Calibri" panose="020F0502020204030204" pitchFamily="34" charset="0"/>
+                      </a:rPr>
+                      <m:t>(</m:t>
+                    </m:r>
+                    <m:sSub>
+                      <m:sSubPr>
+                        <m:ctrlPr>
+                          <a:rPr lang="ru-RU" sz="1800" i="1">
+                            <a:effectLst/>
+                            <a:latin typeface="Cambria Math" panose="02040503050406030204" pitchFamily="18" charset="0"/>
+                            <a:ea typeface="Times New Roman" panose="02020603050405020304" pitchFamily="18" charset="0"/>
+                            <a:cs typeface="Calibri" panose="020F0502020204030204" pitchFamily="34" charset="0"/>
+                          </a:rPr>
+                        </m:ctrlPr>
+                      </m:sSubPr>
+                      <m:e>
+                        <m:r>
+                          <a:rPr lang="ru-RU" sz="1800" i="1">
+                            <a:effectLst/>
+                            <a:latin typeface="Cambria Math" panose="02040503050406030204" pitchFamily="18" charset="0"/>
+                            <a:ea typeface="Times New Roman" panose="02020603050405020304" pitchFamily="18" charset="0"/>
+                            <a:cs typeface="Calibri" panose="020F0502020204030204" pitchFamily="34" charset="0"/>
+                          </a:rPr>
+                          <m:t>𝐹</m:t>
+                        </m:r>
+                      </m:e>
+                      <m:sub>
+                        <m:r>
+                          <m:rPr>
+                            <m:nor/>
+                          </m:rPr>
+                          <a:rPr lang="ru-RU" sz="1800">
+                            <a:effectLst/>
+                            <a:latin typeface="Calibri" panose="020F0502020204030204" pitchFamily="34" charset="0"/>
+                            <a:ea typeface="Times New Roman" panose="02020603050405020304" pitchFamily="18" charset="0"/>
+                          </a:rPr>
+                          <m:t>thrust</m:t>
+                        </m:r>
+                      </m:sub>
+                    </m:sSub>
+                    <m:r>
+                      <m:rPr>
+                        <m:lit/>
+                      </m:rPr>
+                      <a:rPr lang="ru-RU" sz="1800" i="1">
+                        <a:effectLst/>
+                        <a:latin typeface="Cambria Math" panose="02040503050406030204" pitchFamily="18" charset="0"/>
+                        <a:ea typeface="Times New Roman" panose="02020603050405020304" pitchFamily="18" charset="0"/>
+                        <a:cs typeface="Calibri" panose="020F0502020204030204" pitchFamily="34" charset="0"/>
+                      </a:rPr>
+                      <m:t>)</m:t>
+                    </m:r>
+                  </m:oMath>
+                </a14:m>
+                <a:r>
+                  <a:rPr lang="ru-RU" sz="1800" dirty="0">
+                    <a:effectLst/>
+                    <a:latin typeface="Calibri" panose="020F0502020204030204" pitchFamily="34" charset="0"/>
+                    <a:ea typeface="Times New Roman" panose="02020603050405020304" pitchFamily="18" charset="0"/>
+                  </a:rPr>
+                  <a:t> — текущая тяга (Н) </a:t>
+                </a:r>
+                <a:endParaRPr lang="ru-RU" sz="1800" dirty="0">
+                  <a:effectLst/>
+                  <a:latin typeface="Times New Roman" panose="02020603050405020304" pitchFamily="18" charset="0"/>
+                  <a:ea typeface="Times New Roman" panose="02020603050405020304" pitchFamily="18" charset="0"/>
+                </a:endParaRPr>
+              </a:p>
+              <a:p>
+                <a:pPr>
+                  <a:spcAft>
+                    <a:spcPts val="600"/>
+                  </a:spcAft>
+                </a:pPr>
+                <a:r>
+                  <a:rPr lang="ru-RU" sz="1800" dirty="0">
+                    <a:effectLst/>
+                    <a:latin typeface="Calibri" panose="020F0502020204030204" pitchFamily="34" charset="0"/>
+                    <a:ea typeface="Times New Roman" panose="02020603050405020304" pitchFamily="18" charset="0"/>
+                  </a:rPr>
+                  <a:t>- </a:t>
+                </a:r>
+                <a14:m>
+                  <m:oMath xmlns:m="http://schemas.openxmlformats.org/officeDocument/2006/math">
+                    <m:r>
+                      <m:rPr>
+                        <m:lit/>
+                      </m:rPr>
+                      <a:rPr lang="ru-RU" sz="1800" i="1">
+                        <a:effectLst/>
+                        <a:latin typeface="Cambria Math" panose="02040503050406030204" pitchFamily="18" charset="0"/>
+                        <a:ea typeface="Times New Roman" panose="02020603050405020304" pitchFamily="18" charset="0"/>
+                        <a:cs typeface="Calibri" panose="020F0502020204030204" pitchFamily="34" charset="0"/>
+                      </a:rPr>
+                      <m:t>(</m:t>
+                    </m:r>
+                    <m:sSub>
+                      <m:sSubPr>
+                        <m:ctrlPr>
+                          <a:rPr lang="ru-RU" sz="1800" i="1">
+                            <a:effectLst/>
+                            <a:latin typeface="Cambria Math" panose="02040503050406030204" pitchFamily="18" charset="0"/>
+                            <a:ea typeface="Times New Roman" panose="02020603050405020304" pitchFamily="18" charset="0"/>
+                            <a:cs typeface="Calibri" panose="020F0502020204030204" pitchFamily="34" charset="0"/>
+                          </a:rPr>
+                        </m:ctrlPr>
+                      </m:sSubPr>
+                      <m:e>
+                        <m:r>
+                          <a:rPr lang="ru-RU" sz="1800" i="1">
+                            <a:effectLst/>
+                            <a:latin typeface="Cambria Math" panose="02040503050406030204" pitchFamily="18" charset="0"/>
+                            <a:ea typeface="Times New Roman" panose="02020603050405020304" pitchFamily="18" charset="0"/>
+                            <a:cs typeface="Calibri" panose="020F0502020204030204" pitchFamily="34" charset="0"/>
+                          </a:rPr>
+                          <m:t>𝐹</m:t>
+                        </m:r>
+                      </m:e>
+                      <m:sub>
+                        <m:r>
+                          <a:rPr lang="ru-RU" sz="1800" i="1">
+                            <a:effectLst/>
+                            <a:latin typeface="Cambria Math" panose="02040503050406030204" pitchFamily="18" charset="0"/>
+                            <a:ea typeface="Times New Roman" panose="02020603050405020304" pitchFamily="18" charset="0"/>
+                            <a:cs typeface="Calibri" panose="020F0502020204030204" pitchFamily="34" charset="0"/>
+                          </a:rPr>
+                          <m:t>𝑑</m:t>
+                        </m:r>
+                      </m:sub>
+                    </m:sSub>
+                    <m:r>
+                      <m:rPr>
+                        <m:lit/>
+                      </m:rPr>
+                      <a:rPr lang="ru-RU" sz="1800" i="1">
+                        <a:effectLst/>
+                        <a:latin typeface="Cambria Math" panose="02040503050406030204" pitchFamily="18" charset="0"/>
+                        <a:ea typeface="Times New Roman" panose="02020603050405020304" pitchFamily="18" charset="0"/>
+                        <a:cs typeface="Calibri" panose="020F0502020204030204" pitchFamily="34" charset="0"/>
+                      </a:rPr>
+                      <m:t>)</m:t>
+                    </m:r>
+                  </m:oMath>
+                </a14:m>
+                <a:r>
+                  <a:rPr lang="ru-RU" sz="1800" dirty="0">
+                    <a:effectLst/>
+                    <a:latin typeface="Calibri" panose="020F0502020204030204" pitchFamily="34" charset="0"/>
+                    <a:ea typeface="Times New Roman" panose="02020603050405020304" pitchFamily="18" charset="0"/>
+                  </a:rPr>
+                  <a:t> — сила сопротивления (Н) </a:t>
+                </a:r>
+                <a:endParaRPr lang="ru-RU" sz="1800" dirty="0">
+                  <a:effectLst/>
+                  <a:latin typeface="Times New Roman" panose="02020603050405020304" pitchFamily="18" charset="0"/>
+                  <a:ea typeface="Times New Roman" panose="02020603050405020304" pitchFamily="18" charset="0"/>
+                </a:endParaRPr>
+              </a:p>
+              <a:p>
+                <a:pPr>
+                  <a:spcAft>
+                    <a:spcPts val="600"/>
+                  </a:spcAft>
+                </a:pPr>
+                <a:r>
+                  <a:rPr lang="ru-RU" sz="1800" dirty="0">
+                    <a:effectLst/>
+                    <a:latin typeface="Calibri" panose="020F0502020204030204" pitchFamily="34" charset="0"/>
+                    <a:ea typeface="Times New Roman" panose="02020603050405020304" pitchFamily="18" charset="0"/>
+                  </a:rPr>
+                  <a:t>- </a:t>
+                </a:r>
+                <a14:m>
+                  <m:oMath xmlns:m="http://schemas.openxmlformats.org/officeDocument/2006/math">
+                    <m:r>
+                      <m:rPr>
+                        <m:lit/>
+                      </m:rPr>
+                      <a:rPr lang="ru-RU" sz="1800" i="1">
+                        <a:effectLst/>
+                        <a:latin typeface="Cambria Math" panose="02040503050406030204" pitchFamily="18" charset="0"/>
+                        <a:ea typeface="Times New Roman" panose="02020603050405020304" pitchFamily="18" charset="0"/>
+                        <a:cs typeface="Calibri" panose="020F0502020204030204" pitchFamily="34" charset="0"/>
+                      </a:rPr>
+                      <m:t>(</m:t>
+                    </m:r>
+                    <m:r>
+                      <a:rPr lang="ru-RU" sz="1800" i="1">
+                        <a:effectLst/>
+                        <a:latin typeface="Cambria Math" panose="02040503050406030204" pitchFamily="18" charset="0"/>
+                        <a:ea typeface="Times New Roman" panose="02020603050405020304" pitchFamily="18" charset="0"/>
+                        <a:cs typeface="Calibri" panose="020F0502020204030204" pitchFamily="34" charset="0"/>
+                      </a:rPr>
+                      <m:t>𝑚</m:t>
+                    </m:r>
+                    <m:r>
+                      <m:rPr>
+                        <m:lit/>
+                      </m:rPr>
+                      <a:rPr lang="ru-RU" sz="1800" i="1">
+                        <a:effectLst/>
+                        <a:latin typeface="Cambria Math" panose="02040503050406030204" pitchFamily="18" charset="0"/>
+                        <a:ea typeface="Times New Roman" panose="02020603050405020304" pitchFamily="18" charset="0"/>
+                        <a:cs typeface="Calibri" panose="020F0502020204030204" pitchFamily="34" charset="0"/>
+                      </a:rPr>
+                      <m:t>)</m:t>
+                    </m:r>
+                  </m:oMath>
+                </a14:m>
+                <a:r>
+                  <a:rPr lang="ru-RU" sz="1800" dirty="0">
+                    <a:effectLst/>
+                    <a:latin typeface="Calibri" panose="020F0502020204030204" pitchFamily="34" charset="0"/>
+                    <a:ea typeface="Times New Roman" panose="02020603050405020304" pitchFamily="18" charset="0"/>
+                  </a:rPr>
+                  <a:t> — текущая масса ракеты (кг) </a:t>
+                </a:r>
+                <a:endParaRPr lang="ru-RU" sz="1800" dirty="0">
+                  <a:effectLst/>
+                  <a:latin typeface="Times New Roman" panose="02020603050405020304" pitchFamily="18" charset="0"/>
+                  <a:ea typeface="Times New Roman" panose="02020603050405020304" pitchFamily="18" charset="0"/>
+                </a:endParaRPr>
+              </a:p>
+              <a:p>
+                <a:pPr>
+                  <a:spcAft>
+                    <a:spcPts val="600"/>
+                  </a:spcAft>
+                </a:pPr>
+                <a:r>
+                  <a:rPr lang="ru-RU" sz="1800" dirty="0">
+                    <a:effectLst/>
+                    <a:latin typeface="Calibri" panose="020F0502020204030204" pitchFamily="34" charset="0"/>
+                    <a:ea typeface="Times New Roman" panose="02020603050405020304" pitchFamily="18" charset="0"/>
+                  </a:rPr>
+                  <a:t>- </a:t>
+                </a:r>
+                <a14:m>
+                  <m:oMath xmlns:m="http://schemas.openxmlformats.org/officeDocument/2006/math">
+                    <m:r>
+                      <m:rPr>
+                        <m:lit/>
+                      </m:rPr>
+                      <a:rPr lang="ru-RU" sz="1800" i="1">
+                        <a:effectLst/>
+                        <a:latin typeface="Cambria Math" panose="02040503050406030204" pitchFamily="18" charset="0"/>
+                        <a:ea typeface="Times New Roman" panose="02020603050405020304" pitchFamily="18" charset="0"/>
+                        <a:cs typeface="Calibri" panose="020F0502020204030204" pitchFamily="34" charset="0"/>
+                      </a:rPr>
+                      <m:t>(</m:t>
+                    </m:r>
+                    <m:r>
+                      <a:rPr lang="ru-RU" sz="1800" i="1">
+                        <a:effectLst/>
+                        <a:latin typeface="Cambria Math" panose="02040503050406030204" pitchFamily="18" charset="0"/>
+                        <a:ea typeface="Times New Roman" panose="02020603050405020304" pitchFamily="18" charset="0"/>
+                        <a:cs typeface="Calibri" panose="020F0502020204030204" pitchFamily="34" charset="0"/>
+                      </a:rPr>
+                      <m:t>𝑔</m:t>
+                    </m:r>
+                    <m:r>
+                      <m:rPr>
+                        <m:lit/>
+                      </m:rPr>
+                      <a:rPr lang="ru-RU" sz="1800" i="1">
+                        <a:effectLst/>
+                        <a:latin typeface="Cambria Math" panose="02040503050406030204" pitchFamily="18" charset="0"/>
+                        <a:ea typeface="Times New Roman" panose="02020603050405020304" pitchFamily="18" charset="0"/>
+                        <a:cs typeface="Calibri" panose="020F0502020204030204" pitchFamily="34" charset="0"/>
+                      </a:rPr>
+                      <m:t>)</m:t>
+                    </m:r>
+                  </m:oMath>
+                </a14:m>
+                <a:r>
+                  <a:rPr lang="ru-RU" sz="1800" dirty="0">
+                    <a:effectLst/>
+                    <a:latin typeface="Calibri" panose="020F0502020204030204" pitchFamily="34" charset="0"/>
+                    <a:ea typeface="Times New Roman" panose="02020603050405020304" pitchFamily="18" charset="0"/>
+                  </a:rPr>
+                  <a:t> — местное уск. св. падения (м/с²) </a:t>
+                </a:r>
+                <a:endParaRPr lang="ru-RU" sz="1800" dirty="0">
+                  <a:effectLst/>
+                  <a:latin typeface="Times New Roman" panose="02020603050405020304" pitchFamily="18" charset="0"/>
+                  <a:ea typeface="Times New Roman" panose="02020603050405020304" pitchFamily="18" charset="0"/>
+                </a:endParaRPr>
+              </a:p>
+            </p:txBody>
+          </p:sp>
+        </mc:Choice>
+        <mc:Fallback>
+          <p:sp>
+            <p:nvSpPr>
+              <p:cNvPr id="15" name="TextBox 14">
+                <a:extLst>
+                  <a:ext uri="{FF2B5EF4-FFF2-40B4-BE49-F238E27FC236}">
+                    <a16:creationId xmlns:a16="http://schemas.microsoft.com/office/drawing/2014/main" id="{A7010AF4-E67F-4CE0-A7C0-A9F5264FE515}"/>
+                  </a:ext>
+                </a:extLst>
+              </p:cNvPr>
+              <p:cNvSpPr txBox="1">
+                <a:spLocks noRot="1" noChangeAspect="1" noMove="1" noResize="1" noEditPoints="1" noAdjustHandles="1" noChangeArrowheads="1" noChangeShapeType="1" noTextEdit="1"/>
+              </p:cNvSpPr>
+              <p:nvPr/>
+            </p:nvSpPr>
+            <p:spPr>
+              <a:xfrm>
+                <a:off x="591205" y="3985113"/>
+                <a:ext cx="4264574" cy="2751972"/>
+              </a:xfrm>
+              <a:prstGeom prst="rect">
+                <a:avLst/>
+              </a:prstGeom>
+              <a:blipFill>
+                <a:blip r:embed="rId4"/>
+                <a:stretch>
+                  <a:fillRect l="-1140" t="-1104" b="-2428"/>
+                </a:stretch>
+              </a:blipFill>
+              <a:ln>
+                <a:solidFill>
+                  <a:schemeClr val="tx1">
+                    <a:lumMod val="50000"/>
+                    <a:lumOff val="50000"/>
+                  </a:schemeClr>
+                </a:solidFill>
+              </a:ln>
+            </p:spPr>
+            <p:txBody>
+              <a:bodyPr/>
+              <a:lstStyle/>
+              <a:p>
+                <a:r>
+                  <a:rPr lang="ru-RU">
+                    <a:noFill/>
+                  </a:rPr>
+                  <a:t> </a:t>
+                </a:r>
+              </a:p>
+            </p:txBody>
+          </p:sp>
+        </mc:Fallback>
+      </mc:AlternateContent>
+      <mc:AlternateContent xmlns:mc="http://schemas.openxmlformats.org/markup-compatibility/2006">
+        <mc:Choice xmlns:a14="http://schemas.microsoft.com/office/drawing/2010/main" Requires="a14">
+          <p:sp>
+            <p:nvSpPr>
+              <p:cNvPr id="17" name="TextBox 16">
+                <a:extLst>
+                  <a:ext uri="{FF2B5EF4-FFF2-40B4-BE49-F238E27FC236}">
+                    <a16:creationId xmlns:a16="http://schemas.microsoft.com/office/drawing/2014/main" id="{DA30E787-B0D0-4A08-AB4A-E8858A97D469}"/>
+                  </a:ext>
+                </a:extLst>
+              </p:cNvPr>
+              <p:cNvSpPr txBox="1"/>
+              <p:nvPr/>
+            </p:nvSpPr>
+            <p:spPr>
+              <a:xfrm>
+                <a:off x="5155323" y="4131029"/>
+                <a:ext cx="5344510" cy="2139047"/>
+              </a:xfrm>
+              <a:prstGeom prst="rect">
+                <a:avLst/>
+              </a:prstGeom>
+              <a:noFill/>
+              <a:ln>
+                <a:solidFill>
+                  <a:schemeClr val="tx1">
+                    <a:lumMod val="50000"/>
+                    <a:lumOff val="50000"/>
+                  </a:schemeClr>
+                </a:solidFill>
+              </a:ln>
+            </p:spPr>
+            <p:txBody>
+              <a:bodyPr wrap="square">
+                <a:spAutoFit/>
+              </a:bodyPr>
+              <a:lstStyle/>
+              <a:p>
+                <a:pPr>
+                  <a:spcAft>
+                    <a:spcPts val="600"/>
+                  </a:spcAft>
+                </a:pPr>
+                <a:r>
+                  <a:rPr lang="ru-RU" sz="1800" b="1" dirty="0">
+                    <a:effectLst/>
+                    <a:latin typeface="Calibri" panose="020F0502020204030204" pitchFamily="34" charset="0"/>
+                    <a:ea typeface="Times New Roman" panose="02020603050405020304" pitchFamily="18" charset="0"/>
+                  </a:rPr>
+                  <a:t>Численное интегрирование методом Эйлера</a:t>
+                </a:r>
+                <a:endParaRPr lang="ru-RU" dirty="0">
+                  <a:latin typeface="Calibri" panose="020F0502020204030204" pitchFamily="34" charset="0"/>
+                  <a:ea typeface="Times New Roman" panose="02020603050405020304" pitchFamily="18" charset="0"/>
+                </a:endParaRPr>
+              </a:p>
+              <a:p>
+                <a:pPr>
+                  <a:spcAft>
+                    <a:spcPts val="600"/>
+                  </a:spcAft>
+                </a:pPr>
+                <a14:m>
+                  <m:oMathPara xmlns:m="http://schemas.openxmlformats.org/officeDocument/2006/math">
+                    <m:oMathParaPr>
+                      <m:jc m:val="centerGroup"/>
+                    </m:oMathParaPr>
+                    <m:oMath xmlns:m="http://schemas.openxmlformats.org/officeDocument/2006/math">
+                      <m:r>
+                        <a:rPr lang="en-US" sz="1800" i="1">
+                          <a:effectLst/>
+                          <a:latin typeface="Cambria Math" panose="02040503050406030204" pitchFamily="18" charset="0"/>
+                          <a:ea typeface="Times New Roman" panose="02020603050405020304" pitchFamily="18" charset="0"/>
+                          <a:cs typeface="Calibri" panose="020F0502020204030204" pitchFamily="34" charset="0"/>
+                        </a:rPr>
+                        <m:t>𝑣</m:t>
+                      </m:r>
+                      <m:d>
+                        <m:dPr>
+                          <m:ctrlPr>
+                            <a:rPr lang="ru-RU" sz="1800" i="1">
+                              <a:effectLst/>
+                              <a:latin typeface="Cambria Math" panose="02040503050406030204" pitchFamily="18" charset="0"/>
+                              <a:ea typeface="Times New Roman" panose="02020603050405020304" pitchFamily="18" charset="0"/>
+                              <a:cs typeface="Calibri" panose="020F0502020204030204" pitchFamily="34" charset="0"/>
+                            </a:rPr>
+                          </m:ctrlPr>
+                        </m:dPr>
+                        <m:e>
+                          <m:r>
+                            <a:rPr lang="en-US" sz="1800" i="1">
+                              <a:effectLst/>
+                              <a:latin typeface="Cambria Math" panose="02040503050406030204" pitchFamily="18" charset="0"/>
+                              <a:ea typeface="Times New Roman" panose="02020603050405020304" pitchFamily="18" charset="0"/>
+                              <a:cs typeface="Calibri" panose="020F0502020204030204" pitchFamily="34" charset="0"/>
+                            </a:rPr>
+                            <m:t>𝑡</m:t>
+                          </m:r>
+                          <m:r>
+                            <a:rPr lang="en-US" sz="1800" i="1">
+                              <a:effectLst/>
+                              <a:latin typeface="Cambria Math" panose="02040503050406030204" pitchFamily="18" charset="0"/>
+                              <a:ea typeface="Times New Roman" panose="02020603050405020304" pitchFamily="18" charset="0"/>
+                              <a:cs typeface="Calibri" panose="020F0502020204030204" pitchFamily="34" charset="0"/>
+                            </a:rPr>
+                            <m:t>+</m:t>
+                          </m:r>
+                          <m:r>
+                            <m:rPr>
+                              <m:sty m:val="p"/>
+                            </m:rPr>
+                            <a:rPr lang="en-US" sz="1800">
+                              <a:effectLst/>
+                              <a:latin typeface="Cambria Math" panose="02040503050406030204" pitchFamily="18" charset="0"/>
+                              <a:ea typeface="Times New Roman" panose="02020603050405020304" pitchFamily="18" charset="0"/>
+                              <a:cs typeface="Calibri" panose="020F0502020204030204" pitchFamily="34" charset="0"/>
+                            </a:rPr>
+                            <m:t>Δ</m:t>
+                          </m:r>
+                          <m:r>
+                            <a:rPr lang="en-US" sz="1800" i="1">
+                              <a:effectLst/>
+                              <a:latin typeface="Cambria Math" panose="02040503050406030204" pitchFamily="18" charset="0"/>
+                              <a:ea typeface="Times New Roman" panose="02020603050405020304" pitchFamily="18" charset="0"/>
+                              <a:cs typeface="Calibri" panose="020F0502020204030204" pitchFamily="34" charset="0"/>
+                            </a:rPr>
+                            <m:t>𝑡</m:t>
+                          </m:r>
+                        </m:e>
+                      </m:d>
+                      <m:r>
+                        <a:rPr lang="en-US" sz="1800" i="1">
+                          <a:effectLst/>
+                          <a:latin typeface="Cambria Math" panose="02040503050406030204" pitchFamily="18" charset="0"/>
+                          <a:ea typeface="Times New Roman" panose="02020603050405020304" pitchFamily="18" charset="0"/>
+                          <a:cs typeface="Calibri" panose="020F0502020204030204" pitchFamily="34" charset="0"/>
+                        </a:rPr>
+                        <m:t>=</m:t>
+                      </m:r>
+                      <m:r>
+                        <a:rPr lang="en-US" sz="1800" i="1">
+                          <a:effectLst/>
+                          <a:latin typeface="Cambria Math" panose="02040503050406030204" pitchFamily="18" charset="0"/>
+                          <a:ea typeface="Times New Roman" panose="02020603050405020304" pitchFamily="18" charset="0"/>
+                          <a:cs typeface="Calibri" panose="020F0502020204030204" pitchFamily="34" charset="0"/>
+                        </a:rPr>
+                        <m:t>𝑣</m:t>
+                      </m:r>
+                      <m:d>
+                        <m:dPr>
+                          <m:ctrlPr>
+                            <a:rPr lang="ru-RU" sz="1800" i="1">
+                              <a:effectLst/>
+                              <a:latin typeface="Cambria Math" panose="02040503050406030204" pitchFamily="18" charset="0"/>
+                              <a:ea typeface="Times New Roman" panose="02020603050405020304" pitchFamily="18" charset="0"/>
+                              <a:cs typeface="Calibri" panose="020F0502020204030204" pitchFamily="34" charset="0"/>
+                            </a:rPr>
+                          </m:ctrlPr>
+                        </m:dPr>
+                        <m:e>
+                          <m:r>
+                            <a:rPr lang="en-US" sz="1800" i="1">
+                              <a:effectLst/>
+                              <a:latin typeface="Cambria Math" panose="02040503050406030204" pitchFamily="18" charset="0"/>
+                              <a:ea typeface="Times New Roman" panose="02020603050405020304" pitchFamily="18" charset="0"/>
+                              <a:cs typeface="Calibri" panose="020F0502020204030204" pitchFamily="34" charset="0"/>
+                            </a:rPr>
+                            <m:t>𝑡</m:t>
+                          </m:r>
+                        </m:e>
+                      </m:d>
+                      <m:r>
+                        <a:rPr lang="en-US" sz="1800" i="1">
+                          <a:effectLst/>
+                          <a:latin typeface="Cambria Math" panose="02040503050406030204" pitchFamily="18" charset="0"/>
+                          <a:ea typeface="Times New Roman" panose="02020603050405020304" pitchFamily="18" charset="0"/>
+                          <a:cs typeface="Calibri" panose="020F0502020204030204" pitchFamily="34" charset="0"/>
+                        </a:rPr>
+                        <m:t>+</m:t>
+                      </m:r>
+                      <m:r>
+                        <a:rPr lang="en-US" sz="1800" i="1">
+                          <a:effectLst/>
+                          <a:latin typeface="Cambria Math" panose="02040503050406030204" pitchFamily="18" charset="0"/>
+                          <a:ea typeface="Times New Roman" panose="02020603050405020304" pitchFamily="18" charset="0"/>
+                          <a:cs typeface="Calibri" panose="020F0502020204030204" pitchFamily="34" charset="0"/>
+                        </a:rPr>
+                        <m:t>𝑎</m:t>
+                      </m:r>
+                      <m:d>
+                        <m:dPr>
+                          <m:ctrlPr>
+                            <a:rPr lang="ru-RU" sz="1800" i="1">
+                              <a:effectLst/>
+                              <a:latin typeface="Cambria Math" panose="02040503050406030204" pitchFamily="18" charset="0"/>
+                              <a:ea typeface="Times New Roman" panose="02020603050405020304" pitchFamily="18" charset="0"/>
+                              <a:cs typeface="Calibri" panose="020F0502020204030204" pitchFamily="34" charset="0"/>
+                            </a:rPr>
+                          </m:ctrlPr>
+                        </m:dPr>
+                        <m:e>
+                          <m:r>
+                            <a:rPr lang="en-US" sz="1800" i="1">
+                              <a:effectLst/>
+                              <a:latin typeface="Cambria Math" panose="02040503050406030204" pitchFamily="18" charset="0"/>
+                              <a:ea typeface="Times New Roman" panose="02020603050405020304" pitchFamily="18" charset="0"/>
+                              <a:cs typeface="Calibri" panose="020F0502020204030204" pitchFamily="34" charset="0"/>
+                            </a:rPr>
+                            <m:t>𝑡</m:t>
+                          </m:r>
+                        </m:e>
+                      </m:d>
+                      <m:r>
+                        <a:rPr lang="en-US" sz="1800">
+                          <a:effectLst/>
+                          <a:latin typeface="Cambria Math" panose="02040503050406030204" pitchFamily="18" charset="0"/>
+                          <a:ea typeface="Times New Roman" panose="02020603050405020304" pitchFamily="18" charset="0"/>
+                          <a:cs typeface="Calibri" panose="020F0502020204030204" pitchFamily="34" charset="0"/>
+                        </a:rPr>
+                        <m:t>⋅</m:t>
+                      </m:r>
+                      <m:r>
+                        <m:rPr>
+                          <m:sty m:val="p"/>
+                        </m:rPr>
+                        <a:rPr lang="en-US" sz="1800">
+                          <a:effectLst/>
+                          <a:latin typeface="Cambria Math" panose="02040503050406030204" pitchFamily="18" charset="0"/>
+                          <a:ea typeface="Times New Roman" panose="02020603050405020304" pitchFamily="18" charset="0"/>
+                          <a:cs typeface="Calibri" panose="020F0502020204030204" pitchFamily="34" charset="0"/>
+                        </a:rPr>
+                        <m:t>Δ</m:t>
+                      </m:r>
+                      <m:r>
+                        <a:rPr lang="en-US" sz="1800" i="1">
+                          <a:effectLst/>
+                          <a:latin typeface="Cambria Math" panose="02040503050406030204" pitchFamily="18" charset="0"/>
+                          <a:ea typeface="Times New Roman" panose="02020603050405020304" pitchFamily="18" charset="0"/>
+                          <a:cs typeface="Calibri" panose="020F0502020204030204" pitchFamily="34" charset="0"/>
+                        </a:rPr>
+                        <m:t>𝑡</m:t>
+                      </m:r>
+                    </m:oMath>
+                  </m:oMathPara>
+                </a14:m>
+                <a:endParaRPr lang="ru-RU" sz="1800" dirty="0">
+                  <a:effectLst/>
+                  <a:latin typeface="Times New Roman" panose="02020603050405020304" pitchFamily="18" charset="0"/>
+                  <a:ea typeface="Times New Roman" panose="02020603050405020304" pitchFamily="18" charset="0"/>
+                </a:endParaRPr>
+              </a:p>
+              <a:p>
+                <a:pPr>
+                  <a:spcAft>
+                    <a:spcPts val="600"/>
+                  </a:spcAft>
+                </a:pPr>
+                <a14:m>
+                  <m:oMathPara xmlns:m="http://schemas.openxmlformats.org/officeDocument/2006/math">
+                    <m:oMathParaPr>
+                      <m:jc m:val="centerGroup"/>
+                    </m:oMathParaPr>
+                    <m:oMath xmlns:m="http://schemas.openxmlformats.org/officeDocument/2006/math">
+                      <m:r>
+                        <a:rPr lang="en-US" sz="1800" i="1">
+                          <a:effectLst/>
+                          <a:latin typeface="Cambria Math" panose="02040503050406030204" pitchFamily="18" charset="0"/>
+                          <a:ea typeface="Times New Roman" panose="02020603050405020304" pitchFamily="18" charset="0"/>
+                          <a:cs typeface="Calibri" panose="020F0502020204030204" pitchFamily="34" charset="0"/>
+                        </a:rPr>
+                        <m:t>h</m:t>
+                      </m:r>
+                      <m:d>
+                        <m:dPr>
+                          <m:ctrlPr>
+                            <a:rPr lang="ru-RU" sz="1800" i="1">
+                              <a:effectLst/>
+                              <a:latin typeface="Cambria Math" panose="02040503050406030204" pitchFamily="18" charset="0"/>
+                              <a:ea typeface="Times New Roman" panose="02020603050405020304" pitchFamily="18" charset="0"/>
+                              <a:cs typeface="Calibri" panose="020F0502020204030204" pitchFamily="34" charset="0"/>
+                            </a:rPr>
+                          </m:ctrlPr>
+                        </m:dPr>
+                        <m:e>
+                          <m:r>
+                            <a:rPr lang="en-US" sz="1800" i="1">
+                              <a:effectLst/>
+                              <a:latin typeface="Cambria Math" panose="02040503050406030204" pitchFamily="18" charset="0"/>
+                              <a:ea typeface="Times New Roman" panose="02020603050405020304" pitchFamily="18" charset="0"/>
+                              <a:cs typeface="Calibri" panose="020F0502020204030204" pitchFamily="34" charset="0"/>
+                            </a:rPr>
+                            <m:t>𝑡</m:t>
+                          </m:r>
+                          <m:r>
+                            <a:rPr lang="en-US" sz="1800" i="1">
+                              <a:effectLst/>
+                              <a:latin typeface="Cambria Math" panose="02040503050406030204" pitchFamily="18" charset="0"/>
+                              <a:ea typeface="Times New Roman" panose="02020603050405020304" pitchFamily="18" charset="0"/>
+                              <a:cs typeface="Calibri" panose="020F0502020204030204" pitchFamily="34" charset="0"/>
+                            </a:rPr>
+                            <m:t>+</m:t>
+                          </m:r>
+                          <m:r>
+                            <m:rPr>
+                              <m:sty m:val="p"/>
+                            </m:rPr>
+                            <a:rPr lang="en-US" sz="1800">
+                              <a:effectLst/>
+                              <a:latin typeface="Cambria Math" panose="02040503050406030204" pitchFamily="18" charset="0"/>
+                              <a:ea typeface="Times New Roman" panose="02020603050405020304" pitchFamily="18" charset="0"/>
+                              <a:cs typeface="Calibri" panose="020F0502020204030204" pitchFamily="34" charset="0"/>
+                            </a:rPr>
+                            <m:t>Δ</m:t>
+                          </m:r>
+                          <m:r>
+                            <a:rPr lang="en-US" sz="1800" i="1">
+                              <a:effectLst/>
+                              <a:latin typeface="Cambria Math" panose="02040503050406030204" pitchFamily="18" charset="0"/>
+                              <a:ea typeface="Times New Roman" panose="02020603050405020304" pitchFamily="18" charset="0"/>
+                              <a:cs typeface="Calibri" panose="020F0502020204030204" pitchFamily="34" charset="0"/>
+                            </a:rPr>
+                            <m:t>𝑡</m:t>
+                          </m:r>
+                        </m:e>
+                      </m:d>
+                      <m:r>
+                        <a:rPr lang="en-US" sz="1800" i="1">
+                          <a:effectLst/>
+                          <a:latin typeface="Cambria Math" panose="02040503050406030204" pitchFamily="18" charset="0"/>
+                          <a:ea typeface="Times New Roman" panose="02020603050405020304" pitchFamily="18" charset="0"/>
+                          <a:cs typeface="Calibri" panose="020F0502020204030204" pitchFamily="34" charset="0"/>
+                        </a:rPr>
+                        <m:t>=</m:t>
+                      </m:r>
+                      <m:r>
+                        <a:rPr lang="en-US" sz="1800" i="1">
+                          <a:effectLst/>
+                          <a:latin typeface="Cambria Math" panose="02040503050406030204" pitchFamily="18" charset="0"/>
+                          <a:ea typeface="Times New Roman" panose="02020603050405020304" pitchFamily="18" charset="0"/>
+                          <a:cs typeface="Calibri" panose="020F0502020204030204" pitchFamily="34" charset="0"/>
+                        </a:rPr>
+                        <m:t>h</m:t>
+                      </m:r>
+                      <m:d>
+                        <m:dPr>
+                          <m:ctrlPr>
+                            <a:rPr lang="ru-RU" sz="1800" i="1">
+                              <a:effectLst/>
+                              <a:latin typeface="Cambria Math" panose="02040503050406030204" pitchFamily="18" charset="0"/>
+                              <a:ea typeface="Times New Roman" panose="02020603050405020304" pitchFamily="18" charset="0"/>
+                              <a:cs typeface="Calibri" panose="020F0502020204030204" pitchFamily="34" charset="0"/>
+                            </a:rPr>
+                          </m:ctrlPr>
+                        </m:dPr>
+                        <m:e>
+                          <m:r>
+                            <a:rPr lang="en-US" sz="1800" i="1">
+                              <a:effectLst/>
+                              <a:latin typeface="Cambria Math" panose="02040503050406030204" pitchFamily="18" charset="0"/>
+                              <a:ea typeface="Times New Roman" panose="02020603050405020304" pitchFamily="18" charset="0"/>
+                              <a:cs typeface="Calibri" panose="020F0502020204030204" pitchFamily="34" charset="0"/>
+                            </a:rPr>
+                            <m:t>𝑡</m:t>
+                          </m:r>
+                        </m:e>
+                      </m:d>
+                      <m:r>
+                        <a:rPr lang="en-US" sz="1800" i="1">
+                          <a:effectLst/>
+                          <a:latin typeface="Cambria Math" panose="02040503050406030204" pitchFamily="18" charset="0"/>
+                          <a:ea typeface="Times New Roman" panose="02020603050405020304" pitchFamily="18" charset="0"/>
+                          <a:cs typeface="Calibri" panose="020F0502020204030204" pitchFamily="34" charset="0"/>
+                        </a:rPr>
+                        <m:t>+</m:t>
+                      </m:r>
+                      <m:r>
+                        <a:rPr lang="en-US" sz="1800" i="1">
+                          <a:effectLst/>
+                          <a:latin typeface="Cambria Math" panose="02040503050406030204" pitchFamily="18" charset="0"/>
+                          <a:ea typeface="Times New Roman" panose="02020603050405020304" pitchFamily="18" charset="0"/>
+                          <a:cs typeface="Calibri" panose="020F0502020204030204" pitchFamily="34" charset="0"/>
+                        </a:rPr>
+                        <m:t>𝑣</m:t>
+                      </m:r>
+                      <m:d>
+                        <m:dPr>
+                          <m:ctrlPr>
+                            <a:rPr lang="ru-RU" sz="1800" i="1">
+                              <a:effectLst/>
+                              <a:latin typeface="Cambria Math" panose="02040503050406030204" pitchFamily="18" charset="0"/>
+                              <a:ea typeface="Times New Roman" panose="02020603050405020304" pitchFamily="18" charset="0"/>
+                              <a:cs typeface="Calibri" panose="020F0502020204030204" pitchFamily="34" charset="0"/>
+                            </a:rPr>
+                          </m:ctrlPr>
+                        </m:dPr>
+                        <m:e>
+                          <m:r>
+                            <a:rPr lang="en-US" sz="1800" i="1">
+                              <a:effectLst/>
+                              <a:latin typeface="Cambria Math" panose="02040503050406030204" pitchFamily="18" charset="0"/>
+                              <a:ea typeface="Times New Roman" panose="02020603050405020304" pitchFamily="18" charset="0"/>
+                              <a:cs typeface="Calibri" panose="020F0502020204030204" pitchFamily="34" charset="0"/>
+                            </a:rPr>
+                            <m:t>𝑡</m:t>
+                          </m:r>
+                        </m:e>
+                      </m:d>
+                      <m:r>
+                        <a:rPr lang="en-US" sz="1800">
+                          <a:effectLst/>
+                          <a:latin typeface="Cambria Math" panose="02040503050406030204" pitchFamily="18" charset="0"/>
+                          <a:ea typeface="Times New Roman" panose="02020603050405020304" pitchFamily="18" charset="0"/>
+                          <a:cs typeface="Calibri" panose="020F0502020204030204" pitchFamily="34" charset="0"/>
+                        </a:rPr>
+                        <m:t>⋅</m:t>
+                      </m:r>
+                      <m:r>
+                        <m:rPr>
+                          <m:sty m:val="p"/>
+                        </m:rPr>
+                        <a:rPr lang="en-US" sz="1800">
+                          <a:effectLst/>
+                          <a:latin typeface="Cambria Math" panose="02040503050406030204" pitchFamily="18" charset="0"/>
+                          <a:ea typeface="Times New Roman" panose="02020603050405020304" pitchFamily="18" charset="0"/>
+                          <a:cs typeface="Calibri" panose="020F0502020204030204" pitchFamily="34" charset="0"/>
+                        </a:rPr>
+                        <m:t>Δ</m:t>
+                      </m:r>
+                      <m:r>
+                        <a:rPr lang="en-US" sz="1800" i="1">
+                          <a:effectLst/>
+                          <a:latin typeface="Cambria Math" panose="02040503050406030204" pitchFamily="18" charset="0"/>
+                          <a:ea typeface="Times New Roman" panose="02020603050405020304" pitchFamily="18" charset="0"/>
+                          <a:cs typeface="Calibri" panose="020F0502020204030204" pitchFamily="34" charset="0"/>
+                        </a:rPr>
+                        <m:t>𝑡</m:t>
+                      </m:r>
+                    </m:oMath>
+                  </m:oMathPara>
+                </a14:m>
+                <a:endParaRPr lang="ru-RU" sz="1800" dirty="0">
+                  <a:effectLst/>
+                  <a:latin typeface="Times New Roman" panose="02020603050405020304" pitchFamily="18" charset="0"/>
+                  <a:ea typeface="Times New Roman" panose="02020603050405020304" pitchFamily="18" charset="0"/>
+                </a:endParaRPr>
+              </a:p>
+              <a:p>
+                <a:pPr>
+                  <a:spcAft>
+                    <a:spcPts val="600"/>
+                  </a:spcAft>
+                </a:pPr>
+                <a:r>
+                  <a:rPr lang="ru-RU" sz="1800" dirty="0">
+                    <a:effectLst/>
+                    <a:latin typeface="Calibri" panose="020F0502020204030204" pitchFamily="34" charset="0"/>
+                    <a:ea typeface="Times New Roman" panose="02020603050405020304" pitchFamily="18" charset="0"/>
+                  </a:rPr>
+                  <a:t>- </a:t>
+                </a:r>
+                <a14:m>
+                  <m:oMath xmlns:m="http://schemas.openxmlformats.org/officeDocument/2006/math">
+                    <m:r>
+                      <m:rPr>
+                        <m:lit/>
+                      </m:rPr>
+                      <a:rPr lang="ru-RU" sz="1800" i="1">
+                        <a:effectLst/>
+                        <a:latin typeface="Cambria Math" panose="02040503050406030204" pitchFamily="18" charset="0"/>
+                        <a:ea typeface="Times New Roman" panose="02020603050405020304" pitchFamily="18" charset="0"/>
+                        <a:cs typeface="Calibri" panose="020F0502020204030204" pitchFamily="34" charset="0"/>
+                      </a:rPr>
+                      <m:t>(</m:t>
+                    </m:r>
+                    <m:r>
+                      <a:rPr lang="ru-RU" sz="1800" i="1">
+                        <a:effectLst/>
+                        <a:latin typeface="Cambria Math" panose="02040503050406030204" pitchFamily="18" charset="0"/>
+                        <a:ea typeface="Times New Roman" panose="02020603050405020304" pitchFamily="18" charset="0"/>
+                        <a:cs typeface="Calibri" panose="020F0502020204030204" pitchFamily="34" charset="0"/>
+                      </a:rPr>
+                      <m:t>𝑣</m:t>
+                    </m:r>
+                    <m:r>
+                      <m:rPr>
+                        <m:lit/>
+                      </m:rPr>
+                      <a:rPr lang="ru-RU" sz="1800" i="1">
+                        <a:effectLst/>
+                        <a:latin typeface="Cambria Math" panose="02040503050406030204" pitchFamily="18" charset="0"/>
+                        <a:ea typeface="Times New Roman" panose="02020603050405020304" pitchFamily="18" charset="0"/>
+                        <a:cs typeface="Calibri" panose="020F0502020204030204" pitchFamily="34" charset="0"/>
+                      </a:rPr>
+                      <m:t>)</m:t>
+                    </m:r>
+                  </m:oMath>
+                </a14:m>
+                <a:r>
+                  <a:rPr lang="ru-RU" sz="1800" dirty="0">
+                    <a:effectLst/>
+                    <a:latin typeface="Calibri" panose="020F0502020204030204" pitchFamily="34" charset="0"/>
+                    <a:ea typeface="Times New Roman" panose="02020603050405020304" pitchFamily="18" charset="0"/>
+                  </a:rPr>
+                  <a:t> — скорость (м/с) </a:t>
+                </a:r>
+                <a:endParaRPr lang="ru-RU" sz="1800" dirty="0">
+                  <a:effectLst/>
+                  <a:latin typeface="Times New Roman" panose="02020603050405020304" pitchFamily="18" charset="0"/>
+                  <a:ea typeface="Times New Roman" panose="02020603050405020304" pitchFamily="18" charset="0"/>
+                </a:endParaRPr>
+              </a:p>
+              <a:p>
+                <a:pPr>
+                  <a:spcAft>
+                    <a:spcPts val="600"/>
+                  </a:spcAft>
+                </a:pPr>
+                <a:r>
+                  <a:rPr lang="ru-RU" sz="1800" dirty="0">
+                    <a:effectLst/>
+                    <a:latin typeface="Calibri" panose="020F0502020204030204" pitchFamily="34" charset="0"/>
+                    <a:ea typeface="Times New Roman" panose="02020603050405020304" pitchFamily="18" charset="0"/>
+                  </a:rPr>
+                  <a:t>- </a:t>
+                </a:r>
+                <a14:m>
+                  <m:oMath xmlns:m="http://schemas.openxmlformats.org/officeDocument/2006/math">
+                    <m:r>
+                      <m:rPr>
+                        <m:lit/>
+                      </m:rPr>
+                      <a:rPr lang="ru-RU" sz="1800" i="1">
+                        <a:effectLst/>
+                        <a:latin typeface="Cambria Math" panose="02040503050406030204" pitchFamily="18" charset="0"/>
+                        <a:ea typeface="Times New Roman" panose="02020603050405020304" pitchFamily="18" charset="0"/>
+                        <a:cs typeface="Calibri" panose="020F0502020204030204" pitchFamily="34" charset="0"/>
+                      </a:rPr>
+                      <m:t>(</m:t>
+                    </m:r>
+                    <m:r>
+                      <a:rPr lang="ru-RU" sz="1800" i="1">
+                        <a:effectLst/>
+                        <a:latin typeface="Cambria Math" panose="02040503050406030204" pitchFamily="18" charset="0"/>
+                        <a:ea typeface="Times New Roman" panose="02020603050405020304" pitchFamily="18" charset="0"/>
+                        <a:cs typeface="Calibri" panose="020F0502020204030204" pitchFamily="34" charset="0"/>
+                      </a:rPr>
+                      <m:t>h</m:t>
+                    </m:r>
+                    <m:r>
+                      <m:rPr>
+                        <m:lit/>
+                      </m:rPr>
+                      <a:rPr lang="ru-RU" sz="1800" i="1">
+                        <a:effectLst/>
+                        <a:latin typeface="Cambria Math" panose="02040503050406030204" pitchFamily="18" charset="0"/>
+                        <a:ea typeface="Times New Roman" panose="02020603050405020304" pitchFamily="18" charset="0"/>
+                        <a:cs typeface="Calibri" panose="020F0502020204030204" pitchFamily="34" charset="0"/>
+                      </a:rPr>
+                      <m:t>)</m:t>
+                    </m:r>
+                  </m:oMath>
+                </a14:m>
+                <a:r>
+                  <a:rPr lang="ru-RU" sz="1800" dirty="0">
+                    <a:effectLst/>
+                    <a:latin typeface="Calibri" panose="020F0502020204030204" pitchFamily="34" charset="0"/>
+                    <a:ea typeface="Times New Roman" panose="02020603050405020304" pitchFamily="18" charset="0"/>
+                  </a:rPr>
+                  <a:t> — высота (м) </a:t>
+                </a:r>
+                <a:endParaRPr lang="ru-RU" sz="1800" dirty="0">
+                  <a:effectLst/>
+                  <a:latin typeface="Times New Roman" panose="02020603050405020304" pitchFamily="18" charset="0"/>
+                  <a:ea typeface="Times New Roman" panose="02020603050405020304" pitchFamily="18" charset="0"/>
+                </a:endParaRPr>
+              </a:p>
+              <a:p>
+                <a:pPr>
+                  <a:spcAft>
+                    <a:spcPts val="600"/>
+                  </a:spcAft>
+                </a:pPr>
+                <a:r>
+                  <a:rPr lang="ru-RU" sz="1800" dirty="0">
+                    <a:effectLst/>
+                    <a:latin typeface="Calibri" panose="020F0502020204030204" pitchFamily="34" charset="0"/>
+                    <a:ea typeface="Times New Roman" panose="02020603050405020304" pitchFamily="18" charset="0"/>
+                  </a:rPr>
+                  <a:t>- </a:t>
+                </a:r>
+                <a14:m>
+                  <m:oMath xmlns:m="http://schemas.openxmlformats.org/officeDocument/2006/math">
+                    <m:r>
+                      <m:rPr>
+                        <m:lit/>
+                      </m:rPr>
+                      <a:rPr lang="ru-RU" sz="1800" i="1">
+                        <a:effectLst/>
+                        <a:latin typeface="Cambria Math" panose="02040503050406030204" pitchFamily="18" charset="0"/>
+                        <a:ea typeface="Times New Roman" panose="02020603050405020304" pitchFamily="18" charset="0"/>
+                        <a:cs typeface="Calibri" panose="020F0502020204030204" pitchFamily="34" charset="0"/>
+                      </a:rPr>
+                      <m:t>(</m:t>
+                    </m:r>
+                    <m:r>
+                      <m:rPr>
+                        <m:sty m:val="p"/>
+                      </m:rPr>
+                      <a:rPr lang="ru-RU" sz="1800">
+                        <a:effectLst/>
+                        <a:latin typeface="Cambria Math" panose="02040503050406030204" pitchFamily="18" charset="0"/>
+                        <a:ea typeface="Times New Roman" panose="02020603050405020304" pitchFamily="18" charset="0"/>
+                        <a:cs typeface="Calibri" panose="020F0502020204030204" pitchFamily="34" charset="0"/>
+                      </a:rPr>
+                      <m:t>Δ</m:t>
+                    </m:r>
+                    <m:r>
+                      <a:rPr lang="ru-RU" sz="1800" i="1">
+                        <a:effectLst/>
+                        <a:latin typeface="Cambria Math" panose="02040503050406030204" pitchFamily="18" charset="0"/>
+                        <a:ea typeface="Times New Roman" panose="02020603050405020304" pitchFamily="18" charset="0"/>
+                        <a:cs typeface="Calibri" panose="020F0502020204030204" pitchFamily="34" charset="0"/>
+                      </a:rPr>
+                      <m:t>𝑡</m:t>
+                    </m:r>
+                    <m:r>
+                      <m:rPr>
+                        <m:lit/>
+                      </m:rPr>
+                      <a:rPr lang="ru-RU" sz="1800" i="1">
+                        <a:effectLst/>
+                        <a:latin typeface="Cambria Math" panose="02040503050406030204" pitchFamily="18" charset="0"/>
+                        <a:ea typeface="Times New Roman" panose="02020603050405020304" pitchFamily="18" charset="0"/>
+                        <a:cs typeface="Calibri" panose="020F0502020204030204" pitchFamily="34" charset="0"/>
+                      </a:rPr>
+                      <m:t>)</m:t>
+                    </m:r>
+                  </m:oMath>
+                </a14:m>
+                <a:r>
+                  <a:rPr lang="ru-RU" sz="1800" dirty="0">
+                    <a:effectLst/>
+                    <a:latin typeface="Calibri" panose="020F0502020204030204" pitchFamily="34" charset="0"/>
+                    <a:ea typeface="Times New Roman" panose="02020603050405020304" pitchFamily="18" charset="0"/>
+                  </a:rPr>
+                  <a:t> — шаг по времени (с) </a:t>
+                </a:r>
+                <a:endParaRPr lang="ru-RU" sz="1800" dirty="0">
+                  <a:effectLst/>
+                  <a:latin typeface="Times New Roman" panose="02020603050405020304" pitchFamily="18" charset="0"/>
+                  <a:ea typeface="Times New Roman" panose="02020603050405020304" pitchFamily="18" charset="0"/>
+                </a:endParaRPr>
+              </a:p>
+            </p:txBody>
+          </p:sp>
+        </mc:Choice>
+        <mc:Fallback>
+          <p:sp>
+            <p:nvSpPr>
+              <p:cNvPr id="17" name="TextBox 16">
+                <a:extLst>
+                  <a:ext uri="{FF2B5EF4-FFF2-40B4-BE49-F238E27FC236}">
+                    <a16:creationId xmlns:a16="http://schemas.microsoft.com/office/drawing/2014/main" id="{DA30E787-B0D0-4A08-AB4A-E8858A97D469}"/>
+                  </a:ext>
+                </a:extLst>
+              </p:cNvPr>
+              <p:cNvSpPr txBox="1">
+                <a:spLocks noRot="1" noChangeAspect="1" noMove="1" noResize="1" noEditPoints="1" noAdjustHandles="1" noChangeArrowheads="1" noChangeShapeType="1" noTextEdit="1"/>
+              </p:cNvSpPr>
+              <p:nvPr/>
+            </p:nvSpPr>
+            <p:spPr>
+              <a:xfrm>
+                <a:off x="5155323" y="4131029"/>
+                <a:ext cx="5344510" cy="2139047"/>
+              </a:xfrm>
+              <a:prstGeom prst="rect">
+                <a:avLst/>
+              </a:prstGeom>
+              <a:blipFill>
+                <a:blip r:embed="rId5"/>
+                <a:stretch>
+                  <a:fillRect l="-911" t="-1416" b="-3399"/>
+                </a:stretch>
+              </a:blipFill>
+              <a:ln>
+                <a:solidFill>
+                  <a:schemeClr val="tx1">
+                    <a:lumMod val="50000"/>
+                    <a:lumOff val="50000"/>
+                  </a:schemeClr>
+                </a:solidFill>
+              </a:ln>
+            </p:spPr>
+            <p:txBody>
+              <a:bodyPr/>
+              <a:lstStyle/>
+              <a:p>
+                <a:r>
+                  <a:rPr lang="ru-RU">
+                    <a:noFill/>
+                  </a:rPr>
+                  <a:t> </a:t>
+                </a:r>
+              </a:p>
+            </p:txBody>
+          </p:sp>
+        </mc:Fallback>
+      </mc:AlternateContent>
+    </p:spTree>
+    <p:extLst>
+      <p:ext uri="{BB962C8B-B14F-4D97-AF65-F5344CB8AC3E}">
+        <p14:creationId xmlns:p14="http://schemas.microsoft.com/office/powerpoint/2010/main" val="62545956"/>
+      </p:ext>
+    </p:extLst>
+  </p:cSld>
+  <p:clrMapOvr>
+    <a:masterClrMapping/>
+  </p:clrMapOvr>
+</p:sld>
+</file>
+
+<file path=ppt/slides/slide4.xml><?xml version="1.0" encoding="utf-8"?>
 <p:sld xmlns:a="http://schemas.openxmlformats.org/drawingml/2006/main" xmlns:r="http://schemas.openxmlformats.org/officeDocument/2006/relationships" xmlns:p="http://schemas.openxmlformats.org/presentationml/2006/main">
   <p:cSld>
     <p:spTree>
@@ -4030,7 +9515,7 @@
 </p:sld>
 </file>
 
-<file path=ppt/slides/slide3.xml><?xml version="1.0" encoding="utf-8"?>
+<file path=ppt/slides/slide5.xml><?xml version="1.0" encoding="utf-8"?>
 <p:sld xmlns:a="http://schemas.openxmlformats.org/drawingml/2006/main" xmlns:r="http://schemas.openxmlformats.org/officeDocument/2006/relationships" xmlns:p="http://schemas.openxmlformats.org/presentationml/2006/main">
   <p:cSld>
     <p:spTree>
@@ -4120,7 +9605,7 @@
 </p:sld>
 </file>
 
-<file path=ppt/slides/slide4.xml><?xml version="1.0" encoding="utf-8"?>
+<file path=ppt/slides/slide6.xml><?xml version="1.0" encoding="utf-8"?>
 <p:sld xmlns:a="http://schemas.openxmlformats.org/drawingml/2006/main" xmlns:r="http://schemas.openxmlformats.org/officeDocument/2006/relationships" xmlns:p="http://schemas.openxmlformats.org/presentationml/2006/main">
   <p:cSld>
     <p:spTree>
@@ -4210,7 +9695,7 @@
 </p:sld>
 </file>
 
-<file path=ppt/slides/slide5.xml><?xml version="1.0" encoding="utf-8"?>
+<file path=ppt/slides/slide7.xml><?xml version="1.0" encoding="utf-8"?>
 <p:sld xmlns:a="http://schemas.openxmlformats.org/drawingml/2006/main" xmlns:r="http://schemas.openxmlformats.org/officeDocument/2006/relationships" xmlns:p="http://schemas.openxmlformats.org/presentationml/2006/main">
   <p:cSld>
     <p:spTree>
@@ -4291,6 +9776,96 @@
     <p:extLst>
       <p:ext uri="{BB962C8B-B14F-4D97-AF65-F5344CB8AC3E}">
         <p14:creationId xmlns:p14="http://schemas.microsoft.com/office/powerpoint/2010/main" val="205308041"/>
+      </p:ext>
+    </p:extLst>
+  </p:cSld>
+  <p:clrMapOvr>
+    <a:masterClrMapping/>
+  </p:clrMapOvr>
+</p:sld>
+</file>
+
+<file path=ppt/slides/slide8.xml><?xml version="1.0" encoding="utf-8"?>
+<p:sld xmlns:a="http://schemas.openxmlformats.org/drawingml/2006/main" xmlns:r="http://schemas.openxmlformats.org/officeDocument/2006/relationships" xmlns:p="http://schemas.openxmlformats.org/presentationml/2006/main">
+  <p:cSld>
+    <p:spTree>
+      <p:nvGrpSpPr>
+        <p:cNvPr id="1" name=""/>
+        <p:cNvGrpSpPr/>
+        <p:nvPr/>
+      </p:nvGrpSpPr>
+      <p:grpSpPr>
+        <a:xfrm>
+          <a:off x="0" y="0"/>
+          <a:ext cx="0" cy="0"/>
+          <a:chOff x="0" y="0"/>
+          <a:chExt cx="0" cy="0"/>
+        </a:xfrm>
+      </p:grpSpPr>
+      <p:sp>
+        <p:nvSpPr>
+          <p:cNvPr id="2" name="Заголовок 1">
+            <a:extLst>
+              <a:ext uri="{FF2B5EF4-FFF2-40B4-BE49-F238E27FC236}">
+                <a16:creationId xmlns:a16="http://schemas.microsoft.com/office/drawing/2014/main" id="{68A08F64-2BCA-4911-98DC-1E514CFCC393}"/>
+              </a:ext>
+            </a:extLst>
+          </p:cNvPr>
+          <p:cNvSpPr>
+            <a:spLocks noGrp="1"/>
+          </p:cNvSpPr>
+          <p:nvPr>
+            <p:ph type="title"/>
+          </p:nvPr>
+        </p:nvSpPr>
+        <p:spPr/>
+        <p:txBody>
+          <a:bodyPr/>
+          <a:lstStyle/>
+          <a:p>
+            <a:endParaRPr lang="ru-RU"/>
+          </a:p>
+        </p:txBody>
+      </p:sp>
+      <p:pic>
+        <p:nvPicPr>
+          <p:cNvPr id="5" name="Объект 4">
+            <a:extLst>
+              <a:ext uri="{FF2B5EF4-FFF2-40B4-BE49-F238E27FC236}">
+                <a16:creationId xmlns:a16="http://schemas.microsoft.com/office/drawing/2014/main" id="{8E9FD234-2C27-4333-8E13-0B13885B88A9}"/>
+              </a:ext>
+            </a:extLst>
+          </p:cNvPr>
+          <p:cNvPicPr>
+            <a:picLocks noGrp="1" noChangeAspect="1"/>
+          </p:cNvPicPr>
+          <p:nvPr>
+            <p:ph idx="1"/>
+          </p:nvPr>
+        </p:nvPicPr>
+        <p:blipFill>
+          <a:blip r:embed="rId2">
+            <a:extLst>
+              <a:ext uri="{28A0092B-C50C-407E-A947-70E740481C1C}">
+                <a14:useLocalDpi xmlns:a14="http://schemas.microsoft.com/office/drawing/2010/main" val="0"/>
+              </a:ext>
+            </a:extLst>
+          </a:blip>
+          <a:stretch>
+            <a:fillRect/>
+          </a:stretch>
+        </p:blipFill>
+        <p:spPr>
+          <a:xfrm>
+            <a:off x="-1" y="-1565276"/>
+            <a:ext cx="10691813" cy="10691813"/>
+          </a:xfrm>
+        </p:spPr>
+      </p:pic>
+    </p:spTree>
+    <p:extLst>
+      <p:ext uri="{BB962C8B-B14F-4D97-AF65-F5344CB8AC3E}">
+        <p14:creationId xmlns:p14="http://schemas.microsoft.com/office/powerpoint/2010/main" val="2659283031"/>
       </p:ext>
     </p:extLst>
   </p:cSld>

--- a/docs/ThrustVsExhaustVelocityAnalysis.pptx
+++ b/docs/ThrustVsExhaustVelocityAnalysis.pptx
@@ -250,7 +250,7 @@
           <a:p>
             <a:fld id="{9412F206-934A-4AEB-8CDD-488D750A95A8}" type="datetimeFigureOut">
               <a:rPr lang="ru-RU" smtClean="0"/>
-              <a:t>29.03.2026</a:t>
+              <a:t>30.03.2026</a:t>
             </a:fld>
             <a:endParaRPr lang="ru-RU"/>
           </a:p>
@@ -420,7 +420,7 @@
           <a:p>
             <a:fld id="{9412F206-934A-4AEB-8CDD-488D750A95A8}" type="datetimeFigureOut">
               <a:rPr lang="ru-RU" smtClean="0"/>
-              <a:t>29.03.2026</a:t>
+              <a:t>30.03.2026</a:t>
             </a:fld>
             <a:endParaRPr lang="ru-RU"/>
           </a:p>
@@ -600,7 +600,7 @@
           <a:p>
             <a:fld id="{9412F206-934A-4AEB-8CDD-488D750A95A8}" type="datetimeFigureOut">
               <a:rPr lang="ru-RU" smtClean="0"/>
-              <a:t>29.03.2026</a:t>
+              <a:t>30.03.2026</a:t>
             </a:fld>
             <a:endParaRPr lang="ru-RU"/>
           </a:p>
@@ -770,7 +770,7 @@
           <a:p>
             <a:fld id="{9412F206-934A-4AEB-8CDD-488D750A95A8}" type="datetimeFigureOut">
               <a:rPr lang="ru-RU" smtClean="0"/>
-              <a:t>29.03.2026</a:t>
+              <a:t>30.03.2026</a:t>
             </a:fld>
             <a:endParaRPr lang="ru-RU"/>
           </a:p>
@@ -1014,7 +1014,7 @@
           <a:p>
             <a:fld id="{9412F206-934A-4AEB-8CDD-488D750A95A8}" type="datetimeFigureOut">
               <a:rPr lang="ru-RU" smtClean="0"/>
-              <a:t>29.03.2026</a:t>
+              <a:t>30.03.2026</a:t>
             </a:fld>
             <a:endParaRPr lang="ru-RU"/>
           </a:p>
@@ -1246,7 +1246,7 @@
           <a:p>
             <a:fld id="{9412F206-934A-4AEB-8CDD-488D750A95A8}" type="datetimeFigureOut">
               <a:rPr lang="ru-RU" smtClean="0"/>
-              <a:t>29.03.2026</a:t>
+              <a:t>30.03.2026</a:t>
             </a:fld>
             <a:endParaRPr lang="ru-RU"/>
           </a:p>
@@ -1613,7 +1613,7 @@
           <a:p>
             <a:fld id="{9412F206-934A-4AEB-8CDD-488D750A95A8}" type="datetimeFigureOut">
               <a:rPr lang="ru-RU" smtClean="0"/>
-              <a:t>29.03.2026</a:t>
+              <a:t>30.03.2026</a:t>
             </a:fld>
             <a:endParaRPr lang="ru-RU"/>
           </a:p>
@@ -1731,7 +1731,7 @@
           <a:p>
             <a:fld id="{9412F206-934A-4AEB-8CDD-488D750A95A8}" type="datetimeFigureOut">
               <a:rPr lang="ru-RU" smtClean="0"/>
-              <a:t>29.03.2026</a:t>
+              <a:t>30.03.2026</a:t>
             </a:fld>
             <a:endParaRPr lang="ru-RU"/>
           </a:p>
@@ -1826,7 +1826,7 @@
           <a:p>
             <a:fld id="{9412F206-934A-4AEB-8CDD-488D750A95A8}" type="datetimeFigureOut">
               <a:rPr lang="ru-RU" smtClean="0"/>
-              <a:t>29.03.2026</a:t>
+              <a:t>30.03.2026</a:t>
             </a:fld>
             <a:endParaRPr lang="ru-RU"/>
           </a:p>
@@ -2103,7 +2103,7 @@
           <a:p>
             <a:fld id="{9412F206-934A-4AEB-8CDD-488D750A95A8}" type="datetimeFigureOut">
               <a:rPr lang="ru-RU" smtClean="0"/>
-              <a:t>29.03.2026</a:t>
+              <a:t>30.03.2026</a:t>
             </a:fld>
             <a:endParaRPr lang="ru-RU"/>
           </a:p>
@@ -2360,7 +2360,7 @@
           <a:p>
             <a:fld id="{9412F206-934A-4AEB-8CDD-488D750A95A8}" type="datetimeFigureOut">
               <a:rPr lang="ru-RU" smtClean="0"/>
-              <a:t>29.03.2026</a:t>
+              <a:t>30.03.2026</a:t>
             </a:fld>
             <a:endParaRPr lang="ru-RU"/>
           </a:p>
@@ -2573,7 +2573,7 @@
           <a:p>
             <a:fld id="{9412F206-934A-4AEB-8CDD-488D750A95A8}" type="datetimeFigureOut">
               <a:rPr lang="ru-RU" smtClean="0"/>
-              <a:t>29.03.2026</a:t>
+              <a:t>30.03.2026</a:t>
             </a:fld>
             <a:endParaRPr lang="ru-RU"/>
           </a:p>
@@ -3927,8 +3927,8 @@
           <a:chExt cx="0" cy="0"/>
         </a:xfrm>
       </p:grpSpPr>
-      <mc:AlternateContent xmlns:mc="http://schemas.openxmlformats.org/markup-compatibility/2006">
-        <mc:Choice xmlns:a14="http://schemas.microsoft.com/office/drawing/2010/main" Requires="a14">
+      <mc:AlternateContent xmlns:mc="http://schemas.openxmlformats.org/markup-compatibility/2006" xmlns:a14="http://schemas.microsoft.com/office/drawing/2010/main">
+        <mc:Choice Requires="a14">
           <p:sp>
             <p:nvSpPr>
               <p:cNvPr id="3" name="Объект 2">
@@ -4428,7 +4428,7 @@
             </p:txBody>
           </p:sp>
         </mc:Choice>
-        <mc:Fallback>
+        <mc:Fallback xmlns="">
           <p:sp>
             <p:nvSpPr>
               <p:cNvPr id="3" name="Объект 2">
@@ -4480,8 +4480,8 @@
           </p:sp>
         </mc:Fallback>
       </mc:AlternateContent>
-      <mc:AlternateContent xmlns:mc="http://schemas.openxmlformats.org/markup-compatibility/2006">
-        <mc:Choice xmlns:a14="http://schemas.microsoft.com/office/drawing/2010/main" Requires="a14">
+      <mc:AlternateContent xmlns:mc="http://schemas.openxmlformats.org/markup-compatibility/2006" xmlns:a14="http://schemas.microsoft.com/office/drawing/2010/main">
+        <mc:Choice Requires="a14">
           <p:sp>
             <p:nvSpPr>
               <p:cNvPr id="5" name="TextBox 4">
@@ -5019,7 +5019,7 @@
             </p:txBody>
           </p:sp>
         </mc:Choice>
-        <mc:Fallback>
+        <mc:Fallback xmlns="">
           <p:sp>
             <p:nvSpPr>
               <p:cNvPr id="5" name="TextBox 4">
@@ -5072,8 +5072,8 @@
           </p:sp>
         </mc:Fallback>
       </mc:AlternateContent>
-      <mc:AlternateContent xmlns:mc="http://schemas.openxmlformats.org/markup-compatibility/2006">
-        <mc:Choice xmlns:a14="http://schemas.microsoft.com/office/drawing/2010/main" Requires="a14">
+      <mc:AlternateContent xmlns:mc="http://schemas.openxmlformats.org/markup-compatibility/2006" xmlns:a14="http://schemas.microsoft.com/office/drawing/2010/main">
+        <mc:Choice Requires="a14">
           <p:sp>
             <p:nvSpPr>
               <p:cNvPr id="7" name="TextBox 6">
@@ -5386,7 +5386,7 @@
             </p:txBody>
           </p:sp>
         </mc:Choice>
-        <mc:Fallback>
+        <mc:Fallback xmlns="">
           <p:sp>
             <p:nvSpPr>
               <p:cNvPr id="7" name="TextBox 6">
@@ -5439,8 +5439,8 @@
           </p:sp>
         </mc:Fallback>
       </mc:AlternateContent>
-      <mc:AlternateContent xmlns:mc="http://schemas.openxmlformats.org/markup-compatibility/2006">
-        <mc:Choice xmlns:a14="http://schemas.microsoft.com/office/drawing/2010/main" Requires="a14">
+      <mc:AlternateContent xmlns:mc="http://schemas.openxmlformats.org/markup-compatibility/2006" xmlns:a14="http://schemas.microsoft.com/office/drawing/2010/main">
+        <mc:Choice Requires="a14">
           <p:sp>
             <p:nvSpPr>
               <p:cNvPr id="9" name="TextBox 8">
@@ -6066,7 +6066,7 @@
             </p:txBody>
           </p:sp>
         </mc:Choice>
-        <mc:Fallback>
+        <mc:Fallback xmlns="">
           <p:sp>
             <p:nvSpPr>
               <p:cNvPr id="9" name="TextBox 8">
@@ -6119,8 +6119,8 @@
           </p:sp>
         </mc:Fallback>
       </mc:AlternateContent>
-      <mc:AlternateContent xmlns:mc="http://schemas.openxmlformats.org/markup-compatibility/2006">
-        <mc:Choice xmlns:a14="http://schemas.microsoft.com/office/drawing/2010/main" Requires="a14">
+      <mc:AlternateContent xmlns:mc="http://schemas.openxmlformats.org/markup-compatibility/2006" xmlns:a14="http://schemas.microsoft.com/office/drawing/2010/main">
+        <mc:Choice Requires="a14">
           <p:sp>
             <p:nvSpPr>
               <p:cNvPr id="12" name="TextBox 11">
@@ -6633,7 +6633,7 @@
             </p:txBody>
           </p:sp>
         </mc:Choice>
-        <mc:Fallback>
+        <mc:Fallback xmlns="">
           <p:sp>
             <p:nvSpPr>
               <p:cNvPr id="12" name="TextBox 11">
@@ -6716,8 +6716,8 @@
           <a:chExt cx="0" cy="0"/>
         </a:xfrm>
       </p:grpSpPr>
-      <mc:AlternateContent xmlns:mc="http://schemas.openxmlformats.org/markup-compatibility/2006">
-        <mc:Choice xmlns:a14="http://schemas.microsoft.com/office/drawing/2010/main" Requires="a14">
+      <mc:AlternateContent xmlns:mc="http://schemas.openxmlformats.org/markup-compatibility/2006" xmlns:a14="http://schemas.microsoft.com/office/drawing/2010/main">
+        <mc:Choice Requires="a14">
           <p:sp>
             <p:nvSpPr>
               <p:cNvPr id="8" name="TextBox 7">
@@ -7341,7 +7341,7 @@
             </p:txBody>
           </p:sp>
         </mc:Choice>
-        <mc:Fallback>
+        <mc:Fallback xmlns="">
           <p:sp>
             <p:nvSpPr>
               <p:cNvPr id="8" name="TextBox 7">
@@ -7394,8 +7394,8 @@
           </p:sp>
         </mc:Fallback>
       </mc:AlternateContent>
-      <mc:AlternateContent xmlns:mc="http://schemas.openxmlformats.org/markup-compatibility/2006">
-        <mc:Choice xmlns:a14="http://schemas.microsoft.com/office/drawing/2010/main" Requires="a14">
+      <mc:AlternateContent xmlns:mc="http://schemas.openxmlformats.org/markup-compatibility/2006" xmlns:a14="http://schemas.microsoft.com/office/drawing/2010/main">
+        <mc:Choice Requires="a14">
           <p:sp>
             <p:nvSpPr>
               <p:cNvPr id="13" name="TextBox 12">
@@ -7964,7 +7964,7 @@
             </p:txBody>
           </p:sp>
         </mc:Choice>
-        <mc:Fallback>
+        <mc:Fallback xmlns="">
           <p:sp>
             <p:nvSpPr>
               <p:cNvPr id="13" name="TextBox 12">
@@ -8017,8 +8017,8 @@
           </p:sp>
         </mc:Fallback>
       </mc:AlternateContent>
-      <mc:AlternateContent xmlns:mc="http://schemas.openxmlformats.org/markup-compatibility/2006">
-        <mc:Choice xmlns:a14="http://schemas.microsoft.com/office/drawing/2010/main" Requires="a14">
+      <mc:AlternateContent xmlns:mc="http://schemas.openxmlformats.org/markup-compatibility/2006" xmlns:a14="http://schemas.microsoft.com/office/drawing/2010/main">
+        <mc:Choice Requires="a14">
           <p:sp>
             <p:nvSpPr>
               <p:cNvPr id="15" name="TextBox 14">
@@ -8624,7 +8624,7 @@
             </p:txBody>
           </p:sp>
         </mc:Choice>
-        <mc:Fallback>
+        <mc:Fallback xmlns="">
           <p:sp>
             <p:nvSpPr>
               <p:cNvPr id="15" name="TextBox 14">
@@ -8677,8 +8677,8 @@
           </p:sp>
         </mc:Fallback>
       </mc:AlternateContent>
-      <mc:AlternateContent xmlns:mc="http://schemas.openxmlformats.org/markup-compatibility/2006">
-        <mc:Choice xmlns:a14="http://schemas.microsoft.com/office/drawing/2010/main" Requires="a14">
+      <mc:AlternateContent xmlns:mc="http://schemas.openxmlformats.org/markup-compatibility/2006" xmlns:a14="http://schemas.microsoft.com/office/drawing/2010/main">
+        <mc:Choice Requires="a14">
           <p:sp>
             <p:nvSpPr>
               <p:cNvPr id="17" name="TextBox 16">
@@ -9333,7 +9333,7 @@
             </p:txBody>
           </p:sp>
         </mc:Choice>
-        <mc:Fallback>
+        <mc:Fallback xmlns="">
           <p:sp>
             <p:nvSpPr>
               <p:cNvPr id="17" name="TextBox 16">
@@ -9843,7 +9843,7 @@
             <p:ph idx="1"/>
           </p:nvPr>
         </p:nvPicPr>
-        <p:blipFill>
+        <p:blipFill rotWithShape="1">
           <a:blip r:embed="rId2">
             <a:extLst>
               <a:ext uri="{28A0092B-C50C-407E-A947-70E740481C1C}">
@@ -9851,14 +9851,13 @@
               </a:ext>
             </a:extLst>
           </a:blip>
-          <a:stretch>
-            <a:fillRect/>
-          </a:stretch>
+          <a:srcRect t="14640" b="14640"/>
+          <a:stretch/>
         </p:blipFill>
         <p:spPr>
           <a:xfrm>
-            <a:off x="-1" y="-1565276"/>
-            <a:ext cx="10691813" cy="10691813"/>
+            <a:off x="0" y="0"/>
+            <a:ext cx="10691812" cy="7561263"/>
           </a:xfrm>
         </p:spPr>
       </p:pic>
